--- a/ゲーム科2年/00_前期/ゲーム開発Ⅱ/02_Unityでステージエディタ.pptx
+++ b/ゲーム科2年/00_前期/ゲーム開発Ⅱ/02_Unityでステージエディタ.pptx
@@ -11,47 +11,48 @@
     <p:sldId id="270" r:id="rId5"/>
     <p:sldId id="261" r:id="rId6"/>
     <p:sldId id="262" r:id="rId7"/>
-    <p:sldId id="263" r:id="rId8"/>
-    <p:sldId id="264" r:id="rId9"/>
-    <p:sldId id="265" r:id="rId10"/>
-    <p:sldId id="266" r:id="rId11"/>
-    <p:sldId id="267" r:id="rId12"/>
-    <p:sldId id="268" r:id="rId13"/>
-    <p:sldId id="269" r:id="rId14"/>
-    <p:sldId id="279" r:id="rId15"/>
-    <p:sldId id="271" r:id="rId16"/>
-    <p:sldId id="260" r:id="rId17"/>
-    <p:sldId id="272" r:id="rId18"/>
-    <p:sldId id="273" r:id="rId19"/>
-    <p:sldId id="274" r:id="rId20"/>
-    <p:sldId id="275" r:id="rId21"/>
-    <p:sldId id="276" r:id="rId22"/>
-    <p:sldId id="280" r:id="rId23"/>
-    <p:sldId id="281" r:id="rId24"/>
-    <p:sldId id="283" r:id="rId25"/>
-    <p:sldId id="284" r:id="rId26"/>
-    <p:sldId id="285" r:id="rId27"/>
-    <p:sldId id="286" r:id="rId28"/>
-    <p:sldId id="287" r:id="rId29"/>
-    <p:sldId id="282" r:id="rId30"/>
-    <p:sldId id="288" r:id="rId31"/>
-    <p:sldId id="289" r:id="rId32"/>
-    <p:sldId id="290" r:id="rId33"/>
-    <p:sldId id="291" r:id="rId34"/>
-    <p:sldId id="292" r:id="rId35"/>
-    <p:sldId id="293" r:id="rId36"/>
-    <p:sldId id="294" r:id="rId37"/>
-    <p:sldId id="295" r:id="rId38"/>
-    <p:sldId id="296" r:id="rId39"/>
-    <p:sldId id="297" r:id="rId40"/>
-    <p:sldId id="298" r:id="rId41"/>
-    <p:sldId id="299" r:id="rId42"/>
-    <p:sldId id="300" r:id="rId43"/>
-    <p:sldId id="301" r:id="rId44"/>
-    <p:sldId id="302" r:id="rId45"/>
-    <p:sldId id="303" r:id="rId46"/>
-    <p:sldId id="304" r:id="rId47"/>
-    <p:sldId id="305" r:id="rId48"/>
+    <p:sldId id="306" r:id="rId8"/>
+    <p:sldId id="263" r:id="rId9"/>
+    <p:sldId id="264" r:id="rId10"/>
+    <p:sldId id="265" r:id="rId11"/>
+    <p:sldId id="266" r:id="rId12"/>
+    <p:sldId id="267" r:id="rId13"/>
+    <p:sldId id="268" r:id="rId14"/>
+    <p:sldId id="269" r:id="rId15"/>
+    <p:sldId id="279" r:id="rId16"/>
+    <p:sldId id="271" r:id="rId17"/>
+    <p:sldId id="260" r:id="rId18"/>
+    <p:sldId id="272" r:id="rId19"/>
+    <p:sldId id="273" r:id="rId20"/>
+    <p:sldId id="274" r:id="rId21"/>
+    <p:sldId id="275" r:id="rId22"/>
+    <p:sldId id="276" r:id="rId23"/>
+    <p:sldId id="280" r:id="rId24"/>
+    <p:sldId id="281" r:id="rId25"/>
+    <p:sldId id="283" r:id="rId26"/>
+    <p:sldId id="284" r:id="rId27"/>
+    <p:sldId id="285" r:id="rId28"/>
+    <p:sldId id="286" r:id="rId29"/>
+    <p:sldId id="287" r:id="rId30"/>
+    <p:sldId id="282" r:id="rId31"/>
+    <p:sldId id="288" r:id="rId32"/>
+    <p:sldId id="289" r:id="rId33"/>
+    <p:sldId id="290" r:id="rId34"/>
+    <p:sldId id="291" r:id="rId35"/>
+    <p:sldId id="292" r:id="rId36"/>
+    <p:sldId id="293" r:id="rId37"/>
+    <p:sldId id="294" r:id="rId38"/>
+    <p:sldId id="295" r:id="rId39"/>
+    <p:sldId id="296" r:id="rId40"/>
+    <p:sldId id="297" r:id="rId41"/>
+    <p:sldId id="298" r:id="rId42"/>
+    <p:sldId id="299" r:id="rId43"/>
+    <p:sldId id="300" r:id="rId44"/>
+    <p:sldId id="301" r:id="rId45"/>
+    <p:sldId id="302" r:id="rId46"/>
+    <p:sldId id="303" r:id="rId47"/>
+    <p:sldId id="304" r:id="rId48"/>
+    <p:sldId id="305" r:id="rId49"/>
   </p:sldIdLst>
   <p:sldSz cx="12192000" cy="6858000"/>
   <p:notesSz cx="6858000" cy="9144000"/>
@@ -305,7 +306,7 @@
           <a:p>
             <a:fld id="{E9CC885B-4903-4D54-9A93-00025F12DED9}" type="datetimeFigureOut">
               <a:rPr kumimoji="1" lang="ja-JP" altLang="en-US" smtClean="0"/>
-              <a:t>2025/10/27</a:t>
+              <a:t>2026/1/29</a:t>
             </a:fld>
             <a:endParaRPr kumimoji="1" lang="ja-JP" altLang="en-US"/>
           </a:p>
@@ -535,7 +536,7 @@
           <a:p>
             <a:fld id="{E9CC885B-4903-4D54-9A93-00025F12DED9}" type="datetimeFigureOut">
               <a:rPr kumimoji="1" lang="ja-JP" altLang="en-US" smtClean="0"/>
-              <a:t>2025/10/27</a:t>
+              <a:t>2026/1/29</a:t>
             </a:fld>
             <a:endParaRPr kumimoji="1" lang="ja-JP" altLang="en-US"/>
           </a:p>
@@ -775,7 +776,7 @@
           <a:p>
             <a:fld id="{E9CC885B-4903-4D54-9A93-00025F12DED9}" type="datetimeFigureOut">
               <a:rPr kumimoji="1" lang="ja-JP" altLang="en-US" smtClean="0"/>
-              <a:t>2025/10/27</a:t>
+              <a:t>2026/1/29</a:t>
             </a:fld>
             <a:endParaRPr kumimoji="1" lang="ja-JP" altLang="en-US"/>
           </a:p>
@@ -1005,7 +1006,7 @@
           <a:p>
             <a:fld id="{E9CC885B-4903-4D54-9A93-00025F12DED9}" type="datetimeFigureOut">
               <a:rPr kumimoji="1" lang="ja-JP" altLang="en-US" smtClean="0"/>
-              <a:t>2025/10/27</a:t>
+              <a:t>2026/1/29</a:t>
             </a:fld>
             <a:endParaRPr kumimoji="1" lang="ja-JP" altLang="en-US"/>
           </a:p>
@@ -1280,7 +1281,7 @@
           <a:p>
             <a:fld id="{E9CC885B-4903-4D54-9A93-00025F12DED9}" type="datetimeFigureOut">
               <a:rPr kumimoji="1" lang="ja-JP" altLang="en-US" smtClean="0"/>
-              <a:t>2025/10/27</a:t>
+              <a:t>2026/1/29</a:t>
             </a:fld>
             <a:endParaRPr kumimoji="1" lang="ja-JP" altLang="en-US"/>
           </a:p>
@@ -1609,7 +1610,7 @@
           <a:p>
             <a:fld id="{E9CC885B-4903-4D54-9A93-00025F12DED9}" type="datetimeFigureOut">
               <a:rPr kumimoji="1" lang="ja-JP" altLang="en-US" smtClean="0"/>
-              <a:t>2025/10/27</a:t>
+              <a:t>2026/1/29</a:t>
             </a:fld>
             <a:endParaRPr kumimoji="1" lang="ja-JP" altLang="en-US"/>
           </a:p>
@@ -2085,7 +2086,7 @@
           <a:p>
             <a:fld id="{E9CC885B-4903-4D54-9A93-00025F12DED9}" type="datetimeFigureOut">
               <a:rPr kumimoji="1" lang="ja-JP" altLang="en-US" smtClean="0"/>
-              <a:t>2025/10/27</a:t>
+              <a:t>2026/1/29</a:t>
             </a:fld>
             <a:endParaRPr kumimoji="1" lang="ja-JP" altLang="en-US"/>
           </a:p>
@@ -2226,7 +2227,7 @@
           <a:p>
             <a:fld id="{E9CC885B-4903-4D54-9A93-00025F12DED9}" type="datetimeFigureOut">
               <a:rPr kumimoji="1" lang="ja-JP" altLang="en-US" smtClean="0"/>
-              <a:t>2025/10/27</a:t>
+              <a:t>2026/1/29</a:t>
             </a:fld>
             <a:endParaRPr kumimoji="1" lang="ja-JP" altLang="en-US"/>
           </a:p>
@@ -2339,7 +2340,7 @@
           <a:p>
             <a:fld id="{E9CC885B-4903-4D54-9A93-00025F12DED9}" type="datetimeFigureOut">
               <a:rPr kumimoji="1" lang="ja-JP" altLang="en-US" smtClean="0"/>
-              <a:t>2025/10/27</a:t>
+              <a:t>2026/1/29</a:t>
             </a:fld>
             <a:endParaRPr kumimoji="1" lang="ja-JP" altLang="en-US"/>
           </a:p>
@@ -2682,7 +2683,7 @@
           <a:p>
             <a:fld id="{E9CC885B-4903-4D54-9A93-00025F12DED9}" type="datetimeFigureOut">
               <a:rPr kumimoji="1" lang="ja-JP" altLang="en-US" smtClean="0"/>
-              <a:t>2025/10/27</a:t>
+              <a:t>2026/1/29</a:t>
             </a:fld>
             <a:endParaRPr kumimoji="1" lang="ja-JP" altLang="en-US"/>
           </a:p>
@@ -2970,7 +2971,7 @@
           <a:p>
             <a:fld id="{E9CC885B-4903-4D54-9A93-00025F12DED9}" type="datetimeFigureOut">
               <a:rPr kumimoji="1" lang="ja-JP" altLang="en-US" smtClean="0"/>
-              <a:t>2025/10/27</a:t>
+              <a:t>2026/1/29</a:t>
             </a:fld>
             <a:endParaRPr kumimoji="1" lang="ja-JP" altLang="en-US"/>
           </a:p>
@@ -3243,7 +3244,7 @@
           <a:p>
             <a:fld id="{E9CC885B-4903-4D54-9A93-00025F12DED9}" type="datetimeFigureOut">
               <a:rPr kumimoji="1" lang="ja-JP" altLang="en-US" smtClean="0"/>
-              <a:t>2025/10/27</a:t>
+              <a:t>2026/1/29</a:t>
             </a:fld>
             <a:endParaRPr kumimoji="1" lang="ja-JP" altLang="en-US"/>
           </a:p>
@@ -3877,7 +3878,7 @@
         <p:spPr>
           <a:xfrm>
             <a:off x="567542" y="1216429"/>
-            <a:ext cx="5840060" cy="461665"/>
+            <a:ext cx="7752443" cy="461665"/>
           </a:xfrm>
           <a:prstGeom prst="rect">
             <a:avLst/>
@@ -3890,6 +3891,14 @@
           </a:bodyPr>
           <a:lstStyle/>
           <a:p>
+            <a:r>
+              <a:rPr lang="en-US" altLang="ja-JP" sz="2400" dirty="0"/>
+              <a:t>Scripts</a:t>
+            </a:r>
+            <a:r>
+              <a:rPr lang="ja-JP" altLang="en-US" sz="2400" dirty="0"/>
+              <a:t>フォルダに「</a:t>
+            </a:r>
             <a:r>
               <a:rPr lang="en-US" altLang="ja-JP" sz="2400" b="1" dirty="0" err="1">
                 <a:solidFill>
@@ -3900,7 +3909,7 @@
             </a:r>
             <a:r>
               <a:rPr lang="ja-JP" altLang="en-US" sz="2400" dirty="0"/>
-              <a:t>を書きます。（その１）</a:t>
+              <a:t>」を追加します。</a:t>
             </a:r>
             <a:endParaRPr kumimoji="1" lang="en-US" altLang="ja-JP" sz="2400" dirty="0"/>
           </a:p>
@@ -3908,10 +3917,10 @@
       </p:sp>
       <p:pic>
         <p:nvPicPr>
-          <p:cNvPr id="5" name="図 4">
-            <a:extLst>
-              <a:ext uri="{FF2B5EF4-FFF2-40B4-BE49-F238E27FC236}">
-                <a16:creationId xmlns:a16="http://schemas.microsoft.com/office/drawing/2014/main" id="{270D5648-C284-48CD-8353-D4F5C0E38E07}"/>
+          <p:cNvPr id="3" name="図 2">
+            <a:extLst>
+              <a:ext uri="{FF2B5EF4-FFF2-40B4-BE49-F238E27FC236}">
+                <a16:creationId xmlns:a16="http://schemas.microsoft.com/office/drawing/2014/main" id="{B9043259-7491-4CC9-B7B7-68689BB693BD}"/>
               </a:ext>
             </a:extLst>
           </p:cNvPr>
@@ -3928,8 +3937,8 @@
         </p:blipFill>
         <p:spPr>
           <a:xfrm>
-            <a:off x="567542" y="1817795"/>
-            <a:ext cx="5016559" cy="4548252"/>
+            <a:off x="567542" y="1817794"/>
+            <a:ext cx="2510506" cy="3121759"/>
           </a:xfrm>
           <a:prstGeom prst="rect">
             <a:avLst/>
@@ -3939,7 +3948,7 @@
     </p:spTree>
     <p:extLst>
       <p:ext uri="{BB962C8B-B14F-4D97-AF65-F5344CB8AC3E}">
-        <p14:creationId xmlns:p14="http://schemas.microsoft.com/office/powerpoint/2010/main" val="719624345"/>
+        <p14:creationId xmlns:p14="http://schemas.microsoft.com/office/powerpoint/2010/main" val="1143449723"/>
       </p:ext>
     </p:extLst>
   </p:cSld>
@@ -4040,7 +4049,7 @@
             </a:r>
             <a:r>
               <a:rPr lang="ja-JP" altLang="en-US" sz="2400" dirty="0"/>
-              <a:t>を書きます。（その２）</a:t>
+              <a:t>を書きます。（その１）</a:t>
             </a:r>
             <a:endParaRPr kumimoji="1" lang="en-US" altLang="ja-JP" sz="2400" dirty="0"/>
           </a:p>
@@ -4048,10 +4057,10 @@
       </p:sp>
       <p:pic>
         <p:nvPicPr>
-          <p:cNvPr id="3" name="図 2">
-            <a:extLst>
-              <a:ext uri="{FF2B5EF4-FFF2-40B4-BE49-F238E27FC236}">
-                <a16:creationId xmlns:a16="http://schemas.microsoft.com/office/drawing/2014/main" id="{07DF1E93-D965-499E-8D47-552CB503E096}"/>
+          <p:cNvPr id="5" name="図 4">
+            <a:extLst>
+              <a:ext uri="{FF2B5EF4-FFF2-40B4-BE49-F238E27FC236}">
+                <a16:creationId xmlns:a16="http://schemas.microsoft.com/office/drawing/2014/main" id="{270D5648-C284-48CD-8353-D4F5C0E38E07}"/>
               </a:ext>
             </a:extLst>
           </p:cNvPr>
@@ -4068,8 +4077,8 @@
         </p:blipFill>
         <p:spPr>
           <a:xfrm>
-            <a:off x="567542" y="1817794"/>
-            <a:ext cx="7832387" cy="4581046"/>
+            <a:off x="567542" y="1817795"/>
+            <a:ext cx="5016559" cy="4548252"/>
           </a:xfrm>
           <a:prstGeom prst="rect">
             <a:avLst/>
@@ -4079,7 +4088,7 @@
     </p:spTree>
     <p:extLst>
       <p:ext uri="{BB962C8B-B14F-4D97-AF65-F5344CB8AC3E}">
-        <p14:creationId xmlns:p14="http://schemas.microsoft.com/office/powerpoint/2010/main" val="3131920749"/>
+        <p14:creationId xmlns:p14="http://schemas.microsoft.com/office/powerpoint/2010/main" val="719624345"/>
       </p:ext>
     </p:extLst>
   </p:cSld>
@@ -4157,7 +4166,7 @@
         <p:spPr>
           <a:xfrm>
             <a:off x="567542" y="1216429"/>
-            <a:ext cx="9009198" cy="830997"/>
+            <a:ext cx="5840060" cy="461665"/>
           </a:xfrm>
           <a:prstGeom prst="rect">
             <a:avLst/>
@@ -4171,51 +4180,16 @@
           <a:lstStyle/>
           <a:p>
             <a:r>
-              <a:rPr kumimoji="1" lang="ja-JP" altLang="en-US" sz="2400" dirty="0"/>
-              <a:t>配置するオブジェクトの</a:t>
-            </a:r>
-            <a:r>
-              <a:rPr kumimoji="1" lang="ja-JP" altLang="en-US" sz="2400" b="1" dirty="0">
+              <a:rPr lang="en-US" altLang="ja-JP" sz="2400" b="1" dirty="0" err="1">
                 <a:solidFill>
                   <a:srgbClr val="FF0000"/>
                 </a:solidFill>
               </a:rPr>
-              <a:t>種類ごとに</a:t>
-            </a:r>
-            <a:r>
-              <a:rPr kumimoji="1" lang="en-US" altLang="ja-JP" sz="2400" b="1" dirty="0">
-                <a:solidFill>
-                  <a:srgbClr val="FF0000"/>
-                </a:solidFill>
-              </a:rPr>
-              <a:t>ID</a:t>
-            </a:r>
-            <a:r>
-              <a:rPr kumimoji="1" lang="ja-JP" altLang="en-US" sz="2400" b="1" dirty="0">
-                <a:solidFill>
-                  <a:srgbClr val="FF0000"/>
-                </a:solidFill>
-              </a:rPr>
-              <a:t>が必要</a:t>
-            </a:r>
-            <a:r>
-              <a:rPr kumimoji="1" lang="ja-JP" altLang="en-US" sz="2400" dirty="0"/>
-              <a:t>になります。</a:t>
-            </a:r>
-            <a:endParaRPr kumimoji="1" lang="en-US" altLang="ja-JP" sz="2400" dirty="0"/>
-          </a:p>
-          <a:p>
+              <a:t>StageObject.cs</a:t>
+            </a:r>
             <a:r>
               <a:rPr lang="ja-JP" altLang="en-US" sz="2400" dirty="0"/>
-              <a:t>これがないと、何を配置したか</a:t>
-            </a:r>
-            <a:r>
-              <a:rPr lang="en-US" altLang="ja-JP" sz="2400" dirty="0" err="1"/>
-              <a:t>DxLib</a:t>
-            </a:r>
-            <a:r>
-              <a:rPr lang="ja-JP" altLang="en-US" sz="2400" dirty="0"/>
-              <a:t>側がわからないからです。</a:t>
+              <a:t>を書きます。（その２）</a:t>
             </a:r>
             <a:endParaRPr kumimoji="1" lang="en-US" altLang="ja-JP" sz="2400" dirty="0"/>
           </a:p>
@@ -4223,10 +4197,10 @@
       </p:sp>
       <p:pic>
         <p:nvPicPr>
-          <p:cNvPr id="5" name="図 4">
-            <a:extLst>
-              <a:ext uri="{FF2B5EF4-FFF2-40B4-BE49-F238E27FC236}">
-                <a16:creationId xmlns:a16="http://schemas.microsoft.com/office/drawing/2014/main" id="{E597263A-E44F-43E9-9901-BD1392A515A2}"/>
+          <p:cNvPr id="3" name="図 2">
+            <a:extLst>
+              <a:ext uri="{FF2B5EF4-FFF2-40B4-BE49-F238E27FC236}">
+                <a16:creationId xmlns:a16="http://schemas.microsoft.com/office/drawing/2014/main" id="{07DF1E93-D965-499E-8D47-552CB503E096}"/>
               </a:ext>
             </a:extLst>
           </p:cNvPr>
@@ -4243,8 +4217,8 @@
         </p:blipFill>
         <p:spPr>
           <a:xfrm>
-            <a:off x="567542" y="2187126"/>
-            <a:ext cx="3537796" cy="4070239"/>
+            <a:off x="567542" y="1817794"/>
+            <a:ext cx="7832387" cy="4581046"/>
           </a:xfrm>
           <a:prstGeom prst="rect">
             <a:avLst/>
@@ -4254,7 +4228,7 @@
     </p:spTree>
     <p:extLst>
       <p:ext uri="{BB962C8B-B14F-4D97-AF65-F5344CB8AC3E}">
-        <p14:creationId xmlns:p14="http://schemas.microsoft.com/office/powerpoint/2010/main" val="2485971364"/>
+        <p14:creationId xmlns:p14="http://schemas.microsoft.com/office/powerpoint/2010/main" val="3131920749"/>
       </p:ext>
     </p:extLst>
   </p:cSld>
@@ -4332,7 +4306,7 @@
         <p:spPr>
           <a:xfrm>
             <a:off x="567542" y="1216429"/>
-            <a:ext cx="8917826" cy="461665"/>
+            <a:ext cx="9009198" cy="830997"/>
           </a:xfrm>
           <a:prstGeom prst="rect">
             <a:avLst/>
@@ -4346,16 +4320,51 @@
           <a:lstStyle/>
           <a:p>
             <a:r>
-              <a:rPr lang="en-US" altLang="ja-JP" sz="2400" b="1" dirty="0" err="1">
+              <a:rPr kumimoji="1" lang="ja-JP" altLang="en-US" sz="2400" dirty="0"/>
+              <a:t>配置するオブジェクトの</a:t>
+            </a:r>
+            <a:r>
+              <a:rPr kumimoji="1" lang="ja-JP" altLang="en-US" sz="2400" b="1" dirty="0">
                 <a:solidFill>
                   <a:srgbClr val="FF0000"/>
                 </a:solidFill>
               </a:rPr>
-              <a:t>StageObject.cs</a:t>
-            </a:r>
+              <a:t>種類ごとに</a:t>
+            </a:r>
+            <a:r>
+              <a:rPr kumimoji="1" lang="en-US" altLang="ja-JP" sz="2400" b="1" dirty="0">
+                <a:solidFill>
+                  <a:srgbClr val="FF0000"/>
+                </a:solidFill>
+              </a:rPr>
+              <a:t>ID</a:t>
+            </a:r>
+            <a:r>
+              <a:rPr kumimoji="1" lang="ja-JP" altLang="en-US" sz="2400" b="1" dirty="0">
+                <a:solidFill>
+                  <a:srgbClr val="FF0000"/>
+                </a:solidFill>
+              </a:rPr>
+              <a:t>が必要</a:t>
+            </a:r>
+            <a:r>
+              <a:rPr kumimoji="1" lang="ja-JP" altLang="en-US" sz="2400" dirty="0"/>
+              <a:t>になります。</a:t>
+            </a:r>
+            <a:endParaRPr kumimoji="1" lang="en-US" altLang="ja-JP" sz="2400" dirty="0"/>
+          </a:p>
+          <a:p>
             <a:r>
               <a:rPr lang="ja-JP" altLang="en-US" sz="2400" dirty="0"/>
-              <a:t>がついているオブジェクトを自動登録します。</a:t>
+              <a:t>これがないと、何を配置したか</a:t>
+            </a:r>
+            <a:r>
+              <a:rPr lang="en-US" altLang="ja-JP" sz="2400" dirty="0" err="1"/>
+              <a:t>DxLib</a:t>
+            </a:r>
+            <a:r>
+              <a:rPr lang="ja-JP" altLang="en-US" sz="2400" dirty="0"/>
+              <a:t>側がわからないからです。</a:t>
             </a:r>
             <a:endParaRPr kumimoji="1" lang="en-US" altLang="ja-JP" sz="2400" dirty="0"/>
           </a:p>
@@ -4363,10 +4372,10 @@
       </p:sp>
       <p:pic>
         <p:nvPicPr>
-          <p:cNvPr id="3" name="図 2">
-            <a:extLst>
-              <a:ext uri="{FF2B5EF4-FFF2-40B4-BE49-F238E27FC236}">
-                <a16:creationId xmlns:a16="http://schemas.microsoft.com/office/drawing/2014/main" id="{07DF1E93-D965-499E-8D47-552CB503E096}"/>
+          <p:cNvPr id="5" name="図 4">
+            <a:extLst>
+              <a:ext uri="{FF2B5EF4-FFF2-40B4-BE49-F238E27FC236}">
+                <a16:creationId xmlns:a16="http://schemas.microsoft.com/office/drawing/2014/main" id="{E597263A-E44F-43E9-9901-BD1392A515A2}"/>
               </a:ext>
             </a:extLst>
           </p:cNvPr>
@@ -4383,64 +4392,18 @@
         </p:blipFill>
         <p:spPr>
           <a:xfrm>
-            <a:off x="567542" y="1817794"/>
-            <a:ext cx="7832387" cy="4581046"/>
+            <a:off x="567542" y="2187126"/>
+            <a:ext cx="3537796" cy="4070239"/>
           </a:xfrm>
           <a:prstGeom prst="rect">
             <a:avLst/>
           </a:prstGeom>
         </p:spPr>
       </p:pic>
-      <p:sp>
-        <p:nvSpPr>
-          <p:cNvPr id="5" name="テキスト ボックス 4">
-            <a:extLst>
-              <a:ext uri="{FF2B5EF4-FFF2-40B4-BE49-F238E27FC236}">
-                <a16:creationId xmlns:a16="http://schemas.microsoft.com/office/drawing/2014/main" id="{193FC95C-DAA4-4222-BC39-376947C186DE}"/>
-              </a:ext>
-            </a:extLst>
-          </p:cNvPr>
-          <p:cNvSpPr txBox="1"/>
-          <p:nvPr/>
-        </p:nvSpPr>
-        <p:spPr>
-          <a:xfrm>
-            <a:off x="5157471" y="5567843"/>
-            <a:ext cx="6647974" cy="830997"/>
-          </a:xfrm>
-          <a:prstGeom prst="rect">
-            <a:avLst/>
-          </a:prstGeom>
-          <a:noFill/>
-        </p:spPr>
-        <p:txBody>
-          <a:bodyPr wrap="none" rtlCol="0">
-            <a:spAutoFit/>
-          </a:bodyPr>
-          <a:lstStyle/>
-          <a:p>
-            <a:r>
-              <a:rPr kumimoji="1" lang="en-US" altLang="ja-JP" sz="2400" b="1" dirty="0">
-                <a:solidFill>
-                  <a:srgbClr val="00B050"/>
-                </a:solidFill>
-              </a:rPr>
-              <a:t>MEMO</a:t>
-            </a:r>
-          </a:p>
-          <a:p>
-            <a:r>
-              <a:rPr kumimoji="1" lang="ja-JP" altLang="en-US" sz="2400" dirty="0"/>
-              <a:t>後でブレークポイントを置いて確認してみよう</a:t>
-            </a:r>
-            <a:endParaRPr kumimoji="1" lang="en-US" altLang="ja-JP" sz="2400" dirty="0"/>
-          </a:p>
-        </p:txBody>
-      </p:sp>
     </p:spTree>
     <p:extLst>
       <p:ext uri="{BB962C8B-B14F-4D97-AF65-F5344CB8AC3E}">
-        <p14:creationId xmlns:p14="http://schemas.microsoft.com/office/powerpoint/2010/main" val="1261068174"/>
+        <p14:creationId xmlns:p14="http://schemas.microsoft.com/office/powerpoint/2010/main" val="2485971364"/>
       </p:ext>
     </p:extLst>
   </p:cSld>
@@ -4518,7 +4481,7 @@
         <p:spPr>
           <a:xfrm>
             <a:off x="567542" y="1216429"/>
-            <a:ext cx="9740167" cy="461665"/>
+            <a:ext cx="8917826" cy="461665"/>
           </a:xfrm>
           <a:prstGeom prst="rect">
             <a:avLst/>
@@ -4532,28 +4495,16 @@
           <a:lstStyle/>
           <a:p>
             <a:r>
-              <a:rPr kumimoji="1" lang="ja-JP" altLang="en-US" sz="2400" dirty="0"/>
-              <a:t>各プレハブに</a:t>
-            </a:r>
-            <a:r>
-              <a:rPr kumimoji="1" lang="en-US" altLang="ja-JP" sz="2400" b="1" dirty="0" err="1">
+              <a:rPr lang="en-US" altLang="ja-JP" sz="2400" b="1" dirty="0" err="1">
                 <a:solidFill>
                   <a:srgbClr val="FF0000"/>
                 </a:solidFill>
               </a:rPr>
-              <a:t>StageObject</a:t>
-            </a:r>
-            <a:r>
-              <a:rPr kumimoji="1" lang="ja-JP" altLang="en-US" sz="2400" dirty="0"/>
-              <a:t>を追加して、</a:t>
-            </a:r>
-            <a:r>
-              <a:rPr lang="en-US" altLang="ja-JP" sz="2400" dirty="0"/>
-              <a:t>ID</a:t>
+              <a:t>StageObject.cs</a:t>
             </a:r>
             <a:r>
               <a:rPr lang="ja-JP" altLang="en-US" sz="2400" dirty="0"/>
-              <a:t>を設定してあげましょう。</a:t>
+              <a:t>がついているオブジェクトを自動登録します。</a:t>
             </a:r>
             <a:endParaRPr kumimoji="1" lang="en-US" altLang="ja-JP" sz="2400" dirty="0"/>
           </a:p>
@@ -4561,10 +4512,10 @@
       </p:sp>
       <p:pic>
         <p:nvPicPr>
-          <p:cNvPr id="7" name="図 6">
-            <a:extLst>
-              <a:ext uri="{FF2B5EF4-FFF2-40B4-BE49-F238E27FC236}">
-                <a16:creationId xmlns:a16="http://schemas.microsoft.com/office/drawing/2014/main" id="{E44CAA51-2C04-4EB9-8504-1FE3D23603C7}"/>
+          <p:cNvPr id="3" name="図 2">
+            <a:extLst>
+              <a:ext uri="{FF2B5EF4-FFF2-40B4-BE49-F238E27FC236}">
+                <a16:creationId xmlns:a16="http://schemas.microsoft.com/office/drawing/2014/main" id="{07DF1E93-D965-499E-8D47-552CB503E096}"/>
               </a:ext>
             </a:extLst>
           </p:cNvPr>
@@ -4581,8 +4532,8 @@
         </p:blipFill>
         <p:spPr>
           <a:xfrm>
-            <a:off x="567542" y="1817795"/>
-            <a:ext cx="10282212" cy="4548252"/>
+            <a:off x="567542" y="1817794"/>
+            <a:ext cx="7832387" cy="4581046"/>
           </a:xfrm>
           <a:prstGeom prst="rect">
             <a:avLst/>
@@ -4591,62 +4542,54 @@
       </p:pic>
       <p:sp>
         <p:nvSpPr>
-          <p:cNvPr id="8" name="矢印: 右 7">
-            <a:extLst>
-              <a:ext uri="{FF2B5EF4-FFF2-40B4-BE49-F238E27FC236}">
-                <a16:creationId xmlns:a16="http://schemas.microsoft.com/office/drawing/2014/main" id="{9BFF1245-B9B7-480F-9C43-5961AB52DC96}"/>
-              </a:ext>
-            </a:extLst>
-          </p:cNvPr>
-          <p:cNvSpPr/>
-          <p:nvPr/>
-        </p:nvSpPr>
-        <p:spPr>
-          <a:xfrm rot="14099625">
-            <a:off x="9930849" y="5683623"/>
-            <a:ext cx="493059" cy="313765"/>
-          </a:xfrm>
-          <a:prstGeom prst="rightArrow">
-            <a:avLst/>
-          </a:prstGeom>
-          <a:solidFill>
-            <a:srgbClr val="FF0000"/>
-          </a:solidFill>
-          <a:ln>
-            <a:solidFill>
-              <a:schemeClr val="tx1"/>
-            </a:solidFill>
-          </a:ln>
-        </p:spPr>
-        <p:style>
-          <a:lnRef idx="2">
-            <a:schemeClr val="accent1">
-              <a:shade val="50000"/>
-            </a:schemeClr>
-          </a:lnRef>
-          <a:fillRef idx="1">
-            <a:schemeClr val="accent1"/>
-          </a:fillRef>
-          <a:effectRef idx="0">
-            <a:schemeClr val="accent1"/>
-          </a:effectRef>
-          <a:fontRef idx="minor">
-            <a:schemeClr val="lt1"/>
-          </a:fontRef>
-        </p:style>
-        <p:txBody>
-          <a:bodyPr rtlCol="0" anchor="ctr"/>
-          <a:lstStyle/>
-          <a:p>
-            <a:pPr algn="ctr"/>
-            <a:endParaRPr kumimoji="1" lang="ja-JP" altLang="en-US"/>
+          <p:cNvPr id="5" name="テキスト ボックス 4">
+            <a:extLst>
+              <a:ext uri="{FF2B5EF4-FFF2-40B4-BE49-F238E27FC236}">
+                <a16:creationId xmlns:a16="http://schemas.microsoft.com/office/drawing/2014/main" id="{193FC95C-DAA4-4222-BC39-376947C186DE}"/>
+              </a:ext>
+            </a:extLst>
+          </p:cNvPr>
+          <p:cNvSpPr txBox="1"/>
+          <p:nvPr/>
+        </p:nvSpPr>
+        <p:spPr>
+          <a:xfrm>
+            <a:off x="5157471" y="5567843"/>
+            <a:ext cx="6647974" cy="830997"/>
+          </a:xfrm>
+          <a:prstGeom prst="rect">
+            <a:avLst/>
+          </a:prstGeom>
+          <a:noFill/>
+        </p:spPr>
+        <p:txBody>
+          <a:bodyPr wrap="none" rtlCol="0">
+            <a:spAutoFit/>
+          </a:bodyPr>
+          <a:lstStyle/>
+          <a:p>
+            <a:r>
+              <a:rPr kumimoji="1" lang="en-US" altLang="ja-JP" sz="2400" b="1" dirty="0">
+                <a:solidFill>
+                  <a:srgbClr val="00B050"/>
+                </a:solidFill>
+              </a:rPr>
+              <a:t>MEMO</a:t>
+            </a:r>
+          </a:p>
+          <a:p>
+            <a:r>
+              <a:rPr kumimoji="1" lang="ja-JP" altLang="en-US" sz="2400" dirty="0"/>
+              <a:t>後でブレークポイントを置いて確認してみよう</a:t>
+            </a:r>
+            <a:endParaRPr kumimoji="1" lang="en-US" altLang="ja-JP" sz="2400" dirty="0"/>
           </a:p>
         </p:txBody>
       </p:sp>
     </p:spTree>
     <p:extLst>
       <p:ext uri="{BB962C8B-B14F-4D97-AF65-F5344CB8AC3E}">
-        <p14:creationId xmlns:p14="http://schemas.microsoft.com/office/powerpoint/2010/main" val="1844414277"/>
+        <p14:creationId xmlns:p14="http://schemas.microsoft.com/office/powerpoint/2010/main" val="1261068174"/>
       </p:ext>
     </p:extLst>
   </p:cSld>
@@ -4687,8 +4630,8 @@
         </p:nvSpPr>
         <p:spPr>
           <a:xfrm>
-            <a:off x="4447151" y="3136613"/>
-            <a:ext cx="3297698" cy="584775"/>
+            <a:off x="567542" y="491954"/>
+            <a:ext cx="1826141" cy="584775"/>
           </a:xfrm>
           <a:prstGeom prst="rect">
             <a:avLst/>
@@ -4702,21 +4645,157 @@
           <a:lstStyle/>
           <a:p>
             <a:r>
-              <a:rPr kumimoji="1" lang="en-US" altLang="ja-JP" sz="3200" b="1" u="sng" dirty="0"/>
-              <a:t>Unity</a:t>
-            </a:r>
-            <a:r>
               <a:rPr kumimoji="1" lang="ja-JP" altLang="en-US" sz="3200" b="1" u="sng" dirty="0"/>
-              <a:t>の機能拡張</a:t>
+              <a:t>はじめに</a:t>
             </a:r>
             <a:endParaRPr kumimoji="1" lang="en-US" altLang="ja-JP" sz="3200" b="1" u="sng" dirty="0"/>
+          </a:p>
+        </p:txBody>
+      </p:sp>
+      <p:sp>
+        <p:nvSpPr>
+          <p:cNvPr id="6" name="テキスト ボックス 5">
+            <a:extLst>
+              <a:ext uri="{FF2B5EF4-FFF2-40B4-BE49-F238E27FC236}">
+                <a16:creationId xmlns:a16="http://schemas.microsoft.com/office/drawing/2014/main" id="{55830AD6-028B-4C4E-80BF-B70DFC1C3A46}"/>
+              </a:ext>
+            </a:extLst>
+          </p:cNvPr>
+          <p:cNvSpPr txBox="1"/>
+          <p:nvPr/>
+        </p:nvSpPr>
+        <p:spPr>
+          <a:xfrm>
+            <a:off x="567542" y="1216429"/>
+            <a:ext cx="9740167" cy="461665"/>
+          </a:xfrm>
+          <a:prstGeom prst="rect">
+            <a:avLst/>
+          </a:prstGeom>
+          <a:noFill/>
+        </p:spPr>
+        <p:txBody>
+          <a:bodyPr wrap="none" rtlCol="0">
+            <a:spAutoFit/>
+          </a:bodyPr>
+          <a:lstStyle/>
+          <a:p>
+            <a:r>
+              <a:rPr kumimoji="1" lang="ja-JP" altLang="en-US" sz="2400" dirty="0"/>
+              <a:t>各プレハブに</a:t>
+            </a:r>
+            <a:r>
+              <a:rPr kumimoji="1" lang="en-US" altLang="ja-JP" sz="2400" b="1" dirty="0" err="1">
+                <a:solidFill>
+                  <a:srgbClr val="FF0000"/>
+                </a:solidFill>
+              </a:rPr>
+              <a:t>StageObject</a:t>
+            </a:r>
+            <a:r>
+              <a:rPr kumimoji="1" lang="ja-JP" altLang="en-US" sz="2400" dirty="0"/>
+              <a:t>を追加して、</a:t>
+            </a:r>
+            <a:r>
+              <a:rPr lang="en-US" altLang="ja-JP" sz="2400" dirty="0"/>
+              <a:t>ID</a:t>
+            </a:r>
+            <a:r>
+              <a:rPr lang="ja-JP" altLang="en-US" sz="2400" dirty="0"/>
+              <a:t>を設定してあげましょう。</a:t>
+            </a:r>
+            <a:endParaRPr kumimoji="1" lang="en-US" altLang="ja-JP" sz="2400" dirty="0"/>
+          </a:p>
+        </p:txBody>
+      </p:sp>
+      <p:pic>
+        <p:nvPicPr>
+          <p:cNvPr id="7" name="図 6">
+            <a:extLst>
+              <a:ext uri="{FF2B5EF4-FFF2-40B4-BE49-F238E27FC236}">
+                <a16:creationId xmlns:a16="http://schemas.microsoft.com/office/drawing/2014/main" id="{E44CAA51-2C04-4EB9-8504-1FE3D23603C7}"/>
+              </a:ext>
+            </a:extLst>
+          </p:cNvPr>
+          <p:cNvPicPr>
+            <a:picLocks noChangeAspect="1"/>
+          </p:cNvPicPr>
+          <p:nvPr/>
+        </p:nvPicPr>
+        <p:blipFill>
+          <a:blip r:embed="rId2"/>
+          <a:stretch>
+            <a:fillRect/>
+          </a:stretch>
+        </p:blipFill>
+        <p:spPr>
+          <a:xfrm>
+            <a:off x="567542" y="1817795"/>
+            <a:ext cx="10282212" cy="4548252"/>
+          </a:xfrm>
+          <a:prstGeom prst="rect">
+            <a:avLst/>
+          </a:prstGeom>
+        </p:spPr>
+      </p:pic>
+      <p:sp>
+        <p:nvSpPr>
+          <p:cNvPr id="8" name="矢印: 右 7">
+            <a:extLst>
+              <a:ext uri="{FF2B5EF4-FFF2-40B4-BE49-F238E27FC236}">
+                <a16:creationId xmlns:a16="http://schemas.microsoft.com/office/drawing/2014/main" id="{9BFF1245-B9B7-480F-9C43-5961AB52DC96}"/>
+              </a:ext>
+            </a:extLst>
+          </p:cNvPr>
+          <p:cNvSpPr/>
+          <p:nvPr/>
+        </p:nvSpPr>
+        <p:spPr>
+          <a:xfrm rot="14099625">
+            <a:off x="9930849" y="5683623"/>
+            <a:ext cx="493059" cy="313765"/>
+          </a:xfrm>
+          <a:prstGeom prst="rightArrow">
+            <a:avLst/>
+          </a:prstGeom>
+          <a:solidFill>
+            <a:srgbClr val="FF0000"/>
+          </a:solidFill>
+          <a:ln>
+            <a:solidFill>
+              <a:schemeClr val="tx1"/>
+            </a:solidFill>
+          </a:ln>
+        </p:spPr>
+        <p:style>
+          <a:lnRef idx="2">
+            <a:schemeClr val="accent1">
+              <a:shade val="50000"/>
+            </a:schemeClr>
+          </a:lnRef>
+          <a:fillRef idx="1">
+            <a:schemeClr val="accent1"/>
+          </a:fillRef>
+          <a:effectRef idx="0">
+            <a:schemeClr val="accent1"/>
+          </a:effectRef>
+          <a:fontRef idx="minor">
+            <a:schemeClr val="lt1"/>
+          </a:fontRef>
+        </p:style>
+        <p:txBody>
+          <a:bodyPr rtlCol="0" anchor="ctr"/>
+          <a:lstStyle/>
+          <a:p>
+            <a:pPr algn="ctr"/>
+            <a:endParaRPr kumimoji="1" lang="ja-JP" altLang="en-US"/>
           </a:p>
         </p:txBody>
       </p:sp>
     </p:spTree>
     <p:extLst>
       <p:ext uri="{BB962C8B-B14F-4D97-AF65-F5344CB8AC3E}">
-        <p14:creationId xmlns:p14="http://schemas.microsoft.com/office/powerpoint/2010/main" val="4059549971"/>
+        <p14:creationId xmlns:p14="http://schemas.microsoft.com/office/powerpoint/2010/main" val="1844414277"/>
       </p:ext>
     </p:extLst>
   </p:cSld>
@@ -4757,7 +4836,7 @@
         </p:nvSpPr>
         <p:spPr>
           <a:xfrm>
-            <a:off x="567542" y="491954"/>
+            <a:off x="4447151" y="3136613"/>
             <a:ext cx="3297698" cy="584775"/>
           </a:xfrm>
           <a:prstGeom prst="rect">
@@ -4783,119 +4862,10 @@
           </a:p>
         </p:txBody>
       </p:sp>
-      <p:sp>
-        <p:nvSpPr>
-          <p:cNvPr id="6" name="テキスト ボックス 5">
-            <a:extLst>
-              <a:ext uri="{FF2B5EF4-FFF2-40B4-BE49-F238E27FC236}">
-                <a16:creationId xmlns:a16="http://schemas.microsoft.com/office/drawing/2014/main" id="{55830AD6-028B-4C4E-80BF-B70DFC1C3A46}"/>
-              </a:ext>
-            </a:extLst>
-          </p:cNvPr>
-          <p:cNvSpPr txBox="1"/>
-          <p:nvPr/>
-        </p:nvSpPr>
-        <p:spPr>
-          <a:xfrm>
-            <a:off x="567542" y="1216429"/>
-            <a:ext cx="9676047" cy="830997"/>
-          </a:xfrm>
-          <a:prstGeom prst="rect">
-            <a:avLst/>
-          </a:prstGeom>
-          <a:noFill/>
-        </p:spPr>
-        <p:txBody>
-          <a:bodyPr wrap="none" rtlCol="0">
-            <a:spAutoFit/>
-          </a:bodyPr>
-          <a:lstStyle/>
-          <a:p>
-            <a:r>
-              <a:rPr lang="en-US" altLang="ja-JP" sz="2400" dirty="0"/>
-              <a:t>Unity</a:t>
-            </a:r>
-            <a:r>
-              <a:rPr lang="ja-JP" altLang="en-US" sz="2400" dirty="0"/>
-              <a:t>には</a:t>
-            </a:r>
-            <a:r>
-              <a:rPr lang="ja-JP" altLang="en-US" sz="2400" b="1" dirty="0">
-                <a:solidFill>
-                  <a:srgbClr val="FF0000"/>
-                </a:solidFill>
-              </a:rPr>
-              <a:t>自作の機能を追加</a:t>
-            </a:r>
-            <a:r>
-              <a:rPr lang="ja-JP" altLang="en-US" sz="2400" dirty="0"/>
-              <a:t>することができます。</a:t>
-            </a:r>
-            <a:endParaRPr lang="en-US" altLang="ja-JP" sz="2400" dirty="0"/>
-          </a:p>
-          <a:p>
-            <a:r>
-              <a:rPr kumimoji="1" lang="ja-JP" altLang="en-US" sz="2400" dirty="0"/>
-              <a:t>今回は、</a:t>
-            </a:r>
-            <a:r>
-              <a:rPr kumimoji="1" lang="en-US" altLang="ja-JP" sz="2400" b="1" dirty="0">
-                <a:solidFill>
-                  <a:srgbClr val="FF0000"/>
-                </a:solidFill>
-              </a:rPr>
-              <a:t>Scene</a:t>
-            </a:r>
-            <a:r>
-              <a:rPr kumimoji="1" lang="ja-JP" altLang="en-US" sz="2400" b="1" dirty="0">
-                <a:solidFill>
-                  <a:srgbClr val="FF0000"/>
-                </a:solidFill>
-              </a:rPr>
-              <a:t>に配置したものをデータ出力する機能</a:t>
-            </a:r>
-            <a:r>
-              <a:rPr kumimoji="1" lang="ja-JP" altLang="en-US" sz="2400" dirty="0"/>
-              <a:t>を追加します。</a:t>
-            </a:r>
-            <a:endParaRPr kumimoji="1" lang="en-US" altLang="ja-JP" sz="2400" dirty="0"/>
-          </a:p>
-        </p:txBody>
-      </p:sp>
-      <p:pic>
-        <p:nvPicPr>
-          <p:cNvPr id="5" name="図 4">
-            <a:extLst>
-              <a:ext uri="{FF2B5EF4-FFF2-40B4-BE49-F238E27FC236}">
-                <a16:creationId xmlns:a16="http://schemas.microsoft.com/office/drawing/2014/main" id="{24316E90-CEFA-432F-B1C3-CDB7A497C075}"/>
-              </a:ext>
-            </a:extLst>
-          </p:cNvPr>
-          <p:cNvPicPr>
-            <a:picLocks noChangeAspect="1"/>
-          </p:cNvPicPr>
-          <p:nvPr/>
-        </p:nvPicPr>
-        <p:blipFill>
-          <a:blip r:embed="rId2"/>
-          <a:stretch>
-            <a:fillRect/>
-          </a:stretch>
-        </p:blipFill>
-        <p:spPr>
-          <a:xfrm>
-            <a:off x="567542" y="2187126"/>
-            <a:ext cx="7774736" cy="4178920"/>
-          </a:xfrm>
-          <a:prstGeom prst="rect">
-            <a:avLst/>
-          </a:prstGeom>
-        </p:spPr>
-      </p:pic>
     </p:spTree>
     <p:extLst>
       <p:ext uri="{BB962C8B-B14F-4D97-AF65-F5344CB8AC3E}">
-        <p14:creationId xmlns:p14="http://schemas.microsoft.com/office/powerpoint/2010/main" val="576838711"/>
+        <p14:creationId xmlns:p14="http://schemas.microsoft.com/office/powerpoint/2010/main" val="4059549971"/>
       </p:ext>
     </p:extLst>
   </p:cSld>
@@ -4977,7 +4947,7 @@
         <p:spPr>
           <a:xfrm>
             <a:off x="567542" y="1216429"/>
-            <a:ext cx="8036174" cy="461665"/>
+            <a:ext cx="9676047" cy="830997"/>
           </a:xfrm>
           <a:prstGeom prst="rect">
             <a:avLst/>
@@ -4992,23 +4962,50 @@
           <a:p>
             <a:r>
               <a:rPr lang="en-US" altLang="ja-JP" sz="2400" dirty="0"/>
-              <a:t>Scripts</a:t>
+              <a:t>Unity</a:t>
             </a:r>
             <a:r>
               <a:rPr lang="ja-JP" altLang="en-US" sz="2400" dirty="0"/>
-              <a:t>フォルダに「</a:t>
-            </a:r>
-            <a:r>
-              <a:rPr lang="en-US" altLang="ja-JP" sz="2400" b="1" dirty="0" err="1">
+              <a:t>には</a:t>
+            </a:r>
+            <a:r>
+              <a:rPr lang="ja-JP" altLang="en-US" sz="2400" b="1" dirty="0">
                 <a:solidFill>
                   <a:srgbClr val="FF0000"/>
                 </a:solidFill>
               </a:rPr>
-              <a:t>StageExproter.cs</a:t>
+              <a:t>自作の機能を追加</a:t>
             </a:r>
             <a:r>
               <a:rPr lang="ja-JP" altLang="en-US" sz="2400" dirty="0"/>
-              <a:t>」を追加します。</a:t>
+              <a:t>することができます。</a:t>
+            </a:r>
+            <a:endParaRPr lang="en-US" altLang="ja-JP" sz="2400" dirty="0"/>
+          </a:p>
+          <a:p>
+            <a:r>
+              <a:rPr kumimoji="1" lang="ja-JP" altLang="en-US" sz="2400" dirty="0"/>
+              <a:t>今回は、</a:t>
+            </a:r>
+            <a:r>
+              <a:rPr kumimoji="1" lang="en-US" altLang="ja-JP" sz="2400" b="1" dirty="0">
+                <a:solidFill>
+                  <a:srgbClr val="FF0000"/>
+                </a:solidFill>
+              </a:rPr>
+              <a:t>Scene</a:t>
+            </a:r>
+            <a:r>
+              <a:rPr kumimoji="1" lang="ja-JP" altLang="en-US" sz="2400" b="1" dirty="0">
+                <a:solidFill>
+                  <a:srgbClr val="FF0000"/>
+                </a:solidFill>
+              </a:rPr>
+              <a:t>に配置したものをデータ出力する機能</a:t>
+            </a:r>
+            <a:r>
+              <a:rPr kumimoji="1" lang="ja-JP" altLang="en-US" sz="2400" dirty="0"/>
+              <a:t>を追加します。</a:t>
             </a:r>
             <a:endParaRPr kumimoji="1" lang="en-US" altLang="ja-JP" sz="2400" dirty="0"/>
           </a:p>
@@ -5016,10 +5013,10 @@
       </p:sp>
       <p:pic>
         <p:nvPicPr>
-          <p:cNvPr id="3" name="図 2">
-            <a:extLst>
-              <a:ext uri="{FF2B5EF4-FFF2-40B4-BE49-F238E27FC236}">
-                <a16:creationId xmlns:a16="http://schemas.microsoft.com/office/drawing/2014/main" id="{E062BF18-BC44-402D-9B79-D60198BFB4D9}"/>
+          <p:cNvPr id="5" name="図 4">
+            <a:extLst>
+              <a:ext uri="{FF2B5EF4-FFF2-40B4-BE49-F238E27FC236}">
+                <a16:creationId xmlns:a16="http://schemas.microsoft.com/office/drawing/2014/main" id="{24316E90-CEFA-432F-B1C3-CDB7A497C075}"/>
               </a:ext>
             </a:extLst>
           </p:cNvPr>
@@ -5036,8 +5033,8 @@
         </p:blipFill>
         <p:spPr>
           <a:xfrm>
-            <a:off x="567542" y="1817794"/>
-            <a:ext cx="1646740" cy="2162385"/>
+            <a:off x="567542" y="2187126"/>
+            <a:ext cx="7774736" cy="4178920"/>
           </a:xfrm>
           <a:prstGeom prst="rect">
             <a:avLst/>
@@ -5047,7 +5044,7 @@
     </p:spTree>
     <p:extLst>
       <p:ext uri="{BB962C8B-B14F-4D97-AF65-F5344CB8AC3E}">
-        <p14:creationId xmlns:p14="http://schemas.microsoft.com/office/powerpoint/2010/main" val="1759753346"/>
+        <p14:creationId xmlns:p14="http://schemas.microsoft.com/office/powerpoint/2010/main" val="576838711"/>
       </p:ext>
     </p:extLst>
   </p:cSld>
@@ -5129,7 +5126,7 @@
         <p:spPr>
           <a:xfrm>
             <a:off x="567542" y="1216429"/>
-            <a:ext cx="5816016" cy="461665"/>
+            <a:ext cx="8036174" cy="461665"/>
           </a:xfrm>
           <a:prstGeom prst="rect">
             <a:avLst/>
@@ -5142,6 +5139,14 @@
           </a:bodyPr>
           <a:lstStyle/>
           <a:p>
+            <a:r>
+              <a:rPr lang="en-US" altLang="ja-JP" sz="2400" dirty="0"/>
+              <a:t>Scripts</a:t>
+            </a:r>
+            <a:r>
+              <a:rPr lang="ja-JP" altLang="en-US" sz="2400" dirty="0"/>
+              <a:t>フォルダに「</a:t>
+            </a:r>
             <a:r>
               <a:rPr lang="en-US" altLang="ja-JP" sz="2400" b="1" dirty="0" err="1">
                 <a:solidFill>
@@ -5152,7 +5157,7 @@
             </a:r>
             <a:r>
               <a:rPr lang="ja-JP" altLang="en-US" sz="2400" dirty="0"/>
-              <a:t>を書きます（その１）</a:t>
+              <a:t>」を追加します。</a:t>
             </a:r>
             <a:endParaRPr kumimoji="1" lang="en-US" altLang="ja-JP" sz="2400" dirty="0"/>
           </a:p>
@@ -5160,10 +5165,10 @@
       </p:sp>
       <p:pic>
         <p:nvPicPr>
-          <p:cNvPr id="5" name="図 4">
-            <a:extLst>
-              <a:ext uri="{FF2B5EF4-FFF2-40B4-BE49-F238E27FC236}">
-                <a16:creationId xmlns:a16="http://schemas.microsoft.com/office/drawing/2014/main" id="{9A1B1FB3-FB59-474B-B972-DE2367FB99CC}"/>
+          <p:cNvPr id="3" name="図 2">
+            <a:extLst>
+              <a:ext uri="{FF2B5EF4-FFF2-40B4-BE49-F238E27FC236}">
+                <a16:creationId xmlns:a16="http://schemas.microsoft.com/office/drawing/2014/main" id="{E062BF18-BC44-402D-9B79-D60198BFB4D9}"/>
               </a:ext>
             </a:extLst>
           </p:cNvPr>
@@ -5181,7 +5186,7 @@
         <p:spPr>
           <a:xfrm>
             <a:off x="567542" y="1817794"/>
-            <a:ext cx="5645749" cy="4807124"/>
+            <a:ext cx="1646740" cy="2162385"/>
           </a:xfrm>
           <a:prstGeom prst="rect">
             <a:avLst/>
@@ -5191,7 +5196,7 @@
     </p:spTree>
     <p:extLst>
       <p:ext uri="{BB962C8B-B14F-4D97-AF65-F5344CB8AC3E}">
-        <p14:creationId xmlns:p14="http://schemas.microsoft.com/office/powerpoint/2010/main" val="4164812331"/>
+        <p14:creationId xmlns:p14="http://schemas.microsoft.com/office/powerpoint/2010/main" val="1759753346"/>
       </p:ext>
     </p:extLst>
   </p:cSld>
@@ -5296,7 +5301,7 @@
             </a:r>
             <a:r>
               <a:rPr lang="ja-JP" altLang="en-US" sz="2400" dirty="0"/>
-              <a:t>を書きます（その２）</a:t>
+              <a:t>を書きます（その１）</a:t>
             </a:r>
             <a:endParaRPr kumimoji="1" lang="en-US" altLang="ja-JP" sz="2400" dirty="0"/>
           </a:p>
@@ -5304,10 +5309,10 @@
       </p:sp>
       <p:pic>
         <p:nvPicPr>
-          <p:cNvPr id="3" name="図 2">
-            <a:extLst>
-              <a:ext uri="{FF2B5EF4-FFF2-40B4-BE49-F238E27FC236}">
-                <a16:creationId xmlns:a16="http://schemas.microsoft.com/office/drawing/2014/main" id="{0BD09154-67C9-4136-80E1-F9DD9D7F751B}"/>
+          <p:cNvPr id="5" name="図 4">
+            <a:extLst>
+              <a:ext uri="{FF2B5EF4-FFF2-40B4-BE49-F238E27FC236}">
+                <a16:creationId xmlns:a16="http://schemas.microsoft.com/office/drawing/2014/main" id="{9A1B1FB3-FB59-474B-B972-DE2367FB99CC}"/>
               </a:ext>
             </a:extLst>
           </p:cNvPr>
@@ -5325,7 +5330,7 @@
         <p:spPr>
           <a:xfrm>
             <a:off x="567542" y="1817794"/>
-            <a:ext cx="6433893" cy="4692957"/>
+            <a:ext cx="5645749" cy="4807124"/>
           </a:xfrm>
           <a:prstGeom prst="rect">
             <a:avLst/>
@@ -5335,7 +5340,7 @@
     </p:spTree>
     <p:extLst>
       <p:ext uri="{BB962C8B-B14F-4D97-AF65-F5344CB8AC3E}">
-        <p14:creationId xmlns:p14="http://schemas.microsoft.com/office/powerpoint/2010/main" val="1363899932"/>
+        <p14:creationId xmlns:p14="http://schemas.microsoft.com/office/powerpoint/2010/main" val="4164812331"/>
       </p:ext>
     </p:extLst>
   </p:cSld>
@@ -5732,7 +5737,7 @@
             </a:r>
             <a:r>
               <a:rPr lang="ja-JP" altLang="en-US" sz="2400" dirty="0"/>
-              <a:t>を書きます（その３）</a:t>
+              <a:t>を書きます（その２）</a:t>
             </a:r>
             <a:endParaRPr kumimoji="1" lang="en-US" altLang="ja-JP" sz="2400" dirty="0"/>
           </a:p>
@@ -5740,10 +5745,10 @@
       </p:sp>
       <p:pic>
         <p:nvPicPr>
-          <p:cNvPr id="5" name="図 4">
-            <a:extLst>
-              <a:ext uri="{FF2B5EF4-FFF2-40B4-BE49-F238E27FC236}">
-                <a16:creationId xmlns:a16="http://schemas.microsoft.com/office/drawing/2014/main" id="{9096244D-737C-4D0B-9036-7352585411A1}"/>
+          <p:cNvPr id="3" name="図 2">
+            <a:extLst>
+              <a:ext uri="{FF2B5EF4-FFF2-40B4-BE49-F238E27FC236}">
+                <a16:creationId xmlns:a16="http://schemas.microsoft.com/office/drawing/2014/main" id="{0BD09154-67C9-4136-80E1-F9DD9D7F751B}"/>
               </a:ext>
             </a:extLst>
           </p:cNvPr>
@@ -5761,7 +5766,7 @@
         <p:spPr>
           <a:xfrm>
             <a:off x="567542" y="1817794"/>
-            <a:ext cx="10421804" cy="2743583"/>
+            <a:ext cx="6433893" cy="4692957"/>
           </a:xfrm>
           <a:prstGeom prst="rect">
             <a:avLst/>
@@ -5771,7 +5776,7 @@
     </p:spTree>
     <p:extLst>
       <p:ext uri="{BB962C8B-B14F-4D97-AF65-F5344CB8AC3E}">
-        <p14:creationId xmlns:p14="http://schemas.microsoft.com/office/powerpoint/2010/main" val="2283137943"/>
+        <p14:creationId xmlns:p14="http://schemas.microsoft.com/office/powerpoint/2010/main" val="1363899932"/>
       </p:ext>
     </p:extLst>
   </p:cSld>
@@ -5853,7 +5858,7 @@
         <p:spPr>
           <a:xfrm>
             <a:off x="567542" y="1216429"/>
-            <a:ext cx="10594567" cy="830997"/>
+            <a:ext cx="5816016" cy="461665"/>
           </a:xfrm>
           <a:prstGeom prst="rect">
             <a:avLst/>
@@ -5867,51 +5872,16 @@
           <a:lstStyle/>
           <a:p>
             <a:r>
-              <a:rPr kumimoji="1" lang="ja-JP" altLang="en-US" sz="2400" dirty="0"/>
-              <a:t>保存して</a:t>
-            </a:r>
-            <a:r>
-              <a:rPr kumimoji="1" lang="en-US" altLang="ja-JP" sz="2400" dirty="0"/>
-              <a:t>Unity</a:t>
-            </a:r>
-            <a:r>
-              <a:rPr kumimoji="1" lang="ja-JP" altLang="en-US" sz="2400" dirty="0"/>
-              <a:t>エディタに戻ると、「</a:t>
-            </a:r>
-            <a:r>
-              <a:rPr kumimoji="1" lang="en-US" altLang="ja-JP" sz="2400" b="1" dirty="0">
+              <a:rPr lang="en-US" altLang="ja-JP" sz="2400" b="1" dirty="0" err="1">
                 <a:solidFill>
                   <a:srgbClr val="FF0000"/>
                 </a:solidFill>
               </a:rPr>
-              <a:t>Tools </a:t>
-            </a:r>
-            <a:r>
-              <a:rPr kumimoji="1" lang="ja-JP" altLang="en-US" sz="2400" b="1" dirty="0">
-                <a:solidFill>
-                  <a:srgbClr val="FF0000"/>
-                </a:solidFill>
-              </a:rPr>
-              <a:t>＞ </a:t>
-            </a:r>
-            <a:r>
-              <a:rPr kumimoji="1" lang="en-US" altLang="ja-JP" sz="2400" b="1" dirty="0">
-                <a:solidFill>
-                  <a:srgbClr val="FF0000"/>
-                </a:solidFill>
-              </a:rPr>
-              <a:t>Export Stage JSON</a:t>
+              <a:t>StageExproter.cs</a:t>
             </a:r>
             <a:r>
               <a:rPr lang="ja-JP" altLang="en-US" sz="2400" dirty="0"/>
-              <a:t>」という</a:t>
-            </a:r>
-            <a:endParaRPr lang="en-US" altLang="ja-JP" sz="2400" dirty="0"/>
-          </a:p>
-          <a:p>
-            <a:r>
-              <a:rPr kumimoji="1" lang="ja-JP" altLang="en-US" sz="2400" dirty="0"/>
-              <a:t>メニューが追加されています。</a:t>
+              <a:t>を書きます（その３）</a:t>
             </a:r>
             <a:endParaRPr kumimoji="1" lang="en-US" altLang="ja-JP" sz="2400" dirty="0"/>
           </a:p>
@@ -5919,10 +5889,10 @@
       </p:sp>
       <p:pic>
         <p:nvPicPr>
-          <p:cNvPr id="3" name="図 2">
-            <a:extLst>
-              <a:ext uri="{FF2B5EF4-FFF2-40B4-BE49-F238E27FC236}">
-                <a16:creationId xmlns:a16="http://schemas.microsoft.com/office/drawing/2014/main" id="{7D0BC43B-0903-4444-AED7-86150DFF0129}"/>
+          <p:cNvPr id="5" name="図 4">
+            <a:extLst>
+              <a:ext uri="{FF2B5EF4-FFF2-40B4-BE49-F238E27FC236}">
+                <a16:creationId xmlns:a16="http://schemas.microsoft.com/office/drawing/2014/main" id="{9096244D-737C-4D0B-9036-7352585411A1}"/>
               </a:ext>
             </a:extLst>
           </p:cNvPr>
@@ -5939,72 +5909,18 @@
         </p:blipFill>
         <p:spPr>
           <a:xfrm>
-            <a:off x="567542" y="2187126"/>
-            <a:ext cx="4891964" cy="4406364"/>
+            <a:off x="567542" y="1817794"/>
+            <a:ext cx="10421804" cy="2743583"/>
           </a:xfrm>
           <a:prstGeom prst="rect">
             <a:avLst/>
           </a:prstGeom>
         </p:spPr>
       </p:pic>
-      <p:sp>
-        <p:nvSpPr>
-          <p:cNvPr id="7" name="矢印: 右 6">
-            <a:extLst>
-              <a:ext uri="{FF2B5EF4-FFF2-40B4-BE49-F238E27FC236}">
-                <a16:creationId xmlns:a16="http://schemas.microsoft.com/office/drawing/2014/main" id="{1E6000CA-1C5A-4260-B6E1-51230C26B204}"/>
-              </a:ext>
-            </a:extLst>
-          </p:cNvPr>
-          <p:cNvSpPr/>
-          <p:nvPr/>
-        </p:nvSpPr>
-        <p:spPr>
-          <a:xfrm rot="14099625">
-            <a:off x="3888637" y="2671481"/>
-            <a:ext cx="493059" cy="313765"/>
-          </a:xfrm>
-          <a:prstGeom prst="rightArrow">
-            <a:avLst/>
-          </a:prstGeom>
-          <a:solidFill>
-            <a:srgbClr val="FF0000"/>
-          </a:solidFill>
-          <a:ln>
-            <a:solidFill>
-              <a:schemeClr val="tx1"/>
-            </a:solidFill>
-          </a:ln>
-        </p:spPr>
-        <p:style>
-          <a:lnRef idx="2">
-            <a:schemeClr val="accent1">
-              <a:shade val="50000"/>
-            </a:schemeClr>
-          </a:lnRef>
-          <a:fillRef idx="1">
-            <a:schemeClr val="accent1"/>
-          </a:fillRef>
-          <a:effectRef idx="0">
-            <a:schemeClr val="accent1"/>
-          </a:effectRef>
-          <a:fontRef idx="minor">
-            <a:schemeClr val="lt1"/>
-          </a:fontRef>
-        </p:style>
-        <p:txBody>
-          <a:bodyPr rtlCol="0" anchor="ctr"/>
-          <a:lstStyle/>
-          <a:p>
-            <a:pPr algn="ctr"/>
-            <a:endParaRPr kumimoji="1" lang="ja-JP" altLang="en-US"/>
-          </a:p>
-        </p:txBody>
-      </p:sp>
     </p:spTree>
     <p:extLst>
       <p:ext uri="{BB962C8B-B14F-4D97-AF65-F5344CB8AC3E}">
-        <p14:creationId xmlns:p14="http://schemas.microsoft.com/office/powerpoint/2010/main" val="869861897"/>
+        <p14:creationId xmlns:p14="http://schemas.microsoft.com/office/powerpoint/2010/main" val="2283137943"/>
       </p:ext>
     </p:extLst>
   </p:cSld>
@@ -6086,7 +6002,7 @@
         <p:spPr>
           <a:xfrm>
             <a:off x="567542" y="1216429"/>
-            <a:ext cx="8784777" cy="830997"/>
+            <a:ext cx="10594567" cy="830997"/>
           </a:xfrm>
           <a:prstGeom prst="rect">
             <a:avLst/>
@@ -6099,23 +6015,36 @@
           </a:bodyPr>
           <a:lstStyle/>
           <a:p>
+            <a:r>
+              <a:rPr kumimoji="1" lang="ja-JP" altLang="en-US" sz="2400" dirty="0"/>
+              <a:t>保存して</a:t>
+            </a:r>
+            <a:r>
+              <a:rPr kumimoji="1" lang="en-US" altLang="ja-JP" sz="2400" dirty="0"/>
+              <a:t>Unity</a:t>
+            </a:r>
+            <a:r>
+              <a:rPr kumimoji="1" lang="ja-JP" altLang="en-US" sz="2400" dirty="0"/>
+              <a:t>エディタに戻ると、「</a:t>
+            </a:r>
             <a:r>
               <a:rPr kumimoji="1" lang="en-US" altLang="ja-JP" sz="2400" b="1" dirty="0">
                 <a:solidFill>
                   <a:srgbClr val="FF0000"/>
                 </a:solidFill>
               </a:rPr>
-              <a:t>Stage01</a:t>
-            </a:r>
-            <a:r>
-              <a:rPr kumimoji="1" lang="ja-JP" altLang="en-US" sz="2400" dirty="0"/>
-              <a:t>というシーンを追加して、適当にステージを作り、</a:t>
-            </a:r>
-            <a:endParaRPr kumimoji="1" lang="en-US" altLang="ja-JP" sz="2400" dirty="0"/>
-          </a:p>
-          <a:p>
-            <a:r>
-              <a:rPr lang="en-US" altLang="ja-JP" sz="2400" b="1" dirty="0">
+              <a:t>Tools </a:t>
+            </a:r>
+            <a:r>
+              <a:rPr kumimoji="1" lang="ja-JP" altLang="en-US" sz="2400" b="1" dirty="0">
+                <a:solidFill>
+                  <a:srgbClr val="FF0000"/>
+                </a:solidFill>
+              </a:rPr>
+              <a:t>＞ </a:t>
+            </a:r>
+            <a:r>
+              <a:rPr kumimoji="1" lang="en-US" altLang="ja-JP" sz="2400" b="1" dirty="0">
                 <a:solidFill>
                   <a:srgbClr val="FF0000"/>
                 </a:solidFill>
@@ -6123,12 +6052,15 @@
               <a:t>Export Stage JSON</a:t>
             </a:r>
             <a:r>
-              <a:rPr lang="en-US" altLang="ja-JP" sz="2400" dirty="0"/>
-              <a:t> </a:t>
-            </a:r>
-            <a:r>
               <a:rPr lang="ja-JP" altLang="en-US" sz="2400" dirty="0"/>
-              <a:t>をクリックしましょう。</a:t>
+              <a:t>」という</a:t>
+            </a:r>
+            <a:endParaRPr lang="en-US" altLang="ja-JP" sz="2400" dirty="0"/>
+          </a:p>
+          <a:p>
+            <a:r>
+              <a:rPr kumimoji="1" lang="ja-JP" altLang="en-US" sz="2400" dirty="0"/>
+              <a:t>メニューが追加されています。</a:t>
             </a:r>
             <a:endParaRPr kumimoji="1" lang="en-US" altLang="ja-JP" sz="2400" dirty="0"/>
           </a:p>
@@ -6136,10 +6068,10 @@
       </p:sp>
       <p:pic>
         <p:nvPicPr>
-          <p:cNvPr id="8" name="図 7">
-            <a:extLst>
-              <a:ext uri="{FF2B5EF4-FFF2-40B4-BE49-F238E27FC236}">
-                <a16:creationId xmlns:a16="http://schemas.microsoft.com/office/drawing/2014/main" id="{3DB20F7A-5671-4D1F-B4DA-88704C92AACB}"/>
+          <p:cNvPr id="3" name="図 2">
+            <a:extLst>
+              <a:ext uri="{FF2B5EF4-FFF2-40B4-BE49-F238E27FC236}">
+                <a16:creationId xmlns:a16="http://schemas.microsoft.com/office/drawing/2014/main" id="{7D0BC43B-0903-4444-AED7-86150DFF0129}"/>
               </a:ext>
             </a:extLst>
           </p:cNvPr>
@@ -6157,17 +6089,71 @@
         <p:spPr>
           <a:xfrm>
             <a:off x="567542" y="2187126"/>
-            <a:ext cx="7774736" cy="4178920"/>
+            <a:ext cx="4891964" cy="4406364"/>
           </a:xfrm>
           <a:prstGeom prst="rect">
             <a:avLst/>
           </a:prstGeom>
         </p:spPr>
       </p:pic>
+      <p:sp>
+        <p:nvSpPr>
+          <p:cNvPr id="7" name="矢印: 右 6">
+            <a:extLst>
+              <a:ext uri="{FF2B5EF4-FFF2-40B4-BE49-F238E27FC236}">
+                <a16:creationId xmlns:a16="http://schemas.microsoft.com/office/drawing/2014/main" id="{1E6000CA-1C5A-4260-B6E1-51230C26B204}"/>
+              </a:ext>
+            </a:extLst>
+          </p:cNvPr>
+          <p:cNvSpPr/>
+          <p:nvPr/>
+        </p:nvSpPr>
+        <p:spPr>
+          <a:xfrm rot="14099625">
+            <a:off x="3888637" y="2671481"/>
+            <a:ext cx="493059" cy="313765"/>
+          </a:xfrm>
+          <a:prstGeom prst="rightArrow">
+            <a:avLst/>
+          </a:prstGeom>
+          <a:solidFill>
+            <a:srgbClr val="FF0000"/>
+          </a:solidFill>
+          <a:ln>
+            <a:solidFill>
+              <a:schemeClr val="tx1"/>
+            </a:solidFill>
+          </a:ln>
+        </p:spPr>
+        <p:style>
+          <a:lnRef idx="2">
+            <a:schemeClr val="accent1">
+              <a:shade val="50000"/>
+            </a:schemeClr>
+          </a:lnRef>
+          <a:fillRef idx="1">
+            <a:schemeClr val="accent1"/>
+          </a:fillRef>
+          <a:effectRef idx="0">
+            <a:schemeClr val="accent1"/>
+          </a:effectRef>
+          <a:fontRef idx="minor">
+            <a:schemeClr val="lt1"/>
+          </a:fontRef>
+        </p:style>
+        <p:txBody>
+          <a:bodyPr rtlCol="0" anchor="ctr"/>
+          <a:lstStyle/>
+          <a:p>
+            <a:pPr algn="ctr"/>
+            <a:endParaRPr kumimoji="1" lang="ja-JP" altLang="en-US"/>
+          </a:p>
+        </p:txBody>
+      </p:sp>
     </p:spTree>
     <p:extLst>
       <p:ext uri="{BB962C8B-B14F-4D97-AF65-F5344CB8AC3E}">
-        <p14:creationId xmlns:p14="http://schemas.microsoft.com/office/powerpoint/2010/main" val="3624573389"/>
+        <p14:creationId xmlns:p14="http://schemas.microsoft.com/office/powerpoint/2010/main" val="869861897"/>
       </p:ext>
     </p:extLst>
   </p:cSld>
@@ -6249,7 +6235,7 @@
         <p:spPr>
           <a:xfrm>
             <a:off x="567542" y="1216429"/>
-            <a:ext cx="10386177" cy="461665"/>
+            <a:ext cx="8784777" cy="830997"/>
           </a:xfrm>
           <a:prstGeom prst="rect">
             <a:avLst/>
@@ -6262,49 +6248,36 @@
           </a:bodyPr>
           <a:lstStyle/>
           <a:p>
-            <a:r>
-              <a:rPr kumimoji="1" lang="ja-JP" altLang="en-US" sz="2400" dirty="0"/>
-              <a:t>プロジェクトに</a:t>
-            </a:r>
             <a:r>
               <a:rPr kumimoji="1" lang="en-US" altLang="ja-JP" sz="2400" b="1" dirty="0">
                 <a:solidFill>
                   <a:srgbClr val="FF0000"/>
                 </a:solidFill>
               </a:rPr>
-              <a:t>json</a:t>
-            </a:r>
-            <a:r>
-              <a:rPr kumimoji="1" lang="ja-JP" altLang="en-US" sz="2400" b="1" dirty="0">
+              <a:t>Stage01</a:t>
+            </a:r>
+            <a:r>
+              <a:rPr kumimoji="1" lang="ja-JP" altLang="en-US" sz="2400" dirty="0"/>
+              <a:t>というシーンを追加して、適当にステージを作り、</a:t>
+            </a:r>
+            <a:endParaRPr kumimoji="1" lang="en-US" altLang="ja-JP" sz="2400" dirty="0"/>
+          </a:p>
+          <a:p>
+            <a:r>
+              <a:rPr lang="en-US" altLang="ja-JP" sz="2400" b="1" dirty="0">
                 <a:solidFill>
                   <a:srgbClr val="FF0000"/>
                 </a:solidFill>
               </a:rPr>
-              <a:t>フォルダ</a:t>
-            </a:r>
-            <a:r>
-              <a:rPr kumimoji="1" lang="ja-JP" altLang="en-US" sz="2400" dirty="0"/>
-              <a:t>が追加され、</a:t>
-            </a:r>
-            <a:r>
-              <a:rPr kumimoji="1" lang="ja-JP" altLang="en-US" sz="2400" b="1" dirty="0">
-                <a:solidFill>
-                  <a:srgbClr val="FF0000"/>
-                </a:solidFill>
-              </a:rPr>
-              <a:t>シーン名</a:t>
-            </a:r>
-            <a:r>
-              <a:rPr kumimoji="1" lang="en-US" altLang="ja-JP" sz="2400" b="1" dirty="0">
-                <a:solidFill>
-                  <a:srgbClr val="FF0000"/>
-                </a:solidFill>
-              </a:rPr>
-              <a:t>.json</a:t>
-            </a:r>
-            <a:r>
-              <a:rPr kumimoji="1" lang="ja-JP" altLang="en-US" sz="2400" dirty="0"/>
-              <a:t>が追加されます。</a:t>
+              <a:t>Export Stage JSON</a:t>
+            </a:r>
+            <a:r>
+              <a:rPr lang="en-US" altLang="ja-JP" sz="2400" dirty="0"/>
+              <a:t> </a:t>
+            </a:r>
+            <a:r>
+              <a:rPr lang="ja-JP" altLang="en-US" sz="2400" dirty="0"/>
+              <a:t>をクリックしましょう。</a:t>
             </a:r>
             <a:endParaRPr kumimoji="1" lang="en-US" altLang="ja-JP" sz="2400" dirty="0"/>
           </a:p>
@@ -6312,10 +6285,10 @@
       </p:sp>
       <p:pic>
         <p:nvPicPr>
-          <p:cNvPr id="3" name="図 2">
-            <a:extLst>
-              <a:ext uri="{FF2B5EF4-FFF2-40B4-BE49-F238E27FC236}">
-                <a16:creationId xmlns:a16="http://schemas.microsoft.com/office/drawing/2014/main" id="{EA297981-BE5A-4BB8-B06A-E2C84FCE4E39}"/>
+          <p:cNvPr id="8" name="図 7">
+            <a:extLst>
+              <a:ext uri="{FF2B5EF4-FFF2-40B4-BE49-F238E27FC236}">
+                <a16:creationId xmlns:a16="http://schemas.microsoft.com/office/drawing/2014/main" id="{3DB20F7A-5671-4D1F-B4DA-88704C92AACB}"/>
               </a:ext>
             </a:extLst>
           </p:cNvPr>
@@ -6332,84 +6305,18 @@
         </p:blipFill>
         <p:spPr>
           <a:xfrm>
-            <a:off x="567542" y="1817794"/>
-            <a:ext cx="3270604" cy="1947382"/>
+            <a:off x="567542" y="2187126"/>
+            <a:ext cx="7774736" cy="4178920"/>
           </a:xfrm>
           <a:prstGeom prst="rect">
             <a:avLst/>
           </a:prstGeom>
         </p:spPr>
       </p:pic>
-      <p:pic>
-        <p:nvPicPr>
-          <p:cNvPr id="7" name="図 6">
-            <a:extLst>
-              <a:ext uri="{FF2B5EF4-FFF2-40B4-BE49-F238E27FC236}">
-                <a16:creationId xmlns:a16="http://schemas.microsoft.com/office/drawing/2014/main" id="{A9983464-DFD4-452D-A86E-52BF4D4C9C24}"/>
-              </a:ext>
-            </a:extLst>
-          </p:cNvPr>
-          <p:cNvPicPr>
-            <a:picLocks noChangeAspect="1"/>
-          </p:cNvPicPr>
-          <p:nvPr/>
-        </p:nvPicPr>
-        <p:blipFill>
-          <a:blip r:embed="rId3"/>
-          <a:stretch>
-            <a:fillRect/>
-          </a:stretch>
-        </p:blipFill>
-        <p:spPr>
-          <a:xfrm>
-            <a:off x="4671835" y="1817794"/>
-            <a:ext cx="2543530" cy="1695687"/>
-          </a:xfrm>
-          <a:prstGeom prst="rect">
-            <a:avLst/>
-          </a:prstGeom>
-        </p:spPr>
-      </p:pic>
-      <p:sp>
-        <p:nvSpPr>
-          <p:cNvPr id="9" name="テキスト ボックス 8">
-            <a:extLst>
-              <a:ext uri="{FF2B5EF4-FFF2-40B4-BE49-F238E27FC236}">
-                <a16:creationId xmlns:a16="http://schemas.microsoft.com/office/drawing/2014/main" id="{F5BA5F75-F57F-40C2-AFBA-83A2857BE0E2}"/>
-              </a:ext>
-            </a:extLst>
-          </p:cNvPr>
-          <p:cNvSpPr txBox="1"/>
-          <p:nvPr/>
-        </p:nvSpPr>
-        <p:spPr>
-          <a:xfrm>
-            <a:off x="567541" y="3904876"/>
-            <a:ext cx="4185761" cy="461665"/>
-          </a:xfrm>
-          <a:prstGeom prst="rect">
-            <a:avLst/>
-          </a:prstGeom>
-          <a:noFill/>
-        </p:spPr>
-        <p:txBody>
-          <a:bodyPr wrap="none" rtlCol="0">
-            <a:spAutoFit/>
-          </a:bodyPr>
-          <a:lstStyle/>
-          <a:p>
-            <a:r>
-              <a:rPr kumimoji="1" lang="ja-JP" altLang="en-US" sz="2400" dirty="0"/>
-              <a:t>次ページからプログラム解説</a:t>
-            </a:r>
-            <a:endParaRPr kumimoji="1" lang="en-US" altLang="ja-JP" sz="2400" dirty="0"/>
-          </a:p>
-        </p:txBody>
-      </p:sp>
     </p:spTree>
     <p:extLst>
       <p:ext uri="{BB962C8B-B14F-4D97-AF65-F5344CB8AC3E}">
-        <p14:creationId xmlns:p14="http://schemas.microsoft.com/office/powerpoint/2010/main" val="1446298685"/>
+        <p14:creationId xmlns:p14="http://schemas.microsoft.com/office/powerpoint/2010/main" val="3624573389"/>
       </p:ext>
     </p:extLst>
   </p:cSld>
@@ -6491,7 +6398,7 @@
         <p:spPr>
           <a:xfrm>
             <a:off x="567542" y="1216429"/>
-            <a:ext cx="10649069" cy="830997"/>
+            <a:ext cx="10386177" cy="461665"/>
           </a:xfrm>
           <a:prstGeom prst="rect">
             <a:avLst/>
@@ -6505,39 +6412,48 @@
           <a:lstStyle/>
           <a:p>
             <a:r>
-              <a:rPr kumimoji="1" lang="en-US" altLang="ja-JP" sz="2400" dirty="0"/>
-              <a:t>Unity</a:t>
-            </a:r>
-            <a:r>
               <a:rPr kumimoji="1" lang="ja-JP" altLang="en-US" sz="2400" dirty="0"/>
-              <a:t>には、簡単に変数の中身を</a:t>
-            </a:r>
-            <a:r>
-              <a:rPr kumimoji="1" lang="en-US" altLang="ja-JP" sz="2400" dirty="0"/>
-              <a:t>json</a:t>
-            </a:r>
-            <a:r>
-              <a:rPr kumimoji="1" lang="ja-JP" altLang="en-US" sz="2400" dirty="0"/>
-              <a:t>に出力する機能があります。</a:t>
-            </a:r>
-            <a:endParaRPr kumimoji="1" lang="en-US" altLang="ja-JP" sz="2400" dirty="0"/>
-          </a:p>
-          <a:p>
-            <a:r>
-              <a:rPr lang="ja-JP" altLang="en-US" sz="2400" dirty="0"/>
-              <a:t>その機能を使うためには、出力データ形式を決定する</a:t>
-            </a:r>
-            <a:r>
-              <a:rPr lang="ja-JP" altLang="en-US" sz="2400" b="1" dirty="0">
+              <a:t>プロジェクトに</a:t>
+            </a:r>
+            <a:r>
+              <a:rPr kumimoji="1" lang="en-US" altLang="ja-JP" sz="2400" b="1" dirty="0">
                 <a:solidFill>
                   <a:srgbClr val="FF0000"/>
                 </a:solidFill>
               </a:rPr>
-              <a:t>ラッパー</a:t>
-            </a:r>
-            <a:r>
-              <a:rPr lang="ja-JP" altLang="en-US" sz="2400" dirty="0"/>
-              <a:t>が必要です。</a:t>
+              <a:t>json</a:t>
+            </a:r>
+            <a:r>
+              <a:rPr kumimoji="1" lang="ja-JP" altLang="en-US" sz="2400" b="1" dirty="0">
+                <a:solidFill>
+                  <a:srgbClr val="FF0000"/>
+                </a:solidFill>
+              </a:rPr>
+              <a:t>フォルダ</a:t>
+            </a:r>
+            <a:r>
+              <a:rPr kumimoji="1" lang="ja-JP" altLang="en-US" sz="2400" dirty="0"/>
+              <a:t>が追加され、</a:t>
+            </a:r>
+            <a:r>
+              <a:rPr kumimoji="1" lang="ja-JP" altLang="en-US" sz="2400" b="1" dirty="0">
+                <a:solidFill>
+                  <a:srgbClr val="FF0000"/>
+                </a:solidFill>
+              </a:rPr>
+              <a:t>シーン名</a:t>
+            </a:r>
+            <a:r>
+              <a:rPr kumimoji="1" lang="en-US" altLang="ja-JP" sz="2400" b="1" dirty="0">
+                <a:solidFill>
+                  <a:srgbClr val="FF0000"/>
+                </a:solidFill>
+              </a:rPr>
+              <a:t>.json</a:t>
+            </a:r>
+            <a:r>
+              <a:rPr kumimoji="1" lang="ja-JP" altLang="en-US" sz="2400" dirty="0"/>
+              <a:t>が追加されます。</a:t>
             </a:r>
             <a:endParaRPr kumimoji="1" lang="en-US" altLang="ja-JP" sz="2400" dirty="0"/>
           </a:p>
@@ -6545,10 +6461,10 @@
       </p:sp>
       <p:pic>
         <p:nvPicPr>
-          <p:cNvPr id="5" name="図 4">
-            <a:extLst>
-              <a:ext uri="{FF2B5EF4-FFF2-40B4-BE49-F238E27FC236}">
-                <a16:creationId xmlns:a16="http://schemas.microsoft.com/office/drawing/2014/main" id="{2AB504E7-4F71-4F03-A1A6-F61E9155CF35}"/>
+          <p:cNvPr id="3" name="図 2">
+            <a:extLst>
+              <a:ext uri="{FF2B5EF4-FFF2-40B4-BE49-F238E27FC236}">
+                <a16:creationId xmlns:a16="http://schemas.microsoft.com/office/drawing/2014/main" id="{EA297981-BE5A-4BB8-B06A-E2C84FCE4E39}"/>
               </a:ext>
             </a:extLst>
           </p:cNvPr>
@@ -6565,18 +6481,84 @@
         </p:blipFill>
         <p:spPr>
           <a:xfrm>
-            <a:off x="567542" y="2187126"/>
-            <a:ext cx="7106642" cy="4220164"/>
+            <a:off x="567542" y="1817794"/>
+            <a:ext cx="3270604" cy="1947382"/>
           </a:xfrm>
           <a:prstGeom prst="rect">
             <a:avLst/>
           </a:prstGeom>
         </p:spPr>
       </p:pic>
+      <p:pic>
+        <p:nvPicPr>
+          <p:cNvPr id="7" name="図 6">
+            <a:extLst>
+              <a:ext uri="{FF2B5EF4-FFF2-40B4-BE49-F238E27FC236}">
+                <a16:creationId xmlns:a16="http://schemas.microsoft.com/office/drawing/2014/main" id="{A9983464-DFD4-452D-A86E-52BF4D4C9C24}"/>
+              </a:ext>
+            </a:extLst>
+          </p:cNvPr>
+          <p:cNvPicPr>
+            <a:picLocks noChangeAspect="1"/>
+          </p:cNvPicPr>
+          <p:nvPr/>
+        </p:nvPicPr>
+        <p:blipFill>
+          <a:blip r:embed="rId3"/>
+          <a:stretch>
+            <a:fillRect/>
+          </a:stretch>
+        </p:blipFill>
+        <p:spPr>
+          <a:xfrm>
+            <a:off x="4671835" y="1817794"/>
+            <a:ext cx="2543530" cy="1695687"/>
+          </a:xfrm>
+          <a:prstGeom prst="rect">
+            <a:avLst/>
+          </a:prstGeom>
+        </p:spPr>
+      </p:pic>
+      <p:sp>
+        <p:nvSpPr>
+          <p:cNvPr id="9" name="テキスト ボックス 8">
+            <a:extLst>
+              <a:ext uri="{FF2B5EF4-FFF2-40B4-BE49-F238E27FC236}">
+                <a16:creationId xmlns:a16="http://schemas.microsoft.com/office/drawing/2014/main" id="{F5BA5F75-F57F-40C2-AFBA-83A2857BE0E2}"/>
+              </a:ext>
+            </a:extLst>
+          </p:cNvPr>
+          <p:cNvSpPr txBox="1"/>
+          <p:nvPr/>
+        </p:nvSpPr>
+        <p:spPr>
+          <a:xfrm>
+            <a:off x="567541" y="3904876"/>
+            <a:ext cx="4185761" cy="461665"/>
+          </a:xfrm>
+          <a:prstGeom prst="rect">
+            <a:avLst/>
+          </a:prstGeom>
+          <a:noFill/>
+        </p:spPr>
+        <p:txBody>
+          <a:bodyPr wrap="none" rtlCol="0">
+            <a:spAutoFit/>
+          </a:bodyPr>
+          <a:lstStyle/>
+          <a:p>
+            <a:r>
+              <a:rPr kumimoji="1" lang="ja-JP" altLang="en-US" sz="2400" dirty="0"/>
+              <a:t>次ページからプログラム解説</a:t>
+            </a:r>
+            <a:endParaRPr kumimoji="1" lang="en-US" altLang="ja-JP" sz="2400" dirty="0"/>
+          </a:p>
+        </p:txBody>
+      </p:sp>
     </p:spTree>
     <p:extLst>
       <p:ext uri="{BB962C8B-B14F-4D97-AF65-F5344CB8AC3E}">
-        <p14:creationId xmlns:p14="http://schemas.microsoft.com/office/powerpoint/2010/main" val="16081886"/>
+        <p14:creationId xmlns:p14="http://schemas.microsoft.com/office/powerpoint/2010/main" val="1446298685"/>
       </p:ext>
     </p:extLst>
   </p:cSld>
@@ -6672,43 +6654,39 @@
           <a:lstStyle/>
           <a:p>
             <a:r>
-              <a:rPr kumimoji="1" lang="en-US" altLang="ja-JP" sz="2400" dirty="0" err="1"/>
-              <a:t>Linq</a:t>
+              <a:rPr kumimoji="1" lang="en-US" altLang="ja-JP" sz="2400" dirty="0"/>
+              <a:t>Unity</a:t>
             </a:r>
             <a:r>
               <a:rPr kumimoji="1" lang="ja-JP" altLang="en-US" sz="2400" dirty="0"/>
-              <a:t>の</a:t>
-            </a:r>
-            <a:r>
-              <a:rPr kumimoji="1" lang="ja-JP" altLang="en-US" sz="2400" b="1" dirty="0">
+              <a:t>には、簡単に変数の中身を</a:t>
+            </a:r>
+            <a:r>
+              <a:rPr kumimoji="1" lang="en-US" altLang="ja-JP" sz="2400" dirty="0"/>
+              <a:t>json</a:t>
+            </a:r>
+            <a:r>
+              <a:rPr kumimoji="1" lang="ja-JP" altLang="en-US" sz="2400" dirty="0"/>
+              <a:t>に出力する機能があります。</a:t>
+            </a:r>
+            <a:endParaRPr kumimoji="1" lang="en-US" altLang="ja-JP" sz="2400" dirty="0"/>
+          </a:p>
+          <a:p>
+            <a:r>
+              <a:rPr lang="ja-JP" altLang="en-US" sz="2400" dirty="0"/>
+              <a:t>その機能を使うためには、出力データ形式を決定する</a:t>
+            </a:r>
+            <a:r>
+              <a:rPr lang="ja-JP" altLang="en-US" sz="2400" b="1" dirty="0">
                 <a:solidFill>
                   <a:srgbClr val="FF0000"/>
                 </a:solidFill>
               </a:rPr>
-              <a:t>投影</a:t>
-            </a:r>
-            <a:r>
-              <a:rPr kumimoji="1" lang="ja-JP" altLang="en-US" sz="2400" dirty="0"/>
-              <a:t>を使えば、</a:t>
-            </a:r>
-            <a:r>
-              <a:rPr kumimoji="1" lang="ja-JP" altLang="en-US" sz="2400" b="1" dirty="0">
-                <a:solidFill>
-                  <a:srgbClr val="FF0000"/>
-                </a:solidFill>
-              </a:rPr>
-              <a:t>配列とリスト間の変換</a:t>
-            </a:r>
-            <a:r>
-              <a:rPr kumimoji="1" lang="ja-JP" altLang="en-US" sz="2400" dirty="0"/>
-              <a:t>が簡単にできます。</a:t>
-            </a:r>
-            <a:endParaRPr kumimoji="1" lang="en-US" altLang="ja-JP" sz="2400" dirty="0"/>
-          </a:p>
-          <a:p>
+              <a:t>ラッパー</a:t>
+            </a:r>
             <a:r>
               <a:rPr lang="ja-JP" altLang="en-US" sz="2400" dirty="0"/>
-              <a:t>以下は配置オブジェクトリストを固定配列に変化しているプログラムです。</a:t>
+              <a:t>が必要です。</a:t>
             </a:r>
             <a:endParaRPr kumimoji="1" lang="en-US" altLang="ja-JP" sz="2400" dirty="0"/>
           </a:p>
@@ -6716,10 +6694,10 @@
       </p:sp>
       <p:pic>
         <p:nvPicPr>
-          <p:cNvPr id="3" name="図 2">
-            <a:extLst>
-              <a:ext uri="{FF2B5EF4-FFF2-40B4-BE49-F238E27FC236}">
-                <a16:creationId xmlns:a16="http://schemas.microsoft.com/office/drawing/2014/main" id="{C75DB366-3DF5-4B42-944D-CF7A10A3C0FC}"/>
+          <p:cNvPr id="5" name="図 4">
+            <a:extLst>
+              <a:ext uri="{FF2B5EF4-FFF2-40B4-BE49-F238E27FC236}">
+                <a16:creationId xmlns:a16="http://schemas.microsoft.com/office/drawing/2014/main" id="{2AB504E7-4F71-4F03-A1A6-F61E9155CF35}"/>
               </a:ext>
             </a:extLst>
           </p:cNvPr>
@@ -6736,8 +6714,8 @@
         </p:blipFill>
         <p:spPr>
           <a:xfrm>
-            <a:off x="567542" y="2187125"/>
-            <a:ext cx="7280336" cy="3454445"/>
+            <a:off x="567542" y="2187126"/>
+            <a:ext cx="7106642" cy="4220164"/>
           </a:xfrm>
           <a:prstGeom prst="rect">
             <a:avLst/>
@@ -6747,7 +6725,7 @@
     </p:spTree>
     <p:extLst>
       <p:ext uri="{BB962C8B-B14F-4D97-AF65-F5344CB8AC3E}">
-        <p14:creationId xmlns:p14="http://schemas.microsoft.com/office/powerpoint/2010/main" val="422938151"/>
+        <p14:creationId xmlns:p14="http://schemas.microsoft.com/office/powerpoint/2010/main" val="16081886"/>
       </p:ext>
     </p:extLst>
   </p:cSld>
@@ -6829,7 +6807,7 @@
         <p:spPr>
           <a:xfrm>
             <a:off x="567542" y="1216429"/>
-            <a:ext cx="8186857" cy="461665"/>
+            <a:ext cx="10649069" cy="830997"/>
           </a:xfrm>
           <a:prstGeom prst="rect">
             <a:avLst/>
@@ -6843,8 +6821,43 @@
           <a:lstStyle/>
           <a:p>
             <a:r>
+              <a:rPr kumimoji="1" lang="en-US" altLang="ja-JP" sz="2400" dirty="0" err="1"/>
+              <a:t>Linq</a:t>
+            </a:r>
+            <a:r>
               <a:rPr kumimoji="1" lang="ja-JP" altLang="en-US" sz="2400" dirty="0"/>
-              <a:t>ラッパー内のデータが揃えば、ラップして出力できます。</a:t>
+              <a:t>の</a:t>
+            </a:r>
+            <a:r>
+              <a:rPr kumimoji="1" lang="ja-JP" altLang="en-US" sz="2400" b="1" dirty="0">
+                <a:solidFill>
+                  <a:srgbClr val="FF0000"/>
+                </a:solidFill>
+              </a:rPr>
+              <a:t>投影</a:t>
+            </a:r>
+            <a:r>
+              <a:rPr kumimoji="1" lang="ja-JP" altLang="en-US" sz="2400" dirty="0"/>
+              <a:t>を使えば、</a:t>
+            </a:r>
+            <a:r>
+              <a:rPr kumimoji="1" lang="ja-JP" altLang="en-US" sz="2400" b="1" dirty="0">
+                <a:solidFill>
+                  <a:srgbClr val="FF0000"/>
+                </a:solidFill>
+              </a:rPr>
+              <a:t>配列とリスト間の変換</a:t>
+            </a:r>
+            <a:r>
+              <a:rPr kumimoji="1" lang="ja-JP" altLang="en-US" sz="2400" dirty="0"/>
+              <a:t>が簡単にできます。</a:t>
+            </a:r>
+            <a:endParaRPr kumimoji="1" lang="en-US" altLang="ja-JP" sz="2400" dirty="0"/>
+          </a:p>
+          <a:p>
+            <a:r>
+              <a:rPr lang="ja-JP" altLang="en-US" sz="2400" dirty="0"/>
+              <a:t>以下は配置オブジェクトリストを固定配列に変化しているプログラムです。</a:t>
             </a:r>
             <a:endParaRPr kumimoji="1" lang="en-US" altLang="ja-JP" sz="2400" dirty="0"/>
           </a:p>
@@ -6852,10 +6865,10 @@
       </p:sp>
       <p:pic>
         <p:nvPicPr>
-          <p:cNvPr id="5" name="図 4">
-            <a:extLst>
-              <a:ext uri="{FF2B5EF4-FFF2-40B4-BE49-F238E27FC236}">
-                <a16:creationId xmlns:a16="http://schemas.microsoft.com/office/drawing/2014/main" id="{DED4EC62-5D5C-4FB3-85DD-2B27340D1AFA}"/>
+          <p:cNvPr id="3" name="図 2">
+            <a:extLst>
+              <a:ext uri="{FF2B5EF4-FFF2-40B4-BE49-F238E27FC236}">
+                <a16:creationId xmlns:a16="http://schemas.microsoft.com/office/drawing/2014/main" id="{C75DB366-3DF5-4B42-944D-CF7A10A3C0FC}"/>
               </a:ext>
             </a:extLst>
           </p:cNvPr>
@@ -6872,8 +6885,8 @@
         </p:blipFill>
         <p:spPr>
           <a:xfrm>
-            <a:off x="567542" y="1817793"/>
-            <a:ext cx="9908212" cy="1705335"/>
+            <a:off x="567542" y="2187125"/>
+            <a:ext cx="7280336" cy="3454445"/>
           </a:xfrm>
           <a:prstGeom prst="rect">
             <a:avLst/>
@@ -6883,7 +6896,7 @@
     </p:spTree>
     <p:extLst>
       <p:ext uri="{BB962C8B-B14F-4D97-AF65-F5344CB8AC3E}">
-        <p14:creationId xmlns:p14="http://schemas.microsoft.com/office/powerpoint/2010/main" val="1183630749"/>
+        <p14:creationId xmlns:p14="http://schemas.microsoft.com/office/powerpoint/2010/main" val="422938151"/>
       </p:ext>
     </p:extLst>
   </p:cSld>
@@ -6965,7 +6978,7 @@
         <p:spPr>
           <a:xfrm>
             <a:off x="567542" y="1216429"/>
-            <a:ext cx="9990235" cy="830997"/>
+            <a:ext cx="8186857" cy="461665"/>
           </a:xfrm>
           <a:prstGeom prst="rect">
             <a:avLst/>
@@ -6979,55 +6992,8 @@
           <a:lstStyle/>
           <a:p>
             <a:r>
-              <a:rPr kumimoji="1" lang="en-US" altLang="ja-JP" sz="2400" b="1" dirty="0">
-                <a:solidFill>
-                  <a:srgbClr val="00B050"/>
-                </a:solidFill>
-              </a:rPr>
-              <a:t>Menu Item</a:t>
-            </a:r>
-            <a:r>
               <a:rPr kumimoji="1" lang="ja-JP" altLang="en-US" sz="2400" dirty="0"/>
-              <a:t>属性は、</a:t>
-            </a:r>
-            <a:r>
-              <a:rPr kumimoji="1" lang="en-US" altLang="ja-JP" sz="2400" b="1" dirty="0">
-                <a:solidFill>
-                  <a:srgbClr val="FF0000"/>
-                </a:solidFill>
-              </a:rPr>
-              <a:t>Unity</a:t>
-            </a:r>
-            <a:r>
-              <a:rPr kumimoji="1" lang="ja-JP" altLang="en-US" sz="2400" b="1" dirty="0">
-                <a:solidFill>
-                  <a:srgbClr val="FF0000"/>
-                </a:solidFill>
-              </a:rPr>
-              <a:t>のメニュー画面に追加する属性</a:t>
-            </a:r>
-            <a:r>
-              <a:rPr kumimoji="1" lang="ja-JP" altLang="en-US" sz="2400" dirty="0"/>
-              <a:t>になります。</a:t>
-            </a:r>
-            <a:endParaRPr kumimoji="1" lang="en-US" altLang="ja-JP" sz="2400" dirty="0"/>
-          </a:p>
-          <a:p>
-            <a:r>
-              <a:rPr kumimoji="1" lang="ja-JP" altLang="en-US" sz="2400" dirty="0"/>
-              <a:t>メニューをクリックすると、下の</a:t>
-            </a:r>
-            <a:r>
-              <a:rPr kumimoji="1" lang="ja-JP" altLang="en-US" sz="2400" b="1" dirty="0">
-                <a:solidFill>
-                  <a:srgbClr val="FF0000"/>
-                </a:solidFill>
-              </a:rPr>
-              <a:t>静的関数</a:t>
-            </a:r>
-            <a:r>
-              <a:rPr kumimoji="1" lang="ja-JP" altLang="en-US" sz="2400" dirty="0"/>
-              <a:t>が呼び出されます。</a:t>
+              <a:t>ラッパー内のデータが揃えば、ラップして出力できます。</a:t>
             </a:r>
             <a:endParaRPr kumimoji="1" lang="en-US" altLang="ja-JP" sz="2400" dirty="0"/>
           </a:p>
@@ -7035,10 +7001,10 @@
       </p:sp>
       <p:pic>
         <p:nvPicPr>
-          <p:cNvPr id="3" name="図 2">
-            <a:extLst>
-              <a:ext uri="{FF2B5EF4-FFF2-40B4-BE49-F238E27FC236}">
-                <a16:creationId xmlns:a16="http://schemas.microsoft.com/office/drawing/2014/main" id="{19C161FC-176C-4B51-B8C0-3FFD3B5EE820}"/>
+          <p:cNvPr id="5" name="図 4">
+            <a:extLst>
+              <a:ext uri="{FF2B5EF4-FFF2-40B4-BE49-F238E27FC236}">
+                <a16:creationId xmlns:a16="http://schemas.microsoft.com/office/drawing/2014/main" id="{DED4EC62-5D5C-4FB3-85DD-2B27340D1AFA}"/>
               </a:ext>
             </a:extLst>
           </p:cNvPr>
@@ -7055,8 +7021,8 @@
         </p:blipFill>
         <p:spPr>
           <a:xfrm>
-            <a:off x="567542" y="2187126"/>
-            <a:ext cx="5015010" cy="1846992"/>
+            <a:off x="567542" y="1817793"/>
+            <a:ext cx="9908212" cy="1705335"/>
           </a:xfrm>
           <a:prstGeom prst="rect">
             <a:avLst/>
@@ -7066,7 +7032,7 @@
     </p:spTree>
     <p:extLst>
       <p:ext uri="{BB962C8B-B14F-4D97-AF65-F5344CB8AC3E}">
-        <p14:creationId xmlns:p14="http://schemas.microsoft.com/office/powerpoint/2010/main" val="3518399062"/>
+        <p14:creationId xmlns:p14="http://schemas.microsoft.com/office/powerpoint/2010/main" val="1183630749"/>
       </p:ext>
     </p:extLst>
   </p:cSld>
@@ -7107,8 +7073,8 @@
         </p:nvSpPr>
         <p:spPr>
           <a:xfrm>
-            <a:off x="4737295" y="3136613"/>
-            <a:ext cx="2717411" cy="584775"/>
+            <a:off x="567542" y="491954"/>
+            <a:ext cx="3297698" cy="584775"/>
           </a:xfrm>
           <a:prstGeom prst="rect">
             <a:avLst/>
@@ -7123,20 +7089,133 @@
           <a:p>
             <a:r>
               <a:rPr kumimoji="1" lang="en-US" altLang="ja-JP" sz="3200" b="1" u="sng" dirty="0"/>
-              <a:t>Json</a:t>
+              <a:t>Unity</a:t>
             </a:r>
             <a:r>
               <a:rPr kumimoji="1" lang="ja-JP" altLang="en-US" sz="3200" b="1" u="sng" dirty="0"/>
-              <a:t>ファイル</a:t>
+              <a:t>の機能拡張</a:t>
             </a:r>
             <a:endParaRPr kumimoji="1" lang="en-US" altLang="ja-JP" sz="3200" b="1" u="sng" dirty="0"/>
           </a:p>
         </p:txBody>
       </p:sp>
+      <p:sp>
+        <p:nvSpPr>
+          <p:cNvPr id="6" name="テキスト ボックス 5">
+            <a:extLst>
+              <a:ext uri="{FF2B5EF4-FFF2-40B4-BE49-F238E27FC236}">
+                <a16:creationId xmlns:a16="http://schemas.microsoft.com/office/drawing/2014/main" id="{55830AD6-028B-4C4E-80BF-B70DFC1C3A46}"/>
+              </a:ext>
+            </a:extLst>
+          </p:cNvPr>
+          <p:cNvSpPr txBox="1"/>
+          <p:nvPr/>
+        </p:nvSpPr>
+        <p:spPr>
+          <a:xfrm>
+            <a:off x="567542" y="1216429"/>
+            <a:ext cx="9990235" cy="830997"/>
+          </a:xfrm>
+          <a:prstGeom prst="rect">
+            <a:avLst/>
+          </a:prstGeom>
+          <a:noFill/>
+        </p:spPr>
+        <p:txBody>
+          <a:bodyPr wrap="none" rtlCol="0">
+            <a:spAutoFit/>
+          </a:bodyPr>
+          <a:lstStyle/>
+          <a:p>
+            <a:r>
+              <a:rPr kumimoji="1" lang="en-US" altLang="ja-JP" sz="2400" b="1" dirty="0">
+                <a:solidFill>
+                  <a:srgbClr val="00B050"/>
+                </a:solidFill>
+              </a:rPr>
+              <a:t>Menu Item</a:t>
+            </a:r>
+            <a:r>
+              <a:rPr kumimoji="1" lang="ja-JP" altLang="en-US" sz="2400" dirty="0"/>
+              <a:t>属性は、</a:t>
+            </a:r>
+            <a:r>
+              <a:rPr kumimoji="1" lang="en-US" altLang="ja-JP" sz="2400" b="1" dirty="0">
+                <a:solidFill>
+                  <a:srgbClr val="FF0000"/>
+                </a:solidFill>
+              </a:rPr>
+              <a:t>Unity</a:t>
+            </a:r>
+            <a:r>
+              <a:rPr kumimoji="1" lang="ja-JP" altLang="en-US" sz="2400" b="1" dirty="0">
+                <a:solidFill>
+                  <a:srgbClr val="FF0000"/>
+                </a:solidFill>
+              </a:rPr>
+              <a:t>のメニュー画面に追加する属性</a:t>
+            </a:r>
+            <a:r>
+              <a:rPr kumimoji="1" lang="ja-JP" altLang="en-US" sz="2400" dirty="0"/>
+              <a:t>になります。</a:t>
+            </a:r>
+            <a:endParaRPr kumimoji="1" lang="en-US" altLang="ja-JP" sz="2400" dirty="0"/>
+          </a:p>
+          <a:p>
+            <a:r>
+              <a:rPr kumimoji="1" lang="ja-JP" altLang="en-US" sz="2400" dirty="0"/>
+              <a:t>メニューをクリックすると、下の</a:t>
+            </a:r>
+            <a:r>
+              <a:rPr kumimoji="1" lang="ja-JP" altLang="en-US" sz="2400" b="1" dirty="0">
+                <a:solidFill>
+                  <a:srgbClr val="FF0000"/>
+                </a:solidFill>
+              </a:rPr>
+              <a:t>静的関数</a:t>
+            </a:r>
+            <a:r>
+              <a:rPr kumimoji="1" lang="ja-JP" altLang="en-US" sz="2400" dirty="0"/>
+              <a:t>が呼び出されます。</a:t>
+            </a:r>
+            <a:endParaRPr kumimoji="1" lang="en-US" altLang="ja-JP" sz="2400" dirty="0"/>
+          </a:p>
+        </p:txBody>
+      </p:sp>
+      <p:pic>
+        <p:nvPicPr>
+          <p:cNvPr id="3" name="図 2">
+            <a:extLst>
+              <a:ext uri="{FF2B5EF4-FFF2-40B4-BE49-F238E27FC236}">
+                <a16:creationId xmlns:a16="http://schemas.microsoft.com/office/drawing/2014/main" id="{19C161FC-176C-4B51-B8C0-3FFD3B5EE820}"/>
+              </a:ext>
+            </a:extLst>
+          </p:cNvPr>
+          <p:cNvPicPr>
+            <a:picLocks noChangeAspect="1"/>
+          </p:cNvPicPr>
+          <p:nvPr/>
+        </p:nvPicPr>
+        <p:blipFill>
+          <a:blip r:embed="rId2"/>
+          <a:stretch>
+            <a:fillRect/>
+          </a:stretch>
+        </p:blipFill>
+        <p:spPr>
+          <a:xfrm>
+            <a:off x="567542" y="2187126"/>
+            <a:ext cx="5015010" cy="1846992"/>
+          </a:xfrm>
+          <a:prstGeom prst="rect">
+            <a:avLst/>
+          </a:prstGeom>
+        </p:spPr>
+      </p:pic>
     </p:spTree>
     <p:extLst>
       <p:ext uri="{BB962C8B-B14F-4D97-AF65-F5344CB8AC3E}">
-        <p14:creationId xmlns:p14="http://schemas.microsoft.com/office/powerpoint/2010/main" val="3429774268"/>
+        <p14:creationId xmlns:p14="http://schemas.microsoft.com/office/powerpoint/2010/main" val="3518399062"/>
       </p:ext>
     </p:extLst>
   </p:cSld>
@@ -7177,7 +7256,7 @@
         </p:nvSpPr>
         <p:spPr>
           <a:xfrm>
-            <a:off x="567542" y="491954"/>
+            <a:off x="4737295" y="3136613"/>
             <a:ext cx="2717411" cy="584775"/>
           </a:xfrm>
           <a:prstGeom prst="rect">
@@ -7203,111 +7282,10 @@
           </a:p>
         </p:txBody>
       </p:sp>
-      <p:sp>
-        <p:nvSpPr>
-          <p:cNvPr id="6" name="テキスト ボックス 5">
-            <a:extLst>
-              <a:ext uri="{FF2B5EF4-FFF2-40B4-BE49-F238E27FC236}">
-                <a16:creationId xmlns:a16="http://schemas.microsoft.com/office/drawing/2014/main" id="{55830AD6-028B-4C4E-80BF-B70DFC1C3A46}"/>
-              </a:ext>
-            </a:extLst>
-          </p:cNvPr>
-          <p:cNvSpPr txBox="1"/>
-          <p:nvPr/>
-        </p:nvSpPr>
-        <p:spPr>
-          <a:xfrm>
-            <a:off x="567542" y="1216429"/>
-            <a:ext cx="9743373" cy="830997"/>
-          </a:xfrm>
-          <a:prstGeom prst="rect">
-            <a:avLst/>
-          </a:prstGeom>
-          <a:noFill/>
-        </p:spPr>
-        <p:txBody>
-          <a:bodyPr wrap="none" rtlCol="0">
-            <a:spAutoFit/>
-          </a:bodyPr>
-          <a:lstStyle/>
-          <a:p>
-            <a:r>
-              <a:rPr kumimoji="1" lang="en-US" altLang="ja-JP" sz="2400" b="1" dirty="0">
-                <a:solidFill>
-                  <a:srgbClr val="FF0000"/>
-                </a:solidFill>
-              </a:rPr>
-              <a:t>json</a:t>
-            </a:r>
-            <a:r>
-              <a:rPr kumimoji="1" lang="ja-JP" altLang="en-US" sz="2400" b="1" dirty="0">
-                <a:solidFill>
-                  <a:srgbClr val="FF0000"/>
-                </a:solidFill>
-              </a:rPr>
-              <a:t>ファイル</a:t>
-            </a:r>
-            <a:r>
-              <a:rPr kumimoji="1" lang="ja-JP" altLang="en-US" sz="2400" dirty="0"/>
-              <a:t>とは、</a:t>
-            </a:r>
-            <a:r>
-              <a:rPr kumimoji="1" lang="ja-JP" altLang="en-US" sz="2400" b="1" dirty="0">
-                <a:solidFill>
-                  <a:srgbClr val="FF0000"/>
-                </a:solidFill>
-              </a:rPr>
-              <a:t>データをカッコで区切ったファイル</a:t>
-            </a:r>
-            <a:r>
-              <a:rPr kumimoji="1" lang="ja-JP" altLang="en-US" sz="2400" dirty="0"/>
-              <a:t>となります。</a:t>
-            </a:r>
-            <a:endParaRPr kumimoji="1" lang="en-US" altLang="ja-JP" sz="2400" dirty="0"/>
-          </a:p>
-          <a:p>
-            <a:r>
-              <a:rPr kumimoji="1" lang="ja-JP" altLang="en-US" sz="2400" dirty="0"/>
-              <a:t>プログラム上での扱い方が簡単で、開発現場でもよく使われます。</a:t>
-            </a:r>
-            <a:endParaRPr kumimoji="1" lang="en-US" altLang="ja-JP" sz="2400" dirty="0"/>
-          </a:p>
-        </p:txBody>
-      </p:sp>
-      <p:pic>
-        <p:nvPicPr>
-          <p:cNvPr id="5" name="図 4">
-            <a:extLst>
-              <a:ext uri="{FF2B5EF4-FFF2-40B4-BE49-F238E27FC236}">
-                <a16:creationId xmlns:a16="http://schemas.microsoft.com/office/drawing/2014/main" id="{1E3BBA96-FF27-4BFA-A11D-BC3AAB3743A6}"/>
-              </a:ext>
-            </a:extLst>
-          </p:cNvPr>
-          <p:cNvPicPr>
-            <a:picLocks noChangeAspect="1"/>
-          </p:cNvPicPr>
-          <p:nvPr/>
-        </p:nvPicPr>
-        <p:blipFill>
-          <a:blip r:embed="rId2"/>
-          <a:stretch>
-            <a:fillRect/>
-          </a:stretch>
-        </p:blipFill>
-        <p:spPr>
-          <a:xfrm>
-            <a:off x="567542" y="2187126"/>
-            <a:ext cx="8280623" cy="4450835"/>
-          </a:xfrm>
-          <a:prstGeom prst="rect">
-            <a:avLst/>
-          </a:prstGeom>
-        </p:spPr>
-      </p:pic>
     </p:spTree>
     <p:extLst>
       <p:ext uri="{BB962C8B-B14F-4D97-AF65-F5344CB8AC3E}">
-        <p14:creationId xmlns:p14="http://schemas.microsoft.com/office/powerpoint/2010/main" val="3403474731"/>
+        <p14:creationId xmlns:p14="http://schemas.microsoft.com/office/powerpoint/2010/main" val="3429774268"/>
       </p:ext>
     </p:extLst>
   </p:cSld>
@@ -7606,7 +7584,7 @@
         <p:spPr>
           <a:xfrm>
             <a:off x="567542" y="1216429"/>
-            <a:ext cx="7861447" cy="2308324"/>
+            <a:ext cx="9743373" cy="830997"/>
           </a:xfrm>
           <a:prstGeom prst="rect">
             <a:avLst/>
@@ -7620,133 +7598,82 @@
           <a:lstStyle/>
           <a:p>
             <a:r>
-              <a:rPr lang="en-US" altLang="ja-JP" sz="2400" dirty="0"/>
-              <a:t>json</a:t>
-            </a:r>
-            <a:r>
-              <a:rPr lang="ja-JP" altLang="en-US" sz="2400" dirty="0"/>
-              <a:t>は普及率も高く、</a:t>
-            </a:r>
-            <a:r>
-              <a:rPr lang="en-US" altLang="ja-JP" sz="2400" dirty="0"/>
-              <a:t>C++</a:t>
-            </a:r>
-            <a:r>
-              <a:rPr lang="ja-JP" altLang="en-US" sz="2400" dirty="0"/>
-              <a:t>でも簡単に扱えます。</a:t>
-            </a:r>
-            <a:endParaRPr lang="en-US" altLang="ja-JP" sz="2400" dirty="0"/>
-          </a:p>
-          <a:p>
-            <a:r>
-              <a:rPr lang="en-US" altLang="ja-JP" sz="2400" dirty="0"/>
-              <a:t>json</a:t>
-            </a:r>
-            <a:r>
-              <a:rPr lang="ja-JP" altLang="en-US" sz="2400" dirty="0"/>
-              <a:t>をサポートしたライブラリはいくつかありますが、</a:t>
-            </a:r>
-            <a:endParaRPr lang="en-US" altLang="ja-JP" sz="2400" dirty="0"/>
-          </a:p>
-          <a:p>
-            <a:r>
-              <a:rPr lang="ja-JP" altLang="en-US" sz="2400" dirty="0"/>
-              <a:t>今回は「</a:t>
-            </a:r>
-            <a:r>
-              <a:rPr lang="en-US" altLang="ja-JP" sz="2400" b="1" dirty="0" err="1">
+              <a:rPr kumimoji="1" lang="en-US" altLang="ja-JP" sz="2400" b="1" dirty="0">
                 <a:solidFill>
                   <a:srgbClr val="FF0000"/>
                 </a:solidFill>
               </a:rPr>
-              <a:t>nlohmann</a:t>
-            </a:r>
-            <a:r>
-              <a:rPr lang="en-US" altLang="ja-JP" sz="2400" b="1" dirty="0">
+              <a:t>json</a:t>
+            </a:r>
+            <a:r>
+              <a:rPr kumimoji="1" lang="ja-JP" altLang="en-US" sz="2400" b="1" dirty="0">
                 <a:solidFill>
                   <a:srgbClr val="FF0000"/>
                 </a:solidFill>
               </a:rPr>
-              <a:t> json</a:t>
-            </a:r>
-            <a:r>
-              <a:rPr lang="ja-JP" altLang="en-US" sz="2400" dirty="0"/>
-              <a:t>」を使用します。</a:t>
-            </a:r>
-            <a:endParaRPr lang="en-US" altLang="ja-JP" sz="2400" dirty="0"/>
-          </a:p>
-          <a:p>
-            <a:endParaRPr lang="en-US" altLang="ja-JP" sz="2400" dirty="0"/>
-          </a:p>
-          <a:p>
-            <a:r>
-              <a:rPr lang="ja-JP" altLang="en-US" sz="2400" b="1" dirty="0">
+              <a:t>ファイル</a:t>
+            </a:r>
+            <a:r>
+              <a:rPr kumimoji="1" lang="ja-JP" altLang="en-US" sz="2400" dirty="0"/>
+              <a:t>とは、</a:t>
+            </a:r>
+            <a:r>
+              <a:rPr kumimoji="1" lang="ja-JP" altLang="en-US" sz="2400" b="1" dirty="0">
                 <a:solidFill>
                   <a:srgbClr val="FF0000"/>
                 </a:solidFill>
               </a:rPr>
-              <a:t>■</a:t>
-            </a:r>
-            <a:r>
-              <a:rPr lang="en-US" altLang="ja-JP" sz="2400" b="1" dirty="0" err="1">
-                <a:solidFill>
-                  <a:srgbClr val="FF0000"/>
-                </a:solidFill>
-              </a:rPr>
-              <a:t>nlohmann</a:t>
-            </a:r>
-            <a:r>
-              <a:rPr lang="en-US" altLang="ja-JP" sz="2400" b="1" dirty="0">
-                <a:solidFill>
-                  <a:srgbClr val="FF0000"/>
-                </a:solidFill>
-              </a:rPr>
-              <a:t> json</a:t>
-            </a:r>
-            <a:r>
-              <a:rPr lang="ja-JP" altLang="en-US" sz="2400" b="1" dirty="0">
-                <a:solidFill>
-                  <a:srgbClr val="FF0000"/>
-                </a:solidFill>
-              </a:rPr>
-              <a:t>の</a:t>
-            </a:r>
-            <a:r>
-              <a:rPr lang="en-US" altLang="ja-JP" sz="2400" b="1" dirty="0">
-                <a:solidFill>
-                  <a:srgbClr val="FF0000"/>
-                </a:solidFill>
-              </a:rPr>
-              <a:t>Git Hub</a:t>
-            </a:r>
-          </a:p>
-          <a:p>
-            <a:r>
-              <a:rPr lang="en-US" altLang="ja-JP" sz="2400" dirty="0">
-                <a:hlinkClick r:id="rId2"/>
-              </a:rPr>
-              <a:t>GitHub - </a:t>
-            </a:r>
-            <a:r>
-              <a:rPr lang="en-US" altLang="ja-JP" sz="2400" dirty="0" err="1">
-                <a:hlinkClick r:id="rId2"/>
-              </a:rPr>
-              <a:t>nlohmann</a:t>
-            </a:r>
-            <a:r>
-              <a:rPr lang="en-US" altLang="ja-JP" sz="2400" dirty="0">
-                <a:hlinkClick r:id="rId2"/>
-              </a:rPr>
-              <a:t>/json: JSON for Modern C++</a:t>
-            </a:r>
-            <a:endParaRPr lang="en-US" altLang="ja-JP" sz="2400" dirty="0"/>
-          </a:p>
-        </p:txBody>
-      </p:sp>
+              <a:t>データをカッコで区切ったファイル</a:t>
+            </a:r>
+            <a:r>
+              <a:rPr kumimoji="1" lang="ja-JP" altLang="en-US" sz="2400" dirty="0"/>
+              <a:t>となります。</a:t>
+            </a:r>
+            <a:endParaRPr kumimoji="1" lang="en-US" altLang="ja-JP" sz="2400" dirty="0"/>
+          </a:p>
+          <a:p>
+            <a:r>
+              <a:rPr kumimoji="1" lang="ja-JP" altLang="en-US" sz="2400" dirty="0"/>
+              <a:t>プログラム上での扱い方が簡単で、開発現場でもよく使われます。</a:t>
+            </a:r>
+            <a:endParaRPr kumimoji="1" lang="en-US" altLang="ja-JP" sz="2400" dirty="0"/>
+          </a:p>
+        </p:txBody>
+      </p:sp>
+      <p:pic>
+        <p:nvPicPr>
+          <p:cNvPr id="5" name="図 4">
+            <a:extLst>
+              <a:ext uri="{FF2B5EF4-FFF2-40B4-BE49-F238E27FC236}">
+                <a16:creationId xmlns:a16="http://schemas.microsoft.com/office/drawing/2014/main" id="{1E3BBA96-FF27-4BFA-A11D-BC3AAB3743A6}"/>
+              </a:ext>
+            </a:extLst>
+          </p:cNvPr>
+          <p:cNvPicPr>
+            <a:picLocks noChangeAspect="1"/>
+          </p:cNvPicPr>
+          <p:nvPr/>
+        </p:nvPicPr>
+        <p:blipFill>
+          <a:blip r:embed="rId2"/>
+          <a:stretch>
+            <a:fillRect/>
+          </a:stretch>
+        </p:blipFill>
+        <p:spPr>
+          <a:xfrm>
+            <a:off x="567542" y="2187126"/>
+            <a:ext cx="8280623" cy="4450835"/>
+          </a:xfrm>
+          <a:prstGeom prst="rect">
+            <a:avLst/>
+          </a:prstGeom>
+        </p:spPr>
+      </p:pic>
     </p:spTree>
     <p:extLst>
       <p:ext uri="{BB962C8B-B14F-4D97-AF65-F5344CB8AC3E}">
-        <p14:creationId xmlns:p14="http://schemas.microsoft.com/office/powerpoint/2010/main" val="570218575"/>
+        <p14:creationId xmlns:p14="http://schemas.microsoft.com/office/powerpoint/2010/main" val="3403474731"/>
       </p:ext>
     </p:extLst>
   </p:cSld>
@@ -7828,7 +7755,7 @@
         <p:spPr>
           <a:xfrm>
             <a:off x="567542" y="1216429"/>
-            <a:ext cx="9889246" cy="1200329"/>
+            <a:ext cx="7861447" cy="2308324"/>
           </a:xfrm>
           <a:prstGeom prst="rect">
             <a:avLst/>
@@ -7842,23 +7769,46 @@
           <a:lstStyle/>
           <a:p>
             <a:r>
+              <a:rPr lang="en-US" altLang="ja-JP" sz="2400" dirty="0"/>
+              <a:t>json</a:t>
+            </a:r>
+            <a:r>
               <a:rPr lang="ja-JP" altLang="en-US" sz="2400" dirty="0"/>
-              <a:t>セットアップは簡単で、</a:t>
+              <a:t>は普及率も高く、</a:t>
             </a:r>
             <a:r>
               <a:rPr lang="en-US" altLang="ja-JP" sz="2400" dirty="0"/>
-              <a:t>Git Hub</a:t>
+              <a:t>C++</a:t>
             </a:r>
             <a:r>
               <a:rPr lang="ja-JP" altLang="en-US" sz="2400" dirty="0"/>
-              <a:t>からダウンロードしたデータにある、</a:t>
+              <a:t>でも簡単に扱えます。</a:t>
             </a:r>
             <a:endParaRPr lang="en-US" altLang="ja-JP" sz="2400" dirty="0"/>
           </a:p>
           <a:p>
             <a:r>
+              <a:rPr lang="en-US" altLang="ja-JP" sz="2400" dirty="0"/>
+              <a:t>json</a:t>
+            </a:r>
+            <a:r>
               <a:rPr lang="ja-JP" altLang="en-US" sz="2400" dirty="0"/>
-              <a:t>「</a:t>
+              <a:t>をサポートしたライブラリはいくつかありますが、</a:t>
+            </a:r>
+            <a:endParaRPr lang="en-US" altLang="ja-JP" sz="2400" dirty="0"/>
+          </a:p>
+          <a:p>
+            <a:r>
+              <a:rPr lang="ja-JP" altLang="en-US" sz="2400" dirty="0"/>
+              <a:t>今回は「</a:t>
+            </a:r>
+            <a:r>
+              <a:rPr lang="en-US" altLang="ja-JP" sz="2400" b="1" dirty="0" err="1">
+                <a:solidFill>
+                  <a:srgbClr val="FF0000"/>
+                </a:solidFill>
+              </a:rPr>
+              <a:t>nlohmann</a:t>
             </a:r>
             <a:r>
               <a:rPr lang="en-US" altLang="ja-JP" sz="2400" b="1" dirty="0">
@@ -7866,84 +7816,77 @@
                   <a:srgbClr val="FF0000"/>
                 </a:solidFill>
               </a:rPr>
-              <a:t>json.hpp</a:t>
+              <a:t> json</a:t>
             </a:r>
             <a:r>
               <a:rPr lang="ja-JP" altLang="en-US" sz="2400" dirty="0"/>
-              <a:t>」ファイルをプロジェクトに入れるだけです。</a:t>
+              <a:t>」を使用します。</a:t>
             </a:r>
             <a:endParaRPr lang="en-US" altLang="ja-JP" sz="2400" dirty="0"/>
           </a:p>
           <a:p>
-            <a:r>
-              <a:rPr lang="ja-JP" altLang="en-US" sz="2400" dirty="0"/>
-              <a:t>プロジェクト設定も何もいりません。</a:t>
-            </a:r>
             <a:endParaRPr lang="en-US" altLang="ja-JP" sz="2400" dirty="0"/>
           </a:p>
-        </p:txBody>
-      </p:sp>
-      <p:pic>
-        <p:nvPicPr>
-          <p:cNvPr id="3" name="図 2">
-            <a:extLst>
-              <a:ext uri="{FF2B5EF4-FFF2-40B4-BE49-F238E27FC236}">
-                <a16:creationId xmlns:a16="http://schemas.microsoft.com/office/drawing/2014/main" id="{91EDCA16-E025-4D20-BD9A-1C87B54670D1}"/>
-              </a:ext>
-            </a:extLst>
-          </p:cNvPr>
-          <p:cNvPicPr>
-            <a:picLocks noChangeAspect="1"/>
-          </p:cNvPicPr>
-          <p:nvPr/>
-        </p:nvPicPr>
-        <p:blipFill>
-          <a:blip r:embed="rId2"/>
-          <a:stretch>
-            <a:fillRect/>
-          </a:stretch>
-        </p:blipFill>
-        <p:spPr>
-          <a:xfrm>
-            <a:off x="567541" y="2556459"/>
-            <a:ext cx="2443071" cy="1255280"/>
-          </a:xfrm>
-          <a:prstGeom prst="rect">
-            <a:avLst/>
-          </a:prstGeom>
-        </p:spPr>
-      </p:pic>
-      <p:sp>
-        <p:nvSpPr>
-          <p:cNvPr id="7" name="テキスト ボックス 6">
-            <a:extLst>
-              <a:ext uri="{FF2B5EF4-FFF2-40B4-BE49-F238E27FC236}">
-                <a16:creationId xmlns:a16="http://schemas.microsoft.com/office/drawing/2014/main" id="{C1803F7E-3C4A-4FB6-9CD7-82CD68E45257}"/>
-              </a:ext>
-            </a:extLst>
-          </p:cNvPr>
-          <p:cNvSpPr txBox="1"/>
-          <p:nvPr/>
-        </p:nvSpPr>
-        <p:spPr>
-          <a:xfrm>
-            <a:off x="567541" y="3954733"/>
-            <a:ext cx="6647974" cy="461665"/>
-          </a:xfrm>
-          <a:prstGeom prst="rect">
-            <a:avLst/>
-          </a:prstGeom>
-          <a:noFill/>
-        </p:spPr>
-        <p:txBody>
-          <a:bodyPr wrap="none" rtlCol="0">
-            <a:spAutoFit/>
-          </a:bodyPr>
-          <a:lstStyle/>
-          <a:p>
-            <a:r>
-              <a:rPr lang="ja-JP" altLang="en-US" sz="2400" dirty="0"/>
-              <a:t>今回は配布プロジェクトに既に入れています。</a:t>
+          <a:p>
+            <a:r>
+              <a:rPr lang="ja-JP" altLang="en-US" sz="2400" b="1" dirty="0">
+                <a:solidFill>
+                  <a:srgbClr val="FF0000"/>
+                </a:solidFill>
+              </a:rPr>
+              <a:t>■</a:t>
+            </a:r>
+            <a:r>
+              <a:rPr lang="en-US" altLang="ja-JP" sz="2400" b="1" dirty="0" err="1">
+                <a:solidFill>
+                  <a:srgbClr val="FF0000"/>
+                </a:solidFill>
+              </a:rPr>
+              <a:t>nlohmann</a:t>
+            </a:r>
+            <a:r>
+              <a:rPr lang="en-US" altLang="ja-JP" sz="2400" b="1" dirty="0">
+                <a:solidFill>
+                  <a:srgbClr val="FF0000"/>
+                </a:solidFill>
+              </a:rPr>
+              <a:t> json</a:t>
+            </a:r>
+            <a:r>
+              <a:rPr lang="ja-JP" altLang="en-US" sz="2400" b="1" dirty="0">
+                <a:solidFill>
+                  <a:srgbClr val="FF0000"/>
+                </a:solidFill>
+              </a:rPr>
+              <a:t>の</a:t>
+            </a:r>
+            <a:r>
+              <a:rPr lang="en-US" altLang="ja-JP" sz="2400" b="1" dirty="0">
+                <a:solidFill>
+                  <a:srgbClr val="FF0000"/>
+                </a:solidFill>
+              </a:rPr>
+              <a:t>Git Hub</a:t>
+            </a:r>
+          </a:p>
+          <a:p>
+            <a:r>
+              <a:rPr lang="en-US" altLang="ja-JP" sz="2400" dirty="0">
+                <a:hlinkClick r:id="rId2"/>
+              </a:rPr>
+              <a:t>GitHub - </a:t>
+            </a:r>
+            <a:r>
+              <a:rPr lang="en-US" altLang="ja-JP" sz="2400" dirty="0" err="1">
+                <a:hlinkClick r:id="rId2"/>
+              </a:rPr>
+              <a:t>nlohmann</a:t>
+            </a:r>
+            <a:r>
+              <a:rPr lang="en-US" altLang="ja-JP" sz="2400" dirty="0">
+                <a:hlinkClick r:id="rId2"/>
+              </a:rPr>
+              <a:t>/json: JSON for Modern C++</a:t>
             </a:r>
             <a:endParaRPr lang="en-US" altLang="ja-JP" sz="2400" dirty="0"/>
           </a:p>
@@ -7952,7 +7895,7 @@
     </p:spTree>
     <p:extLst>
       <p:ext uri="{BB962C8B-B14F-4D97-AF65-F5344CB8AC3E}">
-        <p14:creationId xmlns:p14="http://schemas.microsoft.com/office/powerpoint/2010/main" val="3972200269"/>
+        <p14:creationId xmlns:p14="http://schemas.microsoft.com/office/powerpoint/2010/main" val="570218575"/>
       </p:ext>
     </p:extLst>
   </p:cSld>
@@ -8034,7 +7977,7 @@
         <p:spPr>
           <a:xfrm>
             <a:off x="567542" y="1216429"/>
-            <a:ext cx="6984604" cy="461665"/>
+            <a:ext cx="9889246" cy="1200329"/>
           </a:xfrm>
           <a:prstGeom prst="rect">
             <a:avLst/>
@@ -8048,20 +7991,42 @@
           <a:lstStyle/>
           <a:p>
             <a:r>
-              <a:rPr lang="en-US" altLang="ja-JP" sz="2400" b="1" dirty="0" err="1">
+              <a:rPr lang="ja-JP" altLang="en-US" sz="2400" dirty="0"/>
+              <a:t>セットアップは簡単で、</a:t>
+            </a:r>
+            <a:r>
+              <a:rPr lang="en-US" altLang="ja-JP" sz="2400" dirty="0"/>
+              <a:t>Git Hub</a:t>
+            </a:r>
+            <a:r>
+              <a:rPr lang="ja-JP" altLang="en-US" sz="2400" dirty="0"/>
+              <a:t>からダウンロードしたデータにある、</a:t>
+            </a:r>
+            <a:endParaRPr lang="en-US" altLang="ja-JP" sz="2400" dirty="0"/>
+          </a:p>
+          <a:p>
+            <a:r>
+              <a:rPr lang="ja-JP" altLang="en-US" sz="2400" dirty="0"/>
+              <a:t>「</a:t>
+            </a:r>
+            <a:r>
+              <a:rPr lang="en-US" altLang="ja-JP" sz="2400" b="1" dirty="0">
                 <a:solidFill>
                   <a:srgbClr val="FF0000"/>
                 </a:solidFill>
               </a:rPr>
-              <a:t>StageParameter.h</a:t>
-            </a:r>
-            <a:r>
-              <a:rPr lang="en-US" altLang="ja-JP" sz="2400" dirty="0"/>
-              <a:t> </a:t>
+              <a:t>json.hpp</a:t>
             </a:r>
             <a:r>
               <a:rPr lang="ja-JP" altLang="en-US" sz="2400" dirty="0"/>
-              <a:t>を開いて書きます（その１）</a:t>
+              <a:t>」ファイルをプロジェクトに入れるだけです。</a:t>
+            </a:r>
+            <a:endParaRPr lang="en-US" altLang="ja-JP" sz="2400" dirty="0"/>
+          </a:p>
+          <a:p>
+            <a:r>
+              <a:rPr lang="ja-JP" altLang="en-US" sz="2400" dirty="0"/>
+              <a:t>プロジェクト設定も何もいりません。</a:t>
             </a:r>
             <a:endParaRPr lang="en-US" altLang="ja-JP" sz="2400" dirty="0"/>
           </a:p>
@@ -8069,10 +8034,10 @@
       </p:sp>
       <p:pic>
         <p:nvPicPr>
-          <p:cNvPr id="5" name="図 4">
-            <a:extLst>
-              <a:ext uri="{FF2B5EF4-FFF2-40B4-BE49-F238E27FC236}">
-                <a16:creationId xmlns:a16="http://schemas.microsoft.com/office/drawing/2014/main" id="{6A02A5B5-E5B8-4F0E-9C70-C567F339022D}"/>
+          <p:cNvPr id="3" name="図 2">
+            <a:extLst>
+              <a:ext uri="{FF2B5EF4-FFF2-40B4-BE49-F238E27FC236}">
+                <a16:creationId xmlns:a16="http://schemas.microsoft.com/office/drawing/2014/main" id="{91EDCA16-E025-4D20-BD9A-1C87B54670D1}"/>
               </a:ext>
             </a:extLst>
           </p:cNvPr>
@@ -8089,18 +8054,54 @@
         </p:blipFill>
         <p:spPr>
           <a:xfrm>
-            <a:off x="567542" y="1817793"/>
-            <a:ext cx="5902120" cy="4287171"/>
+            <a:off x="567541" y="2556459"/>
+            <a:ext cx="2443071" cy="1255280"/>
           </a:xfrm>
           <a:prstGeom prst="rect">
             <a:avLst/>
           </a:prstGeom>
         </p:spPr>
       </p:pic>
+      <p:sp>
+        <p:nvSpPr>
+          <p:cNvPr id="7" name="テキスト ボックス 6">
+            <a:extLst>
+              <a:ext uri="{FF2B5EF4-FFF2-40B4-BE49-F238E27FC236}">
+                <a16:creationId xmlns:a16="http://schemas.microsoft.com/office/drawing/2014/main" id="{C1803F7E-3C4A-4FB6-9CD7-82CD68E45257}"/>
+              </a:ext>
+            </a:extLst>
+          </p:cNvPr>
+          <p:cNvSpPr txBox="1"/>
+          <p:nvPr/>
+        </p:nvSpPr>
+        <p:spPr>
+          <a:xfrm>
+            <a:off x="567541" y="3954733"/>
+            <a:ext cx="6647974" cy="461665"/>
+          </a:xfrm>
+          <a:prstGeom prst="rect">
+            <a:avLst/>
+          </a:prstGeom>
+          <a:noFill/>
+        </p:spPr>
+        <p:txBody>
+          <a:bodyPr wrap="none" rtlCol="0">
+            <a:spAutoFit/>
+          </a:bodyPr>
+          <a:lstStyle/>
+          <a:p>
+            <a:r>
+              <a:rPr lang="ja-JP" altLang="en-US" sz="2400" dirty="0"/>
+              <a:t>今回は配布プロジェクトに既に入れています。</a:t>
+            </a:r>
+            <a:endParaRPr lang="en-US" altLang="ja-JP" sz="2400" dirty="0"/>
+          </a:p>
+        </p:txBody>
+      </p:sp>
     </p:spTree>
     <p:extLst>
       <p:ext uri="{BB962C8B-B14F-4D97-AF65-F5344CB8AC3E}">
-        <p14:creationId xmlns:p14="http://schemas.microsoft.com/office/powerpoint/2010/main" val="3837552963"/>
+        <p14:creationId xmlns:p14="http://schemas.microsoft.com/office/powerpoint/2010/main" val="3972200269"/>
       </p:ext>
     </p:extLst>
   </p:cSld>
@@ -8209,7 +8210,7 @@
             </a:r>
             <a:r>
               <a:rPr lang="ja-JP" altLang="en-US" sz="2400" dirty="0"/>
-              <a:t>を開いて書きます（その２）</a:t>
+              <a:t>を開いて書きます（その１）</a:t>
             </a:r>
             <a:endParaRPr lang="en-US" altLang="ja-JP" sz="2400" dirty="0"/>
           </a:p>
@@ -8217,10 +8218,10 @@
       </p:sp>
       <p:pic>
         <p:nvPicPr>
-          <p:cNvPr id="3" name="図 2">
-            <a:extLst>
-              <a:ext uri="{FF2B5EF4-FFF2-40B4-BE49-F238E27FC236}">
-                <a16:creationId xmlns:a16="http://schemas.microsoft.com/office/drawing/2014/main" id="{C93C0DC6-D279-4243-BECB-622A5064BFC7}"/>
+          <p:cNvPr id="5" name="図 4">
+            <a:extLst>
+              <a:ext uri="{FF2B5EF4-FFF2-40B4-BE49-F238E27FC236}">
+                <a16:creationId xmlns:a16="http://schemas.microsoft.com/office/drawing/2014/main" id="{6A02A5B5-E5B8-4F0E-9C70-C567F339022D}"/>
               </a:ext>
             </a:extLst>
           </p:cNvPr>
@@ -8237,8 +8238,8 @@
         </p:blipFill>
         <p:spPr>
           <a:xfrm>
-            <a:off x="567542" y="1822276"/>
-            <a:ext cx="6163306" cy="4345442"/>
+            <a:off x="567542" y="1817793"/>
+            <a:ext cx="5902120" cy="4287171"/>
           </a:xfrm>
           <a:prstGeom prst="rect">
             <a:avLst/>
@@ -8248,7 +8249,7 @@
     </p:spTree>
     <p:extLst>
       <p:ext uri="{BB962C8B-B14F-4D97-AF65-F5344CB8AC3E}">
-        <p14:creationId xmlns:p14="http://schemas.microsoft.com/office/powerpoint/2010/main" val="3602684594"/>
+        <p14:creationId xmlns:p14="http://schemas.microsoft.com/office/powerpoint/2010/main" val="3837552963"/>
       </p:ext>
     </p:extLst>
   </p:cSld>
@@ -8357,7 +8358,7 @@
             </a:r>
             <a:r>
               <a:rPr lang="ja-JP" altLang="en-US" sz="2400" dirty="0"/>
-              <a:t>を開いて書きます（その３）</a:t>
+              <a:t>を開いて書きます（その２）</a:t>
             </a:r>
             <a:endParaRPr lang="en-US" altLang="ja-JP" sz="2400" dirty="0"/>
           </a:p>
@@ -8365,10 +8366,10 @@
       </p:sp>
       <p:pic>
         <p:nvPicPr>
-          <p:cNvPr id="5" name="図 4">
-            <a:extLst>
-              <a:ext uri="{FF2B5EF4-FFF2-40B4-BE49-F238E27FC236}">
-                <a16:creationId xmlns:a16="http://schemas.microsoft.com/office/drawing/2014/main" id="{EF02B7CA-8201-4475-AB50-2A85C01F5414}"/>
+          <p:cNvPr id="3" name="図 2">
+            <a:extLst>
+              <a:ext uri="{FF2B5EF4-FFF2-40B4-BE49-F238E27FC236}">
+                <a16:creationId xmlns:a16="http://schemas.microsoft.com/office/drawing/2014/main" id="{C93C0DC6-D279-4243-BECB-622A5064BFC7}"/>
               </a:ext>
             </a:extLst>
           </p:cNvPr>
@@ -8385,8 +8386,8 @@
         </p:blipFill>
         <p:spPr>
           <a:xfrm>
-            <a:off x="567542" y="1817794"/>
-            <a:ext cx="8268854" cy="4020111"/>
+            <a:off x="567542" y="1822276"/>
+            <a:ext cx="6163306" cy="4345442"/>
           </a:xfrm>
           <a:prstGeom prst="rect">
             <a:avLst/>
@@ -8396,7 +8397,7 @@
     </p:spTree>
     <p:extLst>
       <p:ext uri="{BB962C8B-B14F-4D97-AF65-F5344CB8AC3E}">
-        <p14:creationId xmlns:p14="http://schemas.microsoft.com/office/powerpoint/2010/main" val="885055851"/>
+        <p14:creationId xmlns:p14="http://schemas.microsoft.com/office/powerpoint/2010/main" val="3602684594"/>
       </p:ext>
     </p:extLst>
   </p:cSld>
@@ -8478,7 +8479,7 @@
         <p:spPr>
           <a:xfrm>
             <a:off x="567542" y="1216429"/>
-            <a:ext cx="4631396" cy="461665"/>
+            <a:ext cx="6984604" cy="461665"/>
           </a:xfrm>
           <a:prstGeom prst="rect">
             <a:avLst/>
@@ -8492,12 +8493,12 @@
           <a:lstStyle/>
           <a:p>
             <a:r>
-              <a:rPr lang="en-US" altLang="ja-JP" sz="2400" b="1" dirty="0">
+              <a:rPr lang="en-US" altLang="ja-JP" sz="2400" b="1" dirty="0" err="1">
                 <a:solidFill>
                   <a:srgbClr val="FF0000"/>
                 </a:solidFill>
               </a:rPr>
-              <a:t>StageManager.cpp</a:t>
+              <a:t>StageParameter.h</a:t>
             </a:r>
             <a:r>
               <a:rPr lang="en-US" altLang="ja-JP" sz="2400" dirty="0"/>
@@ -8505,7 +8506,7 @@
             </a:r>
             <a:r>
               <a:rPr lang="ja-JP" altLang="en-US" sz="2400" dirty="0"/>
-              <a:t>を書きます</a:t>
+              <a:t>を開いて書きます（その３）</a:t>
             </a:r>
             <a:endParaRPr lang="en-US" altLang="ja-JP" sz="2400" dirty="0"/>
           </a:p>
@@ -8513,10 +8514,10 @@
       </p:sp>
       <p:pic>
         <p:nvPicPr>
-          <p:cNvPr id="3" name="図 2">
-            <a:extLst>
-              <a:ext uri="{FF2B5EF4-FFF2-40B4-BE49-F238E27FC236}">
-                <a16:creationId xmlns:a16="http://schemas.microsoft.com/office/drawing/2014/main" id="{AA3A67F9-659F-4719-80D4-72440EF4D4F1}"/>
+          <p:cNvPr id="5" name="図 4">
+            <a:extLst>
+              <a:ext uri="{FF2B5EF4-FFF2-40B4-BE49-F238E27FC236}">
+                <a16:creationId xmlns:a16="http://schemas.microsoft.com/office/drawing/2014/main" id="{EF02B7CA-8201-4475-AB50-2A85C01F5414}"/>
               </a:ext>
             </a:extLst>
           </p:cNvPr>
@@ -8534,7 +8535,7 @@
         <p:spPr>
           <a:xfrm>
             <a:off x="567542" y="1817794"/>
-            <a:ext cx="7167362" cy="1938418"/>
+            <a:ext cx="8268854" cy="4020111"/>
           </a:xfrm>
           <a:prstGeom prst="rect">
             <a:avLst/>
@@ -8544,7 +8545,7 @@
     </p:spTree>
     <p:extLst>
       <p:ext uri="{BB962C8B-B14F-4D97-AF65-F5344CB8AC3E}">
-        <p14:creationId xmlns:p14="http://schemas.microsoft.com/office/powerpoint/2010/main" val="2638534765"/>
+        <p14:creationId xmlns:p14="http://schemas.microsoft.com/office/powerpoint/2010/main" val="885055851"/>
       </p:ext>
     </p:extLst>
   </p:cSld>
@@ -8626,7 +8627,7 @@
         <p:spPr>
           <a:xfrm>
             <a:off x="567542" y="1216429"/>
-            <a:ext cx="7707559" cy="461665"/>
+            <a:ext cx="4631396" cy="461665"/>
           </a:xfrm>
           <a:prstGeom prst="rect">
             <a:avLst/>
@@ -8639,45 +8640,21 @@
           </a:bodyPr>
           <a:lstStyle/>
           <a:p>
-            <a:r>
-              <a:rPr lang="en-US" altLang="ja-JP" sz="2400" b="1" dirty="0" err="1">
-                <a:solidFill>
-                  <a:srgbClr val="00B050"/>
-                </a:solidFill>
-              </a:rPr>
-              <a:t>StageManager</a:t>
-            </a:r>
             <a:r>
               <a:rPr lang="en-US" altLang="ja-JP" sz="2400" b="1" dirty="0">
                 <a:solidFill>
                   <a:srgbClr val="FF0000"/>
                 </a:solidFill>
               </a:rPr>
+              <a:t>StageManager.cpp</a:t>
+            </a:r>
+            <a:r>
+              <a:rPr lang="en-US" altLang="ja-JP" sz="2400" dirty="0"/>
               <a:t> </a:t>
             </a:r>
             <a:r>
               <a:rPr lang="ja-JP" altLang="en-US" sz="2400" dirty="0"/>
-              <a:t>の</a:t>
-            </a:r>
-            <a:r>
-              <a:rPr lang="ja-JP" altLang="en-US" sz="2400" b="1" dirty="0">
-                <a:solidFill>
-                  <a:srgbClr val="0070C0"/>
-                </a:solidFill>
-              </a:rPr>
-              <a:t>ロード関数</a:t>
-            </a:r>
-            <a:r>
-              <a:rPr lang="ja-JP" altLang="en-US" sz="2400" dirty="0"/>
-              <a:t>で</a:t>
-            </a:r>
-            <a:r>
-              <a:rPr lang="en-US" altLang="ja-JP" sz="2400" dirty="0"/>
-              <a:t>json</a:t>
-            </a:r>
-            <a:r>
-              <a:rPr lang="ja-JP" altLang="en-US" sz="2400" dirty="0"/>
-              <a:t>を読み込みます。</a:t>
+              <a:t>を書きます</a:t>
             </a:r>
             <a:endParaRPr lang="en-US" altLang="ja-JP" sz="2400" dirty="0"/>
           </a:p>
@@ -8685,10 +8662,10 @@
       </p:sp>
       <p:pic>
         <p:nvPicPr>
-          <p:cNvPr id="5" name="図 4">
-            <a:extLst>
-              <a:ext uri="{FF2B5EF4-FFF2-40B4-BE49-F238E27FC236}">
-                <a16:creationId xmlns:a16="http://schemas.microsoft.com/office/drawing/2014/main" id="{3C39A79E-4911-47D5-9984-826114B7DD03}"/>
+          <p:cNvPr id="3" name="図 2">
+            <a:extLst>
+              <a:ext uri="{FF2B5EF4-FFF2-40B4-BE49-F238E27FC236}">
+                <a16:creationId xmlns:a16="http://schemas.microsoft.com/office/drawing/2014/main" id="{AA3A67F9-659F-4719-80D4-72440EF4D4F1}"/>
               </a:ext>
             </a:extLst>
           </p:cNvPr>
@@ -8706,53 +8683,17 @@
         <p:spPr>
           <a:xfrm>
             <a:off x="567542" y="1817794"/>
-            <a:ext cx="8597798" cy="4233382"/>
+            <a:ext cx="7167362" cy="1938418"/>
           </a:xfrm>
           <a:prstGeom prst="rect">
             <a:avLst/>
           </a:prstGeom>
         </p:spPr>
       </p:pic>
-      <p:sp>
-        <p:nvSpPr>
-          <p:cNvPr id="7" name="テキスト ボックス 6">
-            <a:extLst>
-              <a:ext uri="{FF2B5EF4-FFF2-40B4-BE49-F238E27FC236}">
-                <a16:creationId xmlns:a16="http://schemas.microsoft.com/office/drawing/2014/main" id="{01E2A777-23C7-439E-BE47-7DA54489466A}"/>
-              </a:ext>
-            </a:extLst>
-          </p:cNvPr>
-          <p:cNvSpPr txBox="1"/>
-          <p:nvPr/>
-        </p:nvSpPr>
-        <p:spPr>
-          <a:xfrm>
-            <a:off x="567541" y="6190876"/>
-            <a:ext cx="4185761" cy="461665"/>
-          </a:xfrm>
-          <a:prstGeom prst="rect">
-            <a:avLst/>
-          </a:prstGeom>
-          <a:noFill/>
-        </p:spPr>
-        <p:txBody>
-          <a:bodyPr wrap="none" rtlCol="0">
-            <a:spAutoFit/>
-          </a:bodyPr>
-          <a:lstStyle/>
-          <a:p>
-            <a:r>
-              <a:rPr lang="ja-JP" altLang="en-US" sz="2400" dirty="0"/>
-              <a:t>次ページからプログラム解説</a:t>
-            </a:r>
-            <a:endParaRPr lang="en-US" altLang="ja-JP" sz="2400" dirty="0"/>
-          </a:p>
-        </p:txBody>
-      </p:sp>
     </p:spTree>
     <p:extLst>
       <p:ext uri="{BB962C8B-B14F-4D97-AF65-F5344CB8AC3E}">
-        <p14:creationId xmlns:p14="http://schemas.microsoft.com/office/powerpoint/2010/main" val="844590568"/>
+        <p14:creationId xmlns:p14="http://schemas.microsoft.com/office/powerpoint/2010/main" val="2638534765"/>
       </p:ext>
     </p:extLst>
   </p:cSld>
@@ -8834,7 +8775,7 @@
         <p:spPr>
           <a:xfrm>
             <a:off x="567542" y="1216429"/>
-            <a:ext cx="10960052" cy="1200329"/>
+            <a:ext cx="7707559" cy="461665"/>
           </a:xfrm>
           <a:prstGeom prst="rect">
             <a:avLst/>
@@ -8848,28 +8789,24 @@
           <a:lstStyle/>
           <a:p>
             <a:r>
-              <a:rPr lang="en-US" altLang="ja-JP" sz="2400" dirty="0"/>
-              <a:t>json</a:t>
-            </a:r>
-            <a:r>
-              <a:rPr lang="ja-JP" altLang="en-US" sz="2400" dirty="0"/>
-              <a:t>→</a:t>
-            </a:r>
-            <a:r>
-              <a:rPr lang="en-US" altLang="ja-JP" sz="2400" dirty="0"/>
-              <a:t>C++</a:t>
-            </a:r>
-            <a:r>
-              <a:rPr lang="ja-JP" altLang="en-US" sz="2400" dirty="0"/>
-              <a:t>にデータを格納するには、</a:t>
-            </a:r>
-            <a:r>
               <a:rPr lang="en-US" altLang="ja-JP" sz="2400" b="1" dirty="0" err="1">
                 <a:solidFill>
-                  <a:srgbClr val="0070C0"/>
+                  <a:srgbClr val="00B050"/>
                 </a:solidFill>
               </a:rPr>
-              <a:t>from_json</a:t>
+              <a:t>StageManager</a:t>
+            </a:r>
+            <a:r>
+              <a:rPr lang="en-US" altLang="ja-JP" sz="2400" b="1" dirty="0">
+                <a:solidFill>
+                  <a:srgbClr val="FF0000"/>
+                </a:solidFill>
+              </a:rPr>
+              <a:t> </a:t>
+            </a:r>
+            <a:r>
+              <a:rPr lang="ja-JP" altLang="en-US" sz="2400" dirty="0"/>
+              <a:t>の</a:t>
             </a:r>
             <a:r>
               <a:rPr lang="ja-JP" altLang="en-US" sz="2400" b="1" dirty="0">
@@ -8877,41 +8814,19 @@
                   <a:srgbClr val="0070C0"/>
                 </a:solidFill>
               </a:rPr>
-              <a:t>関数</a:t>
+              <a:t>ロード関数</a:t>
             </a:r>
             <a:r>
               <a:rPr lang="ja-JP" altLang="en-US" sz="2400" dirty="0"/>
-              <a:t>を作る必要があります。</a:t>
-            </a:r>
-            <a:endParaRPr lang="en-US" altLang="ja-JP" sz="2400" dirty="0"/>
-          </a:p>
-          <a:p>
-            <a:r>
-              <a:rPr lang="ja-JP" altLang="en-US" sz="2400" dirty="0"/>
-              <a:t>また</a:t>
-            </a:r>
-            <a:r>
-              <a:rPr lang="en-US" altLang="ja-JP" sz="2400" b="1" dirty="0">
-                <a:solidFill>
-                  <a:srgbClr val="00B050"/>
-                </a:solidFill>
-              </a:rPr>
-              <a:t>VECTOR</a:t>
-            </a:r>
-            <a:r>
-              <a:rPr lang="ja-JP" altLang="en-US" sz="2400" dirty="0"/>
-              <a:t>など、構造体に格納する場合は、</a:t>
-            </a:r>
-            <a:endParaRPr lang="en-US" altLang="ja-JP" sz="2400" dirty="0"/>
-          </a:p>
-          <a:p>
+              <a:t>で</a:t>
+            </a:r>
             <a:r>
               <a:rPr lang="en-US" altLang="ja-JP" sz="2400" dirty="0"/>
               <a:t>json</a:t>
             </a:r>
             <a:r>
               <a:rPr lang="ja-JP" altLang="en-US" sz="2400" dirty="0"/>
-              <a:t>→構造体に変換する関数も必要です。</a:t>
+              <a:t>を読み込みます。</a:t>
             </a:r>
             <a:endParaRPr lang="en-US" altLang="ja-JP" sz="2400" dirty="0"/>
           </a:p>
@@ -8919,10 +8834,10 @@
       </p:sp>
       <p:pic>
         <p:nvPicPr>
-          <p:cNvPr id="3" name="図 2">
-            <a:extLst>
-              <a:ext uri="{FF2B5EF4-FFF2-40B4-BE49-F238E27FC236}">
-                <a16:creationId xmlns:a16="http://schemas.microsoft.com/office/drawing/2014/main" id="{865F01AC-FF62-4C60-95A2-67C01B58E5CF}"/>
+          <p:cNvPr id="5" name="図 4">
+            <a:extLst>
+              <a:ext uri="{FF2B5EF4-FFF2-40B4-BE49-F238E27FC236}">
+                <a16:creationId xmlns:a16="http://schemas.microsoft.com/office/drawing/2014/main" id="{3C39A79E-4911-47D5-9984-826114B7DD03}"/>
               </a:ext>
             </a:extLst>
           </p:cNvPr>
@@ -8939,8 +8854,8 @@
         </p:blipFill>
         <p:spPr>
           <a:xfrm>
-            <a:off x="567542" y="2556458"/>
-            <a:ext cx="8221222" cy="4029637"/>
+            <a:off x="567542" y="1817794"/>
+            <a:ext cx="8597798" cy="4233382"/>
           </a:xfrm>
           <a:prstGeom prst="rect">
             <a:avLst/>
@@ -8949,10 +8864,10 @@
       </p:pic>
       <p:sp>
         <p:nvSpPr>
-          <p:cNvPr id="8" name="テキスト ボックス 7">
-            <a:extLst>
-              <a:ext uri="{FF2B5EF4-FFF2-40B4-BE49-F238E27FC236}">
-                <a16:creationId xmlns:a16="http://schemas.microsoft.com/office/drawing/2014/main" id="{4F999B77-C3B0-433F-A4DF-6E147C396BA3}"/>
+          <p:cNvPr id="7" name="テキスト ボックス 6">
+            <a:extLst>
+              <a:ext uri="{FF2B5EF4-FFF2-40B4-BE49-F238E27FC236}">
+                <a16:creationId xmlns:a16="http://schemas.microsoft.com/office/drawing/2014/main" id="{01E2A777-23C7-439E-BE47-7DA54489466A}"/>
               </a:ext>
             </a:extLst>
           </p:cNvPr>
@@ -8961,8 +8876,8 @@
         </p:nvSpPr>
         <p:spPr>
           <a:xfrm>
-            <a:off x="7845136" y="5253065"/>
-            <a:ext cx="3425938" cy="1200329"/>
+            <a:off x="567541" y="6190876"/>
+            <a:ext cx="4185761" cy="461665"/>
           </a:xfrm>
           <a:prstGeom prst="rect">
             <a:avLst/>
@@ -8976,57 +8891,8 @@
           <a:lstStyle/>
           <a:p>
             <a:r>
-              <a:rPr lang="en-US" altLang="ja-JP" sz="2400" b="1" dirty="0">
-                <a:solidFill>
-                  <a:srgbClr val="00B050"/>
-                </a:solidFill>
-              </a:rPr>
-              <a:t>MEMO</a:t>
-            </a:r>
-          </a:p>
-          <a:p>
-            <a:r>
-              <a:rPr lang="en-US" altLang="ja-JP" sz="2400" b="1" dirty="0" err="1">
-                <a:solidFill>
-                  <a:srgbClr val="0070C0"/>
-                </a:solidFill>
-              </a:rPr>
-              <a:t>to_json</a:t>
-            </a:r>
-            <a:r>
-              <a:rPr lang="ja-JP" altLang="en-US" sz="2400" b="1" dirty="0">
-                <a:solidFill>
-                  <a:srgbClr val="0070C0"/>
-                </a:solidFill>
-              </a:rPr>
-              <a:t>関数</a:t>
-            </a:r>
-            <a:r>
               <a:rPr lang="ja-JP" altLang="en-US" sz="2400" dirty="0"/>
-              <a:t>もあります</a:t>
-            </a:r>
-            <a:endParaRPr lang="en-US" altLang="ja-JP" sz="2400" dirty="0"/>
-          </a:p>
-          <a:p>
-            <a:r>
-              <a:rPr lang="ja-JP" altLang="en-US" sz="2400" dirty="0"/>
-              <a:t>（</a:t>
-            </a:r>
-            <a:r>
-              <a:rPr lang="en-US" altLang="ja-JP" sz="2400" dirty="0"/>
-              <a:t>C++</a:t>
-            </a:r>
-            <a:r>
-              <a:rPr lang="ja-JP" altLang="en-US" sz="2400" dirty="0"/>
-              <a:t>→</a:t>
-            </a:r>
-            <a:r>
-              <a:rPr lang="en-US" altLang="ja-JP" sz="2400" dirty="0"/>
-              <a:t>json</a:t>
-            </a:r>
-            <a:r>
-              <a:rPr lang="ja-JP" altLang="en-US" sz="2400" dirty="0"/>
-              <a:t>に使用）</a:t>
+              <a:t>次ページからプログラム解説</a:t>
             </a:r>
             <a:endParaRPr lang="en-US" altLang="ja-JP" sz="2400" dirty="0"/>
           </a:p>
@@ -9035,7 +8901,7 @@
     </p:spTree>
     <p:extLst>
       <p:ext uri="{BB962C8B-B14F-4D97-AF65-F5344CB8AC3E}">
-        <p14:creationId xmlns:p14="http://schemas.microsoft.com/office/powerpoint/2010/main" val="190870488"/>
+        <p14:creationId xmlns:p14="http://schemas.microsoft.com/office/powerpoint/2010/main" val="844590568"/>
       </p:ext>
     </p:extLst>
   </p:cSld>
@@ -9117,7 +8983,7 @@
         <p:spPr>
           <a:xfrm>
             <a:off x="567542" y="1216429"/>
-            <a:ext cx="5416868" cy="461665"/>
+            <a:ext cx="10960052" cy="1200329"/>
           </a:xfrm>
           <a:prstGeom prst="rect">
             <a:avLst/>
@@ -9131,8 +8997,70 @@
           <a:lstStyle/>
           <a:p>
             <a:r>
+              <a:rPr lang="en-US" altLang="ja-JP" sz="2400" dirty="0"/>
+              <a:t>json</a:t>
+            </a:r>
+            <a:r>
               <a:rPr lang="ja-JP" altLang="en-US" sz="2400" dirty="0"/>
-              <a:t>読み込み処理は非常にシンプルです。</a:t>
+              <a:t>→</a:t>
+            </a:r>
+            <a:r>
+              <a:rPr lang="en-US" altLang="ja-JP" sz="2400" dirty="0"/>
+              <a:t>C++</a:t>
+            </a:r>
+            <a:r>
+              <a:rPr lang="ja-JP" altLang="en-US" sz="2400" dirty="0"/>
+              <a:t>にデータを格納するには、</a:t>
+            </a:r>
+            <a:r>
+              <a:rPr lang="en-US" altLang="ja-JP" sz="2400" b="1" dirty="0" err="1">
+                <a:solidFill>
+                  <a:srgbClr val="0070C0"/>
+                </a:solidFill>
+              </a:rPr>
+              <a:t>from_json</a:t>
+            </a:r>
+            <a:r>
+              <a:rPr lang="ja-JP" altLang="en-US" sz="2400" b="1" dirty="0">
+                <a:solidFill>
+                  <a:srgbClr val="0070C0"/>
+                </a:solidFill>
+              </a:rPr>
+              <a:t>関数</a:t>
+            </a:r>
+            <a:r>
+              <a:rPr lang="ja-JP" altLang="en-US" sz="2400" dirty="0"/>
+              <a:t>を作る必要があります。</a:t>
+            </a:r>
+            <a:endParaRPr lang="en-US" altLang="ja-JP" sz="2400" dirty="0"/>
+          </a:p>
+          <a:p>
+            <a:r>
+              <a:rPr lang="ja-JP" altLang="en-US" sz="2400" dirty="0"/>
+              <a:t>また</a:t>
+            </a:r>
+            <a:r>
+              <a:rPr lang="en-US" altLang="ja-JP" sz="2400" b="1" dirty="0">
+                <a:solidFill>
+                  <a:srgbClr val="00B050"/>
+                </a:solidFill>
+              </a:rPr>
+              <a:t>VECTOR</a:t>
+            </a:r>
+            <a:r>
+              <a:rPr lang="ja-JP" altLang="en-US" sz="2400" dirty="0"/>
+              <a:t>など、構造体に格納する場合は、</a:t>
+            </a:r>
+            <a:endParaRPr lang="en-US" altLang="ja-JP" sz="2400" dirty="0"/>
+          </a:p>
+          <a:p>
+            <a:r>
+              <a:rPr lang="en-US" altLang="ja-JP" sz="2400" dirty="0"/>
+              <a:t>json</a:t>
+            </a:r>
+            <a:r>
+              <a:rPr lang="ja-JP" altLang="en-US" sz="2400" dirty="0"/>
+              <a:t>→構造体に変換する関数も必要です。</a:t>
             </a:r>
             <a:endParaRPr lang="en-US" altLang="ja-JP" sz="2400" dirty="0"/>
           </a:p>
@@ -9140,10 +9068,10 @@
       </p:sp>
       <p:pic>
         <p:nvPicPr>
-          <p:cNvPr id="7" name="図 6">
-            <a:extLst>
-              <a:ext uri="{FF2B5EF4-FFF2-40B4-BE49-F238E27FC236}">
-                <a16:creationId xmlns:a16="http://schemas.microsoft.com/office/drawing/2014/main" id="{DC3898FF-EE68-40B7-8070-0F6CB426C7C4}"/>
+          <p:cNvPr id="3" name="図 2">
+            <a:extLst>
+              <a:ext uri="{FF2B5EF4-FFF2-40B4-BE49-F238E27FC236}">
+                <a16:creationId xmlns:a16="http://schemas.microsoft.com/office/drawing/2014/main" id="{865F01AC-FF62-4C60-95A2-67C01B58E5CF}"/>
               </a:ext>
             </a:extLst>
           </p:cNvPr>
@@ -9160,18 +9088,103 @@
         </p:blipFill>
         <p:spPr>
           <a:xfrm>
-            <a:off x="567542" y="1817794"/>
-            <a:ext cx="8597798" cy="4233382"/>
+            <a:off x="567542" y="2556458"/>
+            <a:ext cx="8221222" cy="4029637"/>
           </a:xfrm>
           <a:prstGeom prst="rect">
             <a:avLst/>
           </a:prstGeom>
         </p:spPr>
       </p:pic>
+      <p:sp>
+        <p:nvSpPr>
+          <p:cNvPr id="8" name="テキスト ボックス 7">
+            <a:extLst>
+              <a:ext uri="{FF2B5EF4-FFF2-40B4-BE49-F238E27FC236}">
+                <a16:creationId xmlns:a16="http://schemas.microsoft.com/office/drawing/2014/main" id="{4F999B77-C3B0-433F-A4DF-6E147C396BA3}"/>
+              </a:ext>
+            </a:extLst>
+          </p:cNvPr>
+          <p:cNvSpPr txBox="1"/>
+          <p:nvPr/>
+        </p:nvSpPr>
+        <p:spPr>
+          <a:xfrm>
+            <a:off x="7845136" y="5253065"/>
+            <a:ext cx="3425938" cy="1200329"/>
+          </a:xfrm>
+          <a:prstGeom prst="rect">
+            <a:avLst/>
+          </a:prstGeom>
+          <a:noFill/>
+        </p:spPr>
+        <p:txBody>
+          <a:bodyPr wrap="none" rtlCol="0">
+            <a:spAutoFit/>
+          </a:bodyPr>
+          <a:lstStyle/>
+          <a:p>
+            <a:r>
+              <a:rPr lang="en-US" altLang="ja-JP" sz="2400" b="1" dirty="0">
+                <a:solidFill>
+                  <a:srgbClr val="00B050"/>
+                </a:solidFill>
+              </a:rPr>
+              <a:t>MEMO</a:t>
+            </a:r>
+          </a:p>
+          <a:p>
+            <a:r>
+              <a:rPr lang="en-US" altLang="ja-JP" sz="2400" b="1" dirty="0" err="1">
+                <a:solidFill>
+                  <a:srgbClr val="0070C0"/>
+                </a:solidFill>
+              </a:rPr>
+              <a:t>to_json</a:t>
+            </a:r>
+            <a:r>
+              <a:rPr lang="ja-JP" altLang="en-US" sz="2400" b="1" dirty="0">
+                <a:solidFill>
+                  <a:srgbClr val="0070C0"/>
+                </a:solidFill>
+              </a:rPr>
+              <a:t>関数</a:t>
+            </a:r>
+            <a:r>
+              <a:rPr lang="ja-JP" altLang="en-US" sz="2400" dirty="0"/>
+              <a:t>もあります</a:t>
+            </a:r>
+            <a:endParaRPr lang="en-US" altLang="ja-JP" sz="2400" dirty="0"/>
+          </a:p>
+          <a:p>
+            <a:r>
+              <a:rPr lang="ja-JP" altLang="en-US" sz="2400" dirty="0"/>
+              <a:t>（</a:t>
+            </a:r>
+            <a:r>
+              <a:rPr lang="en-US" altLang="ja-JP" sz="2400" dirty="0"/>
+              <a:t>C++</a:t>
+            </a:r>
+            <a:r>
+              <a:rPr lang="ja-JP" altLang="en-US" sz="2400" dirty="0"/>
+              <a:t>→</a:t>
+            </a:r>
+            <a:r>
+              <a:rPr lang="en-US" altLang="ja-JP" sz="2400" dirty="0"/>
+              <a:t>json</a:t>
+            </a:r>
+            <a:r>
+              <a:rPr lang="ja-JP" altLang="en-US" sz="2400" dirty="0"/>
+              <a:t>に使用）</a:t>
+            </a:r>
+            <a:endParaRPr lang="en-US" altLang="ja-JP" sz="2400" dirty="0"/>
+          </a:p>
+        </p:txBody>
+      </p:sp>
     </p:spTree>
     <p:extLst>
       <p:ext uri="{BB962C8B-B14F-4D97-AF65-F5344CB8AC3E}">
-        <p14:creationId xmlns:p14="http://schemas.microsoft.com/office/powerpoint/2010/main" val="332041726"/>
+        <p14:creationId xmlns:p14="http://schemas.microsoft.com/office/powerpoint/2010/main" val="190870488"/>
       </p:ext>
     </p:extLst>
   </p:cSld>
@@ -9253,7 +9266,7 @@
         <p:spPr>
           <a:xfrm>
             <a:off x="567542" y="1216429"/>
-            <a:ext cx="9741769" cy="461665"/>
+            <a:ext cx="5416868" cy="461665"/>
           </a:xfrm>
           <a:prstGeom prst="rect">
             <a:avLst/>
@@ -9267,12 +9280,8 @@
           <a:lstStyle/>
           <a:p>
             <a:r>
-              <a:rPr lang="en-US" altLang="ja-JP" sz="2400" dirty="0"/>
-              <a:t>json</a:t>
-            </a:r>
-            <a:r>
               <a:rPr lang="ja-JP" altLang="en-US" sz="2400" dirty="0"/>
-              <a:t>ファイルと見比べながら処理を確認すると、理解が深まります。</a:t>
+              <a:t>読み込み処理は非常にシンプルです。</a:t>
             </a:r>
             <a:endParaRPr lang="en-US" altLang="ja-JP" sz="2400" dirty="0"/>
           </a:p>
@@ -9280,10 +9289,10 @@
       </p:sp>
       <p:pic>
         <p:nvPicPr>
-          <p:cNvPr id="5" name="図 4">
-            <a:extLst>
-              <a:ext uri="{FF2B5EF4-FFF2-40B4-BE49-F238E27FC236}">
-                <a16:creationId xmlns:a16="http://schemas.microsoft.com/office/drawing/2014/main" id="{472EB93E-C378-4144-9E96-CFEBDCFA4167}"/>
+          <p:cNvPr id="7" name="図 6">
+            <a:extLst>
+              <a:ext uri="{FF2B5EF4-FFF2-40B4-BE49-F238E27FC236}">
+                <a16:creationId xmlns:a16="http://schemas.microsoft.com/office/drawing/2014/main" id="{DC3898FF-EE68-40B7-8070-0F6CB426C7C4}"/>
               </a:ext>
             </a:extLst>
           </p:cNvPr>
@@ -9300,8 +9309,8 @@
         </p:blipFill>
         <p:spPr>
           <a:xfrm>
-            <a:off x="567542" y="2187126"/>
-            <a:ext cx="8280623" cy="4450835"/>
+            <a:off x="567542" y="1817794"/>
+            <a:ext cx="8597798" cy="4233382"/>
           </a:xfrm>
           <a:prstGeom prst="rect">
             <a:avLst/>
@@ -9311,7 +9320,7 @@
     </p:spTree>
     <p:extLst>
       <p:ext uri="{BB962C8B-B14F-4D97-AF65-F5344CB8AC3E}">
-        <p14:creationId xmlns:p14="http://schemas.microsoft.com/office/powerpoint/2010/main" val="766863375"/>
+        <p14:creationId xmlns:p14="http://schemas.microsoft.com/office/powerpoint/2010/main" val="332041726"/>
       </p:ext>
     </p:extLst>
   </p:cSld>
@@ -9418,8 +9427,8 @@
         </p:nvSpPr>
         <p:spPr>
           <a:xfrm>
-            <a:off x="4807025" y="3136613"/>
-            <a:ext cx="2577950" cy="584775"/>
+            <a:off x="567542" y="491954"/>
+            <a:ext cx="2717411" cy="584775"/>
           </a:xfrm>
           <a:prstGeom prst="rect">
             <a:avLst/>
@@ -9433,21 +9442,91 @@
           <a:lstStyle/>
           <a:p>
             <a:r>
-              <a:rPr kumimoji="1" lang="en-US" altLang="ja-JP" sz="3200" b="1" u="sng" dirty="0" err="1"/>
-              <a:t>DxLib</a:t>
+              <a:rPr kumimoji="1" lang="en-US" altLang="ja-JP" sz="3200" b="1" u="sng" dirty="0"/>
+              <a:t>Json</a:t>
             </a:r>
             <a:r>
               <a:rPr kumimoji="1" lang="ja-JP" altLang="en-US" sz="3200" b="1" u="sng" dirty="0"/>
-              <a:t>に反映</a:t>
+              <a:t>ファイル</a:t>
             </a:r>
             <a:endParaRPr kumimoji="1" lang="en-US" altLang="ja-JP" sz="3200" b="1" u="sng" dirty="0"/>
           </a:p>
         </p:txBody>
       </p:sp>
+      <p:sp>
+        <p:nvSpPr>
+          <p:cNvPr id="6" name="テキスト ボックス 5">
+            <a:extLst>
+              <a:ext uri="{FF2B5EF4-FFF2-40B4-BE49-F238E27FC236}">
+                <a16:creationId xmlns:a16="http://schemas.microsoft.com/office/drawing/2014/main" id="{55830AD6-028B-4C4E-80BF-B70DFC1C3A46}"/>
+              </a:ext>
+            </a:extLst>
+          </p:cNvPr>
+          <p:cNvSpPr txBox="1"/>
+          <p:nvPr/>
+        </p:nvSpPr>
+        <p:spPr>
+          <a:xfrm>
+            <a:off x="567542" y="1216429"/>
+            <a:ext cx="9741769" cy="461665"/>
+          </a:xfrm>
+          <a:prstGeom prst="rect">
+            <a:avLst/>
+          </a:prstGeom>
+          <a:noFill/>
+        </p:spPr>
+        <p:txBody>
+          <a:bodyPr wrap="none" rtlCol="0">
+            <a:spAutoFit/>
+          </a:bodyPr>
+          <a:lstStyle/>
+          <a:p>
+            <a:r>
+              <a:rPr lang="en-US" altLang="ja-JP" sz="2400" dirty="0"/>
+              <a:t>json</a:t>
+            </a:r>
+            <a:r>
+              <a:rPr lang="ja-JP" altLang="en-US" sz="2400" dirty="0"/>
+              <a:t>ファイルと見比べながら処理を確認すると、理解が深まります。</a:t>
+            </a:r>
+            <a:endParaRPr lang="en-US" altLang="ja-JP" sz="2400" dirty="0"/>
+          </a:p>
+        </p:txBody>
+      </p:sp>
+      <p:pic>
+        <p:nvPicPr>
+          <p:cNvPr id="5" name="図 4">
+            <a:extLst>
+              <a:ext uri="{FF2B5EF4-FFF2-40B4-BE49-F238E27FC236}">
+                <a16:creationId xmlns:a16="http://schemas.microsoft.com/office/drawing/2014/main" id="{472EB93E-C378-4144-9E96-CFEBDCFA4167}"/>
+              </a:ext>
+            </a:extLst>
+          </p:cNvPr>
+          <p:cNvPicPr>
+            <a:picLocks noChangeAspect="1"/>
+          </p:cNvPicPr>
+          <p:nvPr/>
+        </p:nvPicPr>
+        <p:blipFill>
+          <a:blip r:embed="rId2"/>
+          <a:stretch>
+            <a:fillRect/>
+          </a:stretch>
+        </p:blipFill>
+        <p:spPr>
+          <a:xfrm>
+            <a:off x="567542" y="2187126"/>
+            <a:ext cx="8280623" cy="4450835"/>
+          </a:xfrm>
+          <a:prstGeom prst="rect">
+            <a:avLst/>
+          </a:prstGeom>
+        </p:spPr>
+      </p:pic>
     </p:spTree>
     <p:extLst>
       <p:ext uri="{BB962C8B-B14F-4D97-AF65-F5344CB8AC3E}">
-        <p14:creationId xmlns:p14="http://schemas.microsoft.com/office/powerpoint/2010/main" val="2119220624"/>
+        <p14:creationId xmlns:p14="http://schemas.microsoft.com/office/powerpoint/2010/main" val="766863375"/>
       </p:ext>
     </p:extLst>
   </p:cSld>
@@ -9488,7 +9567,7 @@
         </p:nvSpPr>
         <p:spPr>
           <a:xfrm>
-            <a:off x="567542" y="491954"/>
+            <a:off x="4807025" y="3136613"/>
             <a:ext cx="2577950" cy="584775"/>
           </a:xfrm>
           <a:prstGeom prst="rect">
@@ -9514,80 +9593,10 @@
           </a:p>
         </p:txBody>
       </p:sp>
-      <p:sp>
-        <p:nvSpPr>
-          <p:cNvPr id="6" name="テキスト ボックス 5">
-            <a:extLst>
-              <a:ext uri="{FF2B5EF4-FFF2-40B4-BE49-F238E27FC236}">
-                <a16:creationId xmlns:a16="http://schemas.microsoft.com/office/drawing/2014/main" id="{55830AD6-028B-4C4E-80BF-B70DFC1C3A46}"/>
-              </a:ext>
-            </a:extLst>
-          </p:cNvPr>
-          <p:cNvSpPr txBox="1"/>
-          <p:nvPr/>
-        </p:nvSpPr>
-        <p:spPr>
-          <a:xfrm>
-            <a:off x="567542" y="1216429"/>
-            <a:ext cx="9092554" cy="461665"/>
-          </a:xfrm>
-          <a:prstGeom prst="rect">
-            <a:avLst/>
-          </a:prstGeom>
-          <a:noFill/>
-        </p:spPr>
-        <p:txBody>
-          <a:bodyPr wrap="none" rtlCol="0">
-            <a:spAutoFit/>
-          </a:bodyPr>
-          <a:lstStyle/>
-          <a:p>
-            <a:r>
-              <a:rPr lang="en-US" altLang="ja-JP" sz="2400" dirty="0"/>
-              <a:t>json</a:t>
-            </a:r>
-            <a:r>
-              <a:rPr lang="ja-JP" altLang="en-US" sz="2400" dirty="0"/>
-              <a:t>で読み込んだデータを使って、オブジェクトを配置します。</a:t>
-            </a:r>
-            <a:endParaRPr lang="en-US" altLang="ja-JP" sz="2400" dirty="0"/>
-          </a:p>
-        </p:txBody>
-      </p:sp>
-      <p:pic>
-        <p:nvPicPr>
-          <p:cNvPr id="7" name="図 6">
-            <a:extLst>
-              <a:ext uri="{FF2B5EF4-FFF2-40B4-BE49-F238E27FC236}">
-                <a16:creationId xmlns:a16="http://schemas.microsoft.com/office/drawing/2014/main" id="{BBBA1166-466C-47F9-8B3F-7F7F4CF2CB05}"/>
-              </a:ext>
-            </a:extLst>
-          </p:cNvPr>
-          <p:cNvPicPr>
-            <a:picLocks noChangeAspect="1"/>
-          </p:cNvPicPr>
-          <p:nvPr/>
-        </p:nvPicPr>
-        <p:blipFill>
-          <a:blip r:embed="rId2"/>
-          <a:stretch>
-            <a:fillRect/>
-          </a:stretch>
-        </p:blipFill>
-        <p:spPr>
-          <a:xfrm>
-            <a:off x="567542" y="1817794"/>
-            <a:ext cx="7554062" cy="4394747"/>
-          </a:xfrm>
-          <a:prstGeom prst="rect">
-            <a:avLst/>
-          </a:prstGeom>
-        </p:spPr>
-      </p:pic>
     </p:spTree>
     <p:extLst>
       <p:ext uri="{BB962C8B-B14F-4D97-AF65-F5344CB8AC3E}">
-        <p14:creationId xmlns:p14="http://schemas.microsoft.com/office/powerpoint/2010/main" val="2818659180"/>
+        <p14:creationId xmlns:p14="http://schemas.microsoft.com/office/powerpoint/2010/main" val="2119220624"/>
       </p:ext>
     </p:extLst>
   </p:cSld>
@@ -9669,7 +9678,7 @@
         <p:spPr>
           <a:xfrm>
             <a:off x="567542" y="1216429"/>
-            <a:ext cx="7374135" cy="461665"/>
+            <a:ext cx="9092554" cy="461665"/>
           </a:xfrm>
           <a:prstGeom prst="rect">
             <a:avLst/>
@@ -9683,36 +9692,12 @@
           <a:lstStyle/>
           <a:p>
             <a:r>
-              <a:rPr lang="en-US" altLang="ja-JP" sz="2400" b="1" dirty="0" err="1">
-                <a:solidFill>
-                  <a:srgbClr val="00B050"/>
-                </a:solidFill>
-              </a:rPr>
-              <a:t>StageManager</a:t>
+              <a:rPr lang="en-US" altLang="ja-JP" sz="2400" dirty="0"/>
+              <a:t>json</a:t>
             </a:r>
             <a:r>
               <a:rPr lang="ja-JP" altLang="en-US" sz="2400" dirty="0"/>
-              <a:t>の</a:t>
-            </a:r>
-            <a:r>
-              <a:rPr lang="en-US" altLang="ja-JP" sz="2400" b="1" dirty="0">
-                <a:solidFill>
-                  <a:srgbClr val="0070C0"/>
-                </a:solidFill>
-              </a:rPr>
-              <a:t>Start</a:t>
-            </a:r>
-            <a:r>
-              <a:rPr lang="ja-JP" altLang="en-US" sz="2400" b="1" dirty="0">
-                <a:solidFill>
-                  <a:srgbClr val="0070C0"/>
-                </a:solidFill>
-              </a:rPr>
-              <a:t>関数</a:t>
-            </a:r>
-            <a:r>
-              <a:rPr lang="ja-JP" altLang="en-US" sz="2400" dirty="0"/>
-              <a:t>に配置処理を書きます。</a:t>
+              <a:t>で読み込んだデータを使って、オブジェクトを配置します。</a:t>
             </a:r>
             <a:endParaRPr lang="en-US" altLang="ja-JP" sz="2400" dirty="0"/>
           </a:p>
@@ -9720,10 +9705,10 @@
       </p:sp>
       <p:pic>
         <p:nvPicPr>
-          <p:cNvPr id="3" name="図 2">
-            <a:extLst>
-              <a:ext uri="{FF2B5EF4-FFF2-40B4-BE49-F238E27FC236}">
-                <a16:creationId xmlns:a16="http://schemas.microsoft.com/office/drawing/2014/main" id="{9C8B3C14-9860-4414-8EAE-286B607BA58F}"/>
+          <p:cNvPr id="7" name="図 6">
+            <a:extLst>
+              <a:ext uri="{FF2B5EF4-FFF2-40B4-BE49-F238E27FC236}">
+                <a16:creationId xmlns:a16="http://schemas.microsoft.com/office/drawing/2014/main" id="{BBBA1166-466C-47F9-8B3F-7F7F4CF2CB05}"/>
               </a:ext>
             </a:extLst>
           </p:cNvPr>
@@ -9741,7 +9726,7 @@
         <p:spPr>
           <a:xfrm>
             <a:off x="567542" y="1817794"/>
-            <a:ext cx="10517068" cy="3781953"/>
+            <a:ext cx="7554062" cy="4394747"/>
           </a:xfrm>
           <a:prstGeom prst="rect">
             <a:avLst/>
@@ -9751,7 +9736,7 @@
     </p:spTree>
     <p:extLst>
       <p:ext uri="{BB962C8B-B14F-4D97-AF65-F5344CB8AC3E}">
-        <p14:creationId xmlns:p14="http://schemas.microsoft.com/office/powerpoint/2010/main" val="3951730257"/>
+        <p14:creationId xmlns:p14="http://schemas.microsoft.com/office/powerpoint/2010/main" val="2818659180"/>
       </p:ext>
     </p:extLst>
   </p:cSld>
@@ -9833,7 +9818,7 @@
         <p:spPr>
           <a:xfrm>
             <a:off x="567542" y="1216429"/>
-            <a:ext cx="8954695" cy="461665"/>
+            <a:ext cx="7374135" cy="461665"/>
           </a:xfrm>
           <a:prstGeom prst="rect">
             <a:avLst/>
@@ -9876,7 +9861,7 @@
             </a:r>
             <a:r>
               <a:rPr lang="ja-JP" altLang="en-US" sz="2400" dirty="0"/>
-              <a:t>に配置処理を書きます。（その２）</a:t>
+              <a:t>に配置処理を書きます。</a:t>
             </a:r>
             <a:endParaRPr lang="en-US" altLang="ja-JP" sz="2400" dirty="0"/>
           </a:p>
@@ -9884,10 +9869,10 @@
       </p:sp>
       <p:pic>
         <p:nvPicPr>
-          <p:cNvPr id="5" name="図 4">
-            <a:extLst>
-              <a:ext uri="{FF2B5EF4-FFF2-40B4-BE49-F238E27FC236}">
-                <a16:creationId xmlns:a16="http://schemas.microsoft.com/office/drawing/2014/main" id="{1A9FB7C9-11B8-4535-817F-F34EAF864297}"/>
+          <p:cNvPr id="3" name="図 2">
+            <a:extLst>
+              <a:ext uri="{FF2B5EF4-FFF2-40B4-BE49-F238E27FC236}">
+                <a16:creationId xmlns:a16="http://schemas.microsoft.com/office/drawing/2014/main" id="{9C8B3C14-9860-4414-8EAE-286B607BA58F}"/>
               </a:ext>
             </a:extLst>
           </p:cNvPr>
@@ -9905,7 +9890,7 @@
         <p:spPr>
           <a:xfrm>
             <a:off x="567542" y="1817794"/>
-            <a:ext cx="9813587" cy="4717563"/>
+            <a:ext cx="10517068" cy="3781953"/>
           </a:xfrm>
           <a:prstGeom prst="rect">
             <a:avLst/>
@@ -9915,7 +9900,7 @@
     </p:spTree>
     <p:extLst>
       <p:ext uri="{BB962C8B-B14F-4D97-AF65-F5344CB8AC3E}">
-        <p14:creationId xmlns:p14="http://schemas.microsoft.com/office/powerpoint/2010/main" val="4283899307"/>
+        <p14:creationId xmlns:p14="http://schemas.microsoft.com/office/powerpoint/2010/main" val="3951730257"/>
       </p:ext>
     </p:extLst>
   </p:cSld>
@@ -9997,7 +9982,7 @@
         <p:spPr>
           <a:xfrm>
             <a:off x="567542" y="1216429"/>
-            <a:ext cx="2954655" cy="461665"/>
+            <a:ext cx="8954695" cy="461665"/>
           </a:xfrm>
           <a:prstGeom prst="rect">
             <a:avLst/>
@@ -10011,8 +9996,36 @@
           <a:lstStyle/>
           <a:p>
             <a:r>
+              <a:rPr lang="en-US" altLang="ja-JP" sz="2400" b="1" dirty="0" err="1">
+                <a:solidFill>
+                  <a:srgbClr val="00B050"/>
+                </a:solidFill>
+              </a:rPr>
+              <a:t>StageManager</a:t>
+            </a:r>
+            <a:r>
               <a:rPr lang="ja-JP" altLang="en-US" sz="2400" dirty="0"/>
-              <a:t>動作確認しましょう</a:t>
+              <a:t>の</a:t>
+            </a:r>
+            <a:r>
+              <a:rPr lang="en-US" altLang="ja-JP" sz="2400" b="1" dirty="0">
+                <a:solidFill>
+                  <a:srgbClr val="0070C0"/>
+                </a:solidFill>
+              </a:rPr>
+              <a:t>Start</a:t>
+            </a:r>
+            <a:r>
+              <a:rPr lang="ja-JP" altLang="en-US" sz="2400" b="1" dirty="0">
+                <a:solidFill>
+                  <a:srgbClr val="0070C0"/>
+                </a:solidFill>
+              </a:rPr>
+              <a:t>関数</a:t>
+            </a:r>
+            <a:r>
+              <a:rPr lang="ja-JP" altLang="en-US" sz="2400" dirty="0"/>
+              <a:t>に配置処理を書きます。（その２）</a:t>
             </a:r>
             <a:endParaRPr lang="en-US" altLang="ja-JP" sz="2400" dirty="0"/>
           </a:p>
@@ -10020,10 +10033,10 @@
       </p:sp>
       <p:pic>
         <p:nvPicPr>
-          <p:cNvPr id="7" name="図 6">
-            <a:extLst>
-              <a:ext uri="{FF2B5EF4-FFF2-40B4-BE49-F238E27FC236}">
-                <a16:creationId xmlns:a16="http://schemas.microsoft.com/office/drawing/2014/main" id="{BBBA1166-466C-47F9-8B3F-7F7F4CF2CB05}"/>
+          <p:cNvPr id="5" name="図 4">
+            <a:extLst>
+              <a:ext uri="{FF2B5EF4-FFF2-40B4-BE49-F238E27FC236}">
+                <a16:creationId xmlns:a16="http://schemas.microsoft.com/office/drawing/2014/main" id="{1A9FB7C9-11B8-4535-817F-F34EAF864297}"/>
               </a:ext>
             </a:extLst>
           </p:cNvPr>
@@ -10041,7 +10054,7 @@
         <p:spPr>
           <a:xfrm>
             <a:off x="567542" y="1817794"/>
-            <a:ext cx="7554062" cy="4394747"/>
+            <a:ext cx="9813587" cy="4717563"/>
           </a:xfrm>
           <a:prstGeom prst="rect">
             <a:avLst/>
@@ -10051,7 +10064,7 @@
     </p:spTree>
     <p:extLst>
       <p:ext uri="{BB962C8B-B14F-4D97-AF65-F5344CB8AC3E}">
-        <p14:creationId xmlns:p14="http://schemas.microsoft.com/office/powerpoint/2010/main" val="1421794451"/>
+        <p14:creationId xmlns:p14="http://schemas.microsoft.com/office/powerpoint/2010/main" val="4283899307"/>
       </p:ext>
     </p:extLst>
   </p:cSld>
@@ -10093,7 +10106,7 @@
         <p:spPr>
           <a:xfrm>
             <a:off x="567542" y="491954"/>
-            <a:ext cx="1415772" cy="584775"/>
+            <a:ext cx="2577950" cy="584775"/>
           </a:xfrm>
           <a:prstGeom prst="rect">
             <a:avLst/>
@@ -10107,8 +10120,12 @@
           <a:lstStyle/>
           <a:p>
             <a:r>
+              <a:rPr kumimoji="1" lang="en-US" altLang="ja-JP" sz="3200" b="1" u="sng" dirty="0" err="1"/>
+              <a:t>DxLib</a:t>
+            </a:r>
+            <a:r>
               <a:rPr kumimoji="1" lang="ja-JP" altLang="en-US" sz="3200" b="1" u="sng" dirty="0"/>
-              <a:t>改善点</a:t>
+              <a:t>に反映</a:t>
             </a:r>
             <a:endParaRPr kumimoji="1" lang="en-US" altLang="ja-JP" sz="3200" b="1" u="sng" dirty="0"/>
           </a:p>
@@ -10129,7 +10146,7 @@
         <p:spPr>
           <a:xfrm>
             <a:off x="567542" y="1216429"/>
-            <a:ext cx="9725739" cy="2677656"/>
+            <a:ext cx="2954655" cy="461665"/>
           </a:xfrm>
           <a:prstGeom prst="rect">
             <a:avLst/>
@@ -10144,66 +10161,46 @@
           <a:p>
             <a:r>
               <a:rPr lang="ja-JP" altLang="en-US" sz="2400" dirty="0"/>
-              <a:t>これで最低限のステージエディタはできました。</a:t>
+              <a:t>動作確認しましょう</a:t>
             </a:r>
             <a:endParaRPr lang="en-US" altLang="ja-JP" sz="2400" dirty="0"/>
           </a:p>
-          <a:p>
-            <a:r>
-              <a:rPr lang="ja-JP" altLang="en-US" sz="2400" dirty="0"/>
-              <a:t>このまま使ってもらってもいいですが、</a:t>
-            </a:r>
-            <a:endParaRPr lang="en-US" altLang="ja-JP" sz="2400" dirty="0"/>
-          </a:p>
-          <a:p>
-            <a:r>
-              <a:rPr lang="ja-JP" altLang="en-US" sz="2400" dirty="0"/>
-              <a:t>ぜひオリジナルゲーム制作では、使いやすく改善していきましょう。</a:t>
-            </a:r>
-            <a:endParaRPr lang="en-US" altLang="ja-JP" sz="2400" dirty="0"/>
-          </a:p>
-          <a:p>
-            <a:endParaRPr lang="en-US" altLang="ja-JP" sz="2400" dirty="0"/>
-          </a:p>
-          <a:p>
-            <a:r>
-              <a:rPr lang="ja-JP" altLang="en-US" sz="2400" dirty="0"/>
-              <a:t>ここからはいくつか改善点を挙げていきます。</a:t>
-            </a:r>
-            <a:endParaRPr lang="en-US" altLang="ja-JP" sz="2400" dirty="0"/>
-          </a:p>
-          <a:p>
-            <a:endParaRPr lang="en-US" altLang="ja-JP" sz="2400" dirty="0"/>
-          </a:p>
-          <a:p>
-            <a:r>
-              <a:rPr lang="en-US" altLang="ja-JP" sz="2400" b="1" dirty="0">
-                <a:solidFill>
-                  <a:srgbClr val="FF0000"/>
-                </a:solidFill>
-              </a:rPr>
-              <a:t>※</a:t>
-            </a:r>
-            <a:r>
-              <a:rPr lang="ja-JP" altLang="en-US" sz="2400" b="1" dirty="0">
-                <a:solidFill>
-                  <a:srgbClr val="FF0000"/>
-                </a:solidFill>
-              </a:rPr>
-              <a:t>改善できれば強力なアピールポイントになります</a:t>
-            </a:r>
-            <a:endParaRPr lang="en-US" altLang="ja-JP" sz="2400" b="1" dirty="0">
-              <a:solidFill>
-                <a:srgbClr val="FF0000"/>
-              </a:solidFill>
-            </a:endParaRPr>
-          </a:p>
-        </p:txBody>
-      </p:sp>
+        </p:txBody>
+      </p:sp>
+      <p:pic>
+        <p:nvPicPr>
+          <p:cNvPr id="7" name="図 6">
+            <a:extLst>
+              <a:ext uri="{FF2B5EF4-FFF2-40B4-BE49-F238E27FC236}">
+                <a16:creationId xmlns:a16="http://schemas.microsoft.com/office/drawing/2014/main" id="{BBBA1166-466C-47F9-8B3F-7F7F4CF2CB05}"/>
+              </a:ext>
+            </a:extLst>
+          </p:cNvPr>
+          <p:cNvPicPr>
+            <a:picLocks noChangeAspect="1"/>
+          </p:cNvPicPr>
+          <p:nvPr/>
+        </p:nvPicPr>
+        <p:blipFill>
+          <a:blip r:embed="rId2"/>
+          <a:stretch>
+            <a:fillRect/>
+          </a:stretch>
+        </p:blipFill>
+        <p:spPr>
+          <a:xfrm>
+            <a:off x="567542" y="1817794"/>
+            <a:ext cx="7554062" cy="4394747"/>
+          </a:xfrm>
+          <a:prstGeom prst="rect">
+            <a:avLst/>
+          </a:prstGeom>
+        </p:spPr>
+      </p:pic>
     </p:spTree>
     <p:extLst>
       <p:ext uri="{BB962C8B-B14F-4D97-AF65-F5344CB8AC3E}">
-        <p14:creationId xmlns:p14="http://schemas.microsoft.com/office/powerpoint/2010/main" val="3814522566"/>
+        <p14:creationId xmlns:p14="http://schemas.microsoft.com/office/powerpoint/2010/main" val="1421794451"/>
       </p:ext>
     </p:extLst>
   </p:cSld>
@@ -10281,6 +10278,158 @@
         <p:spPr>
           <a:xfrm>
             <a:off x="567542" y="1216429"/>
+            <a:ext cx="9725739" cy="2677656"/>
+          </a:xfrm>
+          <a:prstGeom prst="rect">
+            <a:avLst/>
+          </a:prstGeom>
+          <a:noFill/>
+        </p:spPr>
+        <p:txBody>
+          <a:bodyPr wrap="none" rtlCol="0">
+            <a:spAutoFit/>
+          </a:bodyPr>
+          <a:lstStyle/>
+          <a:p>
+            <a:r>
+              <a:rPr lang="ja-JP" altLang="en-US" sz="2400" dirty="0"/>
+              <a:t>これで最低限のステージエディタはできました。</a:t>
+            </a:r>
+            <a:endParaRPr lang="en-US" altLang="ja-JP" sz="2400" dirty="0"/>
+          </a:p>
+          <a:p>
+            <a:r>
+              <a:rPr lang="ja-JP" altLang="en-US" sz="2400" dirty="0"/>
+              <a:t>このまま使ってもらってもいいですが、</a:t>
+            </a:r>
+            <a:endParaRPr lang="en-US" altLang="ja-JP" sz="2400" dirty="0"/>
+          </a:p>
+          <a:p>
+            <a:r>
+              <a:rPr lang="ja-JP" altLang="en-US" sz="2400" dirty="0"/>
+              <a:t>ぜひオリジナルゲーム制作では、使いやすく改善していきましょう。</a:t>
+            </a:r>
+            <a:endParaRPr lang="en-US" altLang="ja-JP" sz="2400" dirty="0"/>
+          </a:p>
+          <a:p>
+            <a:endParaRPr lang="en-US" altLang="ja-JP" sz="2400" dirty="0"/>
+          </a:p>
+          <a:p>
+            <a:r>
+              <a:rPr lang="ja-JP" altLang="en-US" sz="2400" dirty="0"/>
+              <a:t>ここからはいくつか改善点を挙げていきます。</a:t>
+            </a:r>
+            <a:endParaRPr lang="en-US" altLang="ja-JP" sz="2400" dirty="0"/>
+          </a:p>
+          <a:p>
+            <a:endParaRPr lang="en-US" altLang="ja-JP" sz="2400" dirty="0"/>
+          </a:p>
+          <a:p>
+            <a:r>
+              <a:rPr lang="en-US" altLang="ja-JP" sz="2400" b="1" dirty="0">
+                <a:solidFill>
+                  <a:srgbClr val="FF0000"/>
+                </a:solidFill>
+              </a:rPr>
+              <a:t>※</a:t>
+            </a:r>
+            <a:r>
+              <a:rPr lang="ja-JP" altLang="en-US" sz="2400" b="1" dirty="0">
+                <a:solidFill>
+                  <a:srgbClr val="FF0000"/>
+                </a:solidFill>
+              </a:rPr>
+              <a:t>改善できれば強力なアピールポイントになります</a:t>
+            </a:r>
+            <a:endParaRPr lang="en-US" altLang="ja-JP" sz="2400" b="1" dirty="0">
+              <a:solidFill>
+                <a:srgbClr val="FF0000"/>
+              </a:solidFill>
+            </a:endParaRPr>
+          </a:p>
+        </p:txBody>
+      </p:sp>
+    </p:spTree>
+    <p:extLst>
+      <p:ext uri="{BB962C8B-B14F-4D97-AF65-F5344CB8AC3E}">
+        <p14:creationId xmlns:p14="http://schemas.microsoft.com/office/powerpoint/2010/main" val="3814522566"/>
+      </p:ext>
+    </p:extLst>
+  </p:cSld>
+  <p:clrMapOvr>
+    <a:masterClrMapping/>
+  </p:clrMapOvr>
+</p:sld>
+</file>
+
+<file path=ppt/slides/slide47.xml><?xml version="1.0" encoding="utf-8"?>
+<p:sld xmlns:a="http://schemas.openxmlformats.org/drawingml/2006/main" xmlns:r="http://schemas.openxmlformats.org/officeDocument/2006/relationships" xmlns:p="http://schemas.openxmlformats.org/presentationml/2006/main">
+  <p:cSld>
+    <p:spTree>
+      <p:nvGrpSpPr>
+        <p:cNvPr id="1" name=""/>
+        <p:cNvGrpSpPr/>
+        <p:nvPr/>
+      </p:nvGrpSpPr>
+      <p:grpSpPr>
+        <a:xfrm>
+          <a:off x="0" y="0"/>
+          <a:ext cx="0" cy="0"/>
+          <a:chOff x="0" y="0"/>
+          <a:chExt cx="0" cy="0"/>
+        </a:xfrm>
+      </p:grpSpPr>
+      <p:sp>
+        <p:nvSpPr>
+          <p:cNvPr id="4" name="テキスト ボックス 3">
+            <a:extLst>
+              <a:ext uri="{FF2B5EF4-FFF2-40B4-BE49-F238E27FC236}">
+                <a16:creationId xmlns:a16="http://schemas.microsoft.com/office/drawing/2014/main" id="{5A13BF46-B8C5-48AA-8308-C9ECFF431A18}"/>
+              </a:ext>
+            </a:extLst>
+          </p:cNvPr>
+          <p:cNvSpPr txBox="1"/>
+          <p:nvPr/>
+        </p:nvSpPr>
+        <p:spPr>
+          <a:xfrm>
+            <a:off x="567542" y="491954"/>
+            <a:ext cx="1415772" cy="584775"/>
+          </a:xfrm>
+          <a:prstGeom prst="rect">
+            <a:avLst/>
+          </a:prstGeom>
+          <a:noFill/>
+        </p:spPr>
+        <p:txBody>
+          <a:bodyPr wrap="none" rtlCol="0">
+            <a:spAutoFit/>
+          </a:bodyPr>
+          <a:lstStyle/>
+          <a:p>
+            <a:r>
+              <a:rPr kumimoji="1" lang="ja-JP" altLang="en-US" sz="3200" b="1" u="sng" dirty="0"/>
+              <a:t>改善点</a:t>
+            </a:r>
+            <a:endParaRPr kumimoji="1" lang="en-US" altLang="ja-JP" sz="3200" b="1" u="sng" dirty="0"/>
+          </a:p>
+        </p:txBody>
+      </p:sp>
+      <p:sp>
+        <p:nvSpPr>
+          <p:cNvPr id="6" name="テキスト ボックス 5">
+            <a:extLst>
+              <a:ext uri="{FF2B5EF4-FFF2-40B4-BE49-F238E27FC236}">
+                <a16:creationId xmlns:a16="http://schemas.microsoft.com/office/drawing/2014/main" id="{55830AD6-028B-4C4E-80BF-B70DFC1C3A46}"/>
+              </a:ext>
+            </a:extLst>
+          </p:cNvPr>
+          <p:cNvSpPr txBox="1"/>
+          <p:nvPr/>
+        </p:nvSpPr>
+        <p:spPr>
+          <a:xfrm>
+            <a:off x="567542" y="1216429"/>
             <a:ext cx="10371750" cy="830997"/>
           </a:xfrm>
           <a:prstGeom prst="rect">
@@ -10404,7 +10553,7 @@
 </p:sld>
 </file>
 
-<file path=ppt/slides/slide47.xml><?xml version="1.0" encoding="utf-8"?>
+<file path=ppt/slides/slide48.xml><?xml version="1.0" encoding="utf-8"?>
 <p:sld xmlns:a="http://schemas.openxmlformats.org/drawingml/2006/main" xmlns:r="http://schemas.openxmlformats.org/officeDocument/2006/relationships" xmlns:p="http://schemas.openxmlformats.org/presentationml/2006/main">
   <p:cSld>
     <p:spTree>
@@ -10986,7 +11135,7 @@
         <p:spPr>
           <a:xfrm>
             <a:off x="567542" y="1216429"/>
-            <a:ext cx="11748729" cy="830997"/>
+            <a:ext cx="10410222" cy="1200329"/>
           </a:xfrm>
           <a:prstGeom prst="rect">
             <a:avLst/>
@@ -11001,29 +11150,88 @@
           <a:p>
             <a:r>
               <a:rPr lang="en-US" altLang="ja-JP" sz="2400" dirty="0"/>
-              <a:t>Prefabs</a:t>
+              <a:t>Unity</a:t>
             </a:r>
             <a:r>
               <a:rPr lang="ja-JP" altLang="en-US" sz="2400" dirty="0"/>
-              <a:t>には、ステージに配置するオブジェクトをプレハブにまとめて保存します。</a:t>
+              <a:t>の仕様で</a:t>
+            </a:r>
+            <a:r>
+              <a:rPr lang="en-US" altLang="ja-JP" sz="2400" dirty="0"/>
+              <a:t>Z</a:t>
+            </a:r>
+            <a:r>
+              <a:rPr lang="ja-JP" altLang="en-US" sz="2400" dirty="0"/>
+              <a:t>軸に反転した状態で保存されます。</a:t>
             </a:r>
             <a:endParaRPr lang="en-US" altLang="ja-JP" sz="2400" dirty="0"/>
           </a:p>
           <a:p>
             <a:r>
-              <a:rPr kumimoji="1" lang="ja-JP" altLang="en-US" sz="2400" dirty="0"/>
-              <a:t>種類が多いときはフォルダ分けしましょう。</a:t>
-            </a:r>
-            <a:endParaRPr kumimoji="1" lang="en-US" altLang="ja-JP" sz="2400" dirty="0"/>
+              <a:rPr lang="ja-JP" altLang="en-US" sz="2400" dirty="0"/>
+              <a:t>インスペクターから </a:t>
+            </a:r>
+            <a:r>
+              <a:rPr lang="en-US" altLang="ja-JP" sz="2400" b="1" dirty="0">
+                <a:solidFill>
+                  <a:srgbClr val="FF0000"/>
+                </a:solidFill>
+              </a:rPr>
+              <a:t>Bake Axis Conversion </a:t>
+            </a:r>
+            <a:r>
+              <a:rPr lang="ja-JP" altLang="en-US" sz="2400" b="1" dirty="0">
+                <a:solidFill>
+                  <a:srgbClr val="FF0000"/>
+                </a:solidFill>
+              </a:rPr>
+              <a:t>を </a:t>
+            </a:r>
+            <a:r>
+              <a:rPr lang="en-US" altLang="ja-JP" sz="2400" b="1" dirty="0">
+                <a:solidFill>
+                  <a:srgbClr val="FF0000"/>
+                </a:solidFill>
+              </a:rPr>
+              <a:t>ON </a:t>
+            </a:r>
+            <a:r>
+              <a:rPr lang="ja-JP" altLang="en-US" sz="2400" dirty="0"/>
+              <a:t>にすると改善します。</a:t>
+            </a:r>
+            <a:endParaRPr lang="en-US" altLang="ja-JP" sz="2400" dirty="0"/>
+          </a:p>
+          <a:p>
+            <a:r>
+              <a:rPr lang="en-US" altLang="ja-JP" sz="2400" dirty="0"/>
+              <a:t>ON </a:t>
+            </a:r>
+            <a:r>
+              <a:rPr lang="ja-JP" altLang="en-US" sz="2400" dirty="0"/>
+              <a:t>にした後に </a:t>
+            </a:r>
+            <a:r>
+              <a:rPr lang="en-US" altLang="ja-JP" sz="2400" b="1" dirty="0">
+                <a:solidFill>
+                  <a:srgbClr val="FF0000"/>
+                </a:solidFill>
+              </a:rPr>
+              <a:t>Apply </a:t>
+            </a:r>
+            <a:r>
+              <a:rPr lang="ja-JP" altLang="en-US" sz="2400" dirty="0"/>
+              <a:t>を忘れないように押しましょう。</a:t>
+            </a:r>
+            <a:endParaRPr lang="en-US" altLang="ja-JP" sz="2400" dirty="0"/>
           </a:p>
         </p:txBody>
       </p:sp>
       <p:pic>
         <p:nvPicPr>
-          <p:cNvPr id="5" name="図 4">
-            <a:extLst>
-              <a:ext uri="{FF2B5EF4-FFF2-40B4-BE49-F238E27FC236}">
-                <a16:creationId xmlns:a16="http://schemas.microsoft.com/office/drawing/2014/main" id="{E1649DB8-9D09-46A4-9309-36B2FA11747F}"/>
+          <p:cNvPr id="8" name="図 7">
+            <a:extLst>
+              <a:ext uri="{FF2B5EF4-FFF2-40B4-BE49-F238E27FC236}">
+                <a16:creationId xmlns:a16="http://schemas.microsoft.com/office/drawing/2014/main" id="{9112818B-0E57-42D9-B6ED-B399879254FD}"/>
               </a:ext>
             </a:extLst>
           </p:cNvPr>
@@ -11040,18 +11248,122 @@
         </p:blipFill>
         <p:spPr>
           <a:xfrm>
-            <a:off x="567541" y="2187126"/>
-            <a:ext cx="9860891" cy="3299274"/>
+            <a:off x="567542" y="2556458"/>
+            <a:ext cx="2650787" cy="4054782"/>
           </a:xfrm>
           <a:prstGeom prst="rect">
             <a:avLst/>
           </a:prstGeom>
         </p:spPr>
       </p:pic>
+      <p:sp>
+        <p:nvSpPr>
+          <p:cNvPr id="9" name="正方形/長方形 8">
+            <a:extLst>
+              <a:ext uri="{FF2B5EF4-FFF2-40B4-BE49-F238E27FC236}">
+                <a16:creationId xmlns:a16="http://schemas.microsoft.com/office/drawing/2014/main" id="{B3601215-0674-44CF-968F-5D8ABBB86D52}"/>
+              </a:ext>
+            </a:extLst>
+          </p:cNvPr>
+          <p:cNvSpPr/>
+          <p:nvPr/>
+        </p:nvSpPr>
+        <p:spPr>
+          <a:xfrm>
+            <a:off x="619126" y="3493295"/>
+            <a:ext cx="1214438" cy="119062"/>
+          </a:xfrm>
+          <a:prstGeom prst="rect">
+            <a:avLst/>
+          </a:prstGeom>
+          <a:noFill/>
+          <a:ln>
+            <a:solidFill>
+              <a:srgbClr val="FF0000"/>
+            </a:solidFill>
+          </a:ln>
+        </p:spPr>
+        <p:style>
+          <a:lnRef idx="2">
+            <a:schemeClr val="accent1">
+              <a:shade val="50000"/>
+            </a:schemeClr>
+          </a:lnRef>
+          <a:fillRef idx="1">
+            <a:schemeClr val="accent1"/>
+          </a:fillRef>
+          <a:effectRef idx="0">
+            <a:schemeClr val="accent1"/>
+          </a:effectRef>
+          <a:fontRef idx="minor">
+            <a:schemeClr val="lt1"/>
+          </a:fontRef>
+        </p:style>
+        <p:txBody>
+          <a:bodyPr rtlCol="0" anchor="ctr"/>
+          <a:lstStyle/>
+          <a:p>
+            <a:pPr algn="ctr"/>
+            <a:endParaRPr kumimoji="1" lang="ja-JP" altLang="en-US"/>
+          </a:p>
+        </p:txBody>
+      </p:sp>
+      <p:sp>
+        <p:nvSpPr>
+          <p:cNvPr id="10" name="正方形/長方形 9">
+            <a:extLst>
+              <a:ext uri="{FF2B5EF4-FFF2-40B4-BE49-F238E27FC236}">
+                <a16:creationId xmlns:a16="http://schemas.microsoft.com/office/drawing/2014/main" id="{224B8607-30E1-4708-92A4-82CAD9D638D4}"/>
+              </a:ext>
+            </a:extLst>
+          </p:cNvPr>
+          <p:cNvSpPr/>
+          <p:nvPr/>
+        </p:nvSpPr>
+        <p:spPr>
+          <a:xfrm>
+            <a:off x="2871788" y="6429375"/>
+            <a:ext cx="283368" cy="143264"/>
+          </a:xfrm>
+          <a:prstGeom prst="rect">
+            <a:avLst/>
+          </a:prstGeom>
+          <a:noFill/>
+          <a:ln>
+            <a:solidFill>
+              <a:srgbClr val="FF0000"/>
+            </a:solidFill>
+          </a:ln>
+        </p:spPr>
+        <p:style>
+          <a:lnRef idx="2">
+            <a:schemeClr val="accent1">
+              <a:shade val="50000"/>
+            </a:schemeClr>
+          </a:lnRef>
+          <a:fillRef idx="1">
+            <a:schemeClr val="accent1"/>
+          </a:fillRef>
+          <a:effectRef idx="0">
+            <a:schemeClr val="accent1"/>
+          </a:effectRef>
+          <a:fontRef idx="minor">
+            <a:schemeClr val="lt1"/>
+          </a:fontRef>
+        </p:style>
+        <p:txBody>
+          <a:bodyPr rtlCol="0" anchor="ctr"/>
+          <a:lstStyle/>
+          <a:p>
+            <a:pPr algn="ctr"/>
+            <a:endParaRPr kumimoji="1" lang="ja-JP" altLang="en-US"/>
+          </a:p>
+        </p:txBody>
+      </p:sp>
     </p:spTree>
     <p:extLst>
       <p:ext uri="{BB962C8B-B14F-4D97-AF65-F5344CB8AC3E}">
-        <p14:creationId xmlns:p14="http://schemas.microsoft.com/office/powerpoint/2010/main" val="2805435892"/>
+        <p14:creationId xmlns:p14="http://schemas.microsoft.com/office/powerpoint/2010/main" val="613701563"/>
       </p:ext>
     </p:extLst>
   </p:cSld>
@@ -11129,7 +11441,7 @@
         <p:spPr>
           <a:xfrm>
             <a:off x="567542" y="1216429"/>
-            <a:ext cx="8186857" cy="2308324"/>
+            <a:ext cx="11748729" cy="830997"/>
           </a:xfrm>
           <a:prstGeom prst="rect">
             <a:avLst/>
@@ -11143,44 +11455,58 @@
           <a:lstStyle/>
           <a:p>
             <a:r>
+              <a:rPr lang="en-US" altLang="ja-JP" sz="2400" dirty="0"/>
+              <a:t>Prefabs</a:t>
+            </a:r>
+            <a:r>
               <a:rPr lang="ja-JP" altLang="en-US" sz="2400" dirty="0"/>
-              <a:t>以下のような仕組みを作ります。</a:t>
+              <a:t>には、ステージに配置するオブジェクトをプレハブにまとめて保存します。</a:t>
             </a:r>
             <a:endParaRPr lang="en-US" altLang="ja-JP" sz="2400" dirty="0"/>
           </a:p>
           <a:p>
+            <a:r>
+              <a:rPr kumimoji="1" lang="ja-JP" altLang="en-US" sz="2400" dirty="0"/>
+              <a:t>種類が多いときはフォルダ分けしましょう。</a:t>
+            </a:r>
             <a:endParaRPr kumimoji="1" lang="en-US" altLang="ja-JP" sz="2400" dirty="0"/>
           </a:p>
-          <a:p>
-            <a:r>
-              <a:rPr lang="ja-JP" altLang="en-US" sz="2400" dirty="0"/>
-              <a:t>１．プレハブを配置したら自動で配列に登録</a:t>
-            </a:r>
-            <a:endParaRPr lang="en-US" altLang="ja-JP" sz="2400" dirty="0"/>
-          </a:p>
-          <a:p>
-            <a:r>
-              <a:rPr kumimoji="1" lang="ja-JP" altLang="en-US" sz="2400" dirty="0"/>
-              <a:t>２．登録された配列をデータで出力</a:t>
-            </a:r>
-            <a:endParaRPr kumimoji="1" lang="en-US" altLang="ja-JP" sz="2400" dirty="0"/>
-          </a:p>
-          <a:p>
-            <a:endParaRPr lang="en-US" altLang="ja-JP" sz="2400" dirty="0"/>
-          </a:p>
-          <a:p>
-            <a:r>
-              <a:rPr kumimoji="1" lang="ja-JP" altLang="en-US" sz="2400" dirty="0"/>
-              <a:t>まずは自動登録機能を作って各プレハブに付与します。</a:t>
-            </a:r>
-            <a:endParaRPr kumimoji="1" lang="en-US" altLang="ja-JP" sz="2400" dirty="0"/>
-          </a:p>
-        </p:txBody>
-      </p:sp>
+        </p:txBody>
+      </p:sp>
+      <p:pic>
+        <p:nvPicPr>
+          <p:cNvPr id="5" name="図 4">
+            <a:extLst>
+              <a:ext uri="{FF2B5EF4-FFF2-40B4-BE49-F238E27FC236}">
+                <a16:creationId xmlns:a16="http://schemas.microsoft.com/office/drawing/2014/main" id="{E1649DB8-9D09-46A4-9309-36B2FA11747F}"/>
+              </a:ext>
+            </a:extLst>
+          </p:cNvPr>
+          <p:cNvPicPr>
+            <a:picLocks noChangeAspect="1"/>
+          </p:cNvPicPr>
+          <p:nvPr/>
+        </p:nvPicPr>
+        <p:blipFill>
+          <a:blip r:embed="rId2"/>
+          <a:stretch>
+            <a:fillRect/>
+          </a:stretch>
+        </p:blipFill>
+        <p:spPr>
+          <a:xfrm>
+            <a:off x="567541" y="2187126"/>
+            <a:ext cx="9860891" cy="3299274"/>
+          </a:xfrm>
+          <a:prstGeom prst="rect">
+            <a:avLst/>
+          </a:prstGeom>
+        </p:spPr>
+      </p:pic>
     </p:spTree>
     <p:extLst>
       <p:ext uri="{BB962C8B-B14F-4D97-AF65-F5344CB8AC3E}">
-        <p14:creationId xmlns:p14="http://schemas.microsoft.com/office/powerpoint/2010/main" val="2833394570"/>
+        <p14:creationId xmlns:p14="http://schemas.microsoft.com/office/powerpoint/2010/main" val="2805435892"/>
       </p:ext>
     </p:extLst>
   </p:cSld>
@@ -11258,7 +11584,7 @@
         <p:spPr>
           <a:xfrm>
             <a:off x="567542" y="1216429"/>
-            <a:ext cx="7752443" cy="461665"/>
+            <a:ext cx="8186857" cy="2308324"/>
           </a:xfrm>
           <a:prstGeom prst="rect">
             <a:avLst/>
@@ -11272,63 +11598,44 @@
           <a:lstStyle/>
           <a:p>
             <a:r>
-              <a:rPr lang="en-US" altLang="ja-JP" sz="2400" dirty="0"/>
-              <a:t>Scripts</a:t>
-            </a:r>
-            <a:r>
               <a:rPr lang="ja-JP" altLang="en-US" sz="2400" dirty="0"/>
-              <a:t>フォルダに「</a:t>
-            </a:r>
-            <a:r>
-              <a:rPr lang="en-US" altLang="ja-JP" sz="2400" b="1" dirty="0" err="1">
-                <a:solidFill>
-                  <a:srgbClr val="FF0000"/>
-                </a:solidFill>
-              </a:rPr>
-              <a:t>StageObject.cs</a:t>
-            </a:r>
+              <a:t>以下のような仕組みを作ります。</a:t>
+            </a:r>
+            <a:endParaRPr lang="en-US" altLang="ja-JP" sz="2400" dirty="0"/>
+          </a:p>
+          <a:p>
+            <a:endParaRPr kumimoji="1" lang="en-US" altLang="ja-JP" sz="2400" dirty="0"/>
+          </a:p>
+          <a:p>
             <a:r>
               <a:rPr lang="ja-JP" altLang="en-US" sz="2400" dirty="0"/>
-              <a:t>」を追加します。</a:t>
+              <a:t>１．プレハブを配置したら自動で配列に登録</a:t>
+            </a:r>
+            <a:endParaRPr lang="en-US" altLang="ja-JP" sz="2400" dirty="0"/>
+          </a:p>
+          <a:p>
+            <a:r>
+              <a:rPr kumimoji="1" lang="ja-JP" altLang="en-US" sz="2400" dirty="0"/>
+              <a:t>２．登録された配列をデータで出力</a:t>
             </a:r>
             <a:endParaRPr kumimoji="1" lang="en-US" altLang="ja-JP" sz="2400" dirty="0"/>
           </a:p>
-        </p:txBody>
-      </p:sp>
-      <p:pic>
-        <p:nvPicPr>
-          <p:cNvPr id="3" name="図 2">
-            <a:extLst>
-              <a:ext uri="{FF2B5EF4-FFF2-40B4-BE49-F238E27FC236}">
-                <a16:creationId xmlns:a16="http://schemas.microsoft.com/office/drawing/2014/main" id="{B9043259-7491-4CC9-B7B7-68689BB693BD}"/>
-              </a:ext>
-            </a:extLst>
-          </p:cNvPr>
-          <p:cNvPicPr>
-            <a:picLocks noChangeAspect="1"/>
-          </p:cNvPicPr>
-          <p:nvPr/>
-        </p:nvPicPr>
-        <p:blipFill>
-          <a:blip r:embed="rId2"/>
-          <a:stretch>
-            <a:fillRect/>
-          </a:stretch>
-        </p:blipFill>
-        <p:spPr>
-          <a:xfrm>
-            <a:off x="567542" y="1817794"/>
-            <a:ext cx="2510506" cy="3121759"/>
-          </a:xfrm>
-          <a:prstGeom prst="rect">
-            <a:avLst/>
-          </a:prstGeom>
-        </p:spPr>
-      </p:pic>
+          <a:p>
+            <a:endParaRPr lang="en-US" altLang="ja-JP" sz="2400" dirty="0"/>
+          </a:p>
+          <a:p>
+            <a:r>
+              <a:rPr kumimoji="1" lang="ja-JP" altLang="en-US" sz="2400" dirty="0"/>
+              <a:t>まずは自動登録機能を作って各プレハブに付与します。</a:t>
+            </a:r>
+            <a:endParaRPr kumimoji="1" lang="en-US" altLang="ja-JP" sz="2400" dirty="0"/>
+          </a:p>
+        </p:txBody>
+      </p:sp>
     </p:spTree>
     <p:extLst>
       <p:ext uri="{BB962C8B-B14F-4D97-AF65-F5344CB8AC3E}">
-        <p14:creationId xmlns:p14="http://schemas.microsoft.com/office/powerpoint/2010/main" val="1143449723"/>
+        <p14:creationId xmlns:p14="http://schemas.microsoft.com/office/powerpoint/2010/main" val="2833394570"/>
       </p:ext>
     </p:extLst>
   </p:cSld>
